--- a/01_slides/Presentation-MCP-Workshop_german.pptx
+++ b/01_slides/Presentation-MCP-Workshop_german.pptx
@@ -5,30 +5,33 @@
     <p:sldMasterId id="2147483660" r:id="rId1"/>
   </p:sldMasterIdLst>
   <p:notesMasterIdLst>
-    <p:notesMasterId r:id="rId23"/>
+    <p:notesMasterId r:id="rId26"/>
   </p:notesMasterIdLst>
   <p:sldIdLst>
     <p:sldId id="379" r:id="rId2"/>
-    <p:sldId id="380" r:id="rId3"/>
-    <p:sldId id="381" r:id="rId4"/>
-    <p:sldId id="382" r:id="rId5"/>
-    <p:sldId id="383" r:id="rId6"/>
-    <p:sldId id="384" r:id="rId7"/>
-    <p:sldId id="385" r:id="rId8"/>
-    <p:sldId id="386" r:id="rId9"/>
-    <p:sldId id="387" r:id="rId10"/>
-    <p:sldId id="388" r:id="rId11"/>
-    <p:sldId id="389" r:id="rId12"/>
-    <p:sldId id="390" r:id="rId13"/>
-    <p:sldId id="391" r:id="rId14"/>
-    <p:sldId id="392" r:id="rId15"/>
-    <p:sldId id="393" r:id="rId16"/>
-    <p:sldId id="394" r:id="rId17"/>
-    <p:sldId id="395" r:id="rId18"/>
-    <p:sldId id="378" r:id="rId19"/>
-    <p:sldId id="396" r:id="rId20"/>
-    <p:sldId id="397" r:id="rId21"/>
-    <p:sldId id="372" r:id="rId22"/>
+    <p:sldId id="408" r:id="rId3"/>
+    <p:sldId id="380" r:id="rId4"/>
+    <p:sldId id="381" r:id="rId5"/>
+    <p:sldId id="382" r:id="rId6"/>
+    <p:sldId id="383" r:id="rId7"/>
+    <p:sldId id="384" r:id="rId8"/>
+    <p:sldId id="385" r:id="rId9"/>
+    <p:sldId id="386" r:id="rId10"/>
+    <p:sldId id="387" r:id="rId11"/>
+    <p:sldId id="388" r:id="rId12"/>
+    <p:sldId id="389" r:id="rId13"/>
+    <p:sldId id="390" r:id="rId14"/>
+    <p:sldId id="391" r:id="rId15"/>
+    <p:sldId id="392" r:id="rId16"/>
+    <p:sldId id="393" r:id="rId17"/>
+    <p:sldId id="394" r:id="rId18"/>
+    <p:sldId id="395" r:id="rId19"/>
+    <p:sldId id="411" r:id="rId20"/>
+    <p:sldId id="412" r:id="rId21"/>
+    <p:sldId id="378" r:id="rId22"/>
+    <p:sldId id="396" r:id="rId23"/>
+    <p:sldId id="397" r:id="rId24"/>
+    <p:sldId id="372" r:id="rId25"/>
   </p:sldIdLst>
   <p:sldSz cx="12192000" cy="6858000"/>
   <p:notesSz cx="6858000" cy="9144000"/>
@@ -217,7 +220,7 @@
           <a:p>
             <a:fld id="{788E3338-7B45-B94D-873E-3261FA356F51}" type="datetimeFigureOut">
               <a:rPr lang="en-US" smtClean="0"/>
-              <a:t>9/7/26</a:t>
+              <a:t>9/9/26</a:t>
             </a:fld>
             <a:endParaRPr lang="en-US"/>
           </a:p>
@@ -1787,7 +1790,7 @@
           <a:p>
             <a:fld id="{36128C04-008D-DD41-8146-139355351F88}" type="datetimeFigureOut">
               <a:rPr lang="en-US" smtClean="0"/>
-              <a:t>9/7/26</a:t>
+              <a:t>9/9/26</a:t>
             </a:fld>
             <a:endParaRPr lang="en-US"/>
           </a:p>
@@ -1985,7 +1988,7 @@
           <a:p>
             <a:fld id="{36128C04-008D-DD41-8146-139355351F88}" type="datetimeFigureOut">
               <a:rPr lang="en-US" smtClean="0"/>
-              <a:t>9/7/26</a:t>
+              <a:t>9/9/26</a:t>
             </a:fld>
             <a:endParaRPr lang="en-US"/>
           </a:p>
@@ -2193,7 +2196,7 @@
           <a:p>
             <a:fld id="{36128C04-008D-DD41-8146-139355351F88}" type="datetimeFigureOut">
               <a:rPr lang="en-US" smtClean="0"/>
-              <a:t>9/7/26</a:t>
+              <a:t>9/9/26</a:t>
             </a:fld>
             <a:endParaRPr lang="en-US"/>
           </a:p>
@@ -2391,7 +2394,7 @@
           <a:p>
             <a:fld id="{36128C04-008D-DD41-8146-139355351F88}" type="datetimeFigureOut">
               <a:rPr lang="en-US" smtClean="0"/>
-              <a:t>9/7/26</a:t>
+              <a:t>9/9/26</a:t>
             </a:fld>
             <a:endParaRPr lang="en-US"/>
           </a:p>
@@ -2666,7 +2669,7 @@
           <a:p>
             <a:fld id="{36128C04-008D-DD41-8146-139355351F88}" type="datetimeFigureOut">
               <a:rPr lang="en-US" smtClean="0"/>
-              <a:t>9/7/26</a:t>
+              <a:t>9/9/26</a:t>
             </a:fld>
             <a:endParaRPr lang="en-US"/>
           </a:p>
@@ -2931,7 +2934,7 @@
           <a:p>
             <a:fld id="{36128C04-008D-DD41-8146-139355351F88}" type="datetimeFigureOut">
               <a:rPr lang="en-US" smtClean="0"/>
-              <a:t>9/7/26</a:t>
+              <a:t>9/9/26</a:t>
             </a:fld>
             <a:endParaRPr lang="en-US"/>
           </a:p>
@@ -3343,7 +3346,7 @@
           <a:p>
             <a:fld id="{36128C04-008D-DD41-8146-139355351F88}" type="datetimeFigureOut">
               <a:rPr lang="en-US" smtClean="0"/>
-              <a:t>9/7/26</a:t>
+              <a:t>9/9/26</a:t>
             </a:fld>
             <a:endParaRPr lang="en-US"/>
           </a:p>
@@ -3484,7 +3487,7 @@
           <a:p>
             <a:fld id="{36128C04-008D-DD41-8146-139355351F88}" type="datetimeFigureOut">
               <a:rPr lang="en-US" smtClean="0"/>
-              <a:t>9/7/26</a:t>
+              <a:t>9/9/26</a:t>
             </a:fld>
             <a:endParaRPr lang="en-US"/>
           </a:p>
@@ -3597,7 +3600,7 @@
           <a:p>
             <a:fld id="{36128C04-008D-DD41-8146-139355351F88}" type="datetimeFigureOut">
               <a:rPr lang="en-US" smtClean="0"/>
-              <a:t>9/7/26</a:t>
+              <a:t>9/9/26</a:t>
             </a:fld>
             <a:endParaRPr lang="en-US"/>
           </a:p>
@@ -3908,7 +3911,7 @@
           <a:p>
             <a:fld id="{36128C04-008D-DD41-8146-139355351F88}" type="datetimeFigureOut">
               <a:rPr lang="en-US" smtClean="0"/>
-              <a:t>9/7/26</a:t>
+              <a:t>9/9/26</a:t>
             </a:fld>
             <a:endParaRPr lang="en-US"/>
           </a:p>
@@ -4196,7 +4199,7 @@
           <a:p>
             <a:fld id="{36128C04-008D-DD41-8146-139355351F88}" type="datetimeFigureOut">
               <a:rPr lang="en-US" smtClean="0"/>
-              <a:t>9/7/26</a:t>
+              <a:t>9/9/26</a:t>
             </a:fld>
             <a:endParaRPr lang="en-US"/>
           </a:p>
@@ -4440,7 +4443,7 @@
           <a:p>
             <a:fld id="{36128C04-008D-DD41-8146-139355351F88}" type="datetimeFigureOut">
               <a:rPr lang="en-US" smtClean="0"/>
-              <a:t>9/7/26</a:t>
+              <a:t>9/9/26</a:t>
             </a:fld>
             <a:endParaRPr lang="en-US"/>
           </a:p>
@@ -4930,8 +4933,53 @@
                   <a:srgbClr val="B1063A"/>
                 </a:solidFill>
               </a:rPr>
-              <a:t>MCP in der Praxis: Use Cases finden und Server sicher prüfen</a:t>
-            </a:r>
+              <a:t>MCP in der Praxis: </a:t>
+            </a:r>
+            <a:r>
+              <a:rPr lang="en-US" sz="2200" dirty="0" err="1">
+                <a:solidFill>
+                  <a:srgbClr val="B1063A"/>
+                </a:solidFill>
+              </a:rPr>
+              <a:t>Anwendungen</a:t>
+            </a:r>
+            <a:r>
+              <a:rPr lang="en-US" sz="2200" dirty="0">
+                <a:solidFill>
+                  <a:srgbClr val="B1063A"/>
+                </a:solidFill>
+              </a:rPr>
+              <a:t> </a:t>
+            </a:r>
+            <a:r>
+              <a:rPr lang="en-US" sz="2200" dirty="0" err="1">
+                <a:solidFill>
+                  <a:srgbClr val="B1063A"/>
+                </a:solidFill>
+              </a:rPr>
+              <a:t>finden</a:t>
+            </a:r>
+            <a:r>
+              <a:rPr lang="en-US" sz="2200" dirty="0">
+                <a:solidFill>
+                  <a:srgbClr val="B1063A"/>
+                </a:solidFill>
+              </a:rPr>
+              <a:t> und Server auf Sicherheit </a:t>
+            </a:r>
+            <a:r>
+              <a:rPr lang="en-US" sz="2200" dirty="0" err="1">
+                <a:solidFill>
+                  <a:srgbClr val="B1063A"/>
+                </a:solidFill>
+              </a:rPr>
+              <a:t>überprüfen</a:t>
+            </a:r>
+            <a:endParaRPr lang="en-US" sz="2200" dirty="0">
+              <a:solidFill>
+                <a:srgbClr val="B1063A"/>
+              </a:solidFill>
+            </a:endParaRPr>
           </a:p>
         </p:txBody>
       </p:sp>
@@ -5189,6 +5237,985 @@
           <p:cNvPr id="2" name="Title 1">
             <a:extLst>
               <a:ext uri="{FF2B5EF4-FFF2-40B4-BE49-F238E27FC236}">
+                <a16:creationId xmlns:a16="http://schemas.microsoft.com/office/drawing/2014/main" id="{66EA4D95-D639-3157-E210-0CFF28D16A73}"/>
+              </a:ext>
+            </a:extLst>
+          </p:cNvPr>
+          <p:cNvSpPr>
+            <a:spLocks noGrp="1"/>
+          </p:cNvSpPr>
+          <p:nvPr>
+            <p:ph type="title"/>
+          </p:nvPr>
+        </p:nvSpPr>
+        <p:spPr>
+          <a:xfrm>
+            <a:off x="762000" y="457200"/>
+            <a:ext cx="10668000" cy="711200"/>
+          </a:xfrm>
+        </p:spPr>
+        <p:txBody>
+          <a:bodyPr anchor="t" anchorCtr="0"/>
+          <a:lstStyle/>
+          <a:p>
+            <a:pPr algn="l">
+              <a:buNone/>
+            </a:pPr>
+            <a:r>
+              <a:rPr lang="en-US" sz="3000" b="1" dirty="0">
+                <a:solidFill>
+                  <a:srgbClr val="B1063A"/>
+                </a:solidFill>
+              </a:rPr>
+              <a:t>Was </a:t>
+            </a:r>
+            <a:r>
+              <a:rPr lang="en-US" sz="3000" b="1" dirty="0" err="1">
+                <a:solidFill>
+                  <a:srgbClr val="B1063A"/>
+                </a:solidFill>
+              </a:rPr>
+              <a:t>kann</a:t>
+            </a:r>
+            <a:r>
+              <a:rPr lang="en-US" sz="3000" b="1" dirty="0">
+                <a:solidFill>
+                  <a:srgbClr val="B1063A"/>
+                </a:solidFill>
+              </a:rPr>
+              <a:t> </a:t>
+            </a:r>
+            <a:r>
+              <a:rPr lang="en-US" sz="3000" b="1" dirty="0" err="1">
+                <a:solidFill>
+                  <a:srgbClr val="B1063A"/>
+                </a:solidFill>
+              </a:rPr>
+              <a:t>passieren</a:t>
+            </a:r>
+            <a:r>
+              <a:rPr lang="en-US" sz="3000" b="1" dirty="0">
+                <a:solidFill>
+                  <a:srgbClr val="B1063A"/>
+                </a:solidFill>
+              </a:rPr>
+              <a:t>?</a:t>
+            </a:r>
+          </a:p>
+        </p:txBody>
+      </p:sp>
+      <p:sp>
+        <p:nvSpPr>
+          <p:cNvPr id="100" name="Rule"/>
+          <p:cNvSpPr txBox="1"/>
+          <p:nvPr/>
+        </p:nvSpPr>
+        <p:spPr>
+          <a:xfrm>
+            <a:off x="762000" y="1244600"/>
+            <a:ext cx="762000" cy="38100"/>
+          </a:xfrm>
+          <a:prstGeom prst="rect">
+            <a:avLst/>
+          </a:prstGeom>
+          <a:solidFill>
+            <a:srgbClr val="B1063A"/>
+          </a:solidFill>
+          <a:ln>
+            <a:noFill/>
+          </a:ln>
+        </p:spPr>
+        <p:txBody>
+          <a:bodyPr wrap="square" lIns="91440" tIns="45720" rIns="91440" bIns="45720" anchor="t"/>
+          <a:lstStyle/>
+          <a:p>
+            <a:endParaRPr/>
+          </a:p>
+        </p:txBody>
+      </p:sp>
+      <p:sp>
+        <p:nvSpPr>
+          <p:cNvPr id="101" name="Card0"/>
+          <p:cNvSpPr txBox="1"/>
+          <p:nvPr/>
+        </p:nvSpPr>
+        <p:spPr>
+          <a:xfrm>
+            <a:off x="762000" y="1651000"/>
+            <a:ext cx="10668000" cy="1041400"/>
+          </a:xfrm>
+          <a:prstGeom prst="roundRect">
+            <a:avLst/>
+          </a:prstGeom>
+          <a:solidFill>
+            <a:srgbClr val="F4F4F4"/>
+          </a:solidFill>
+          <a:ln>
+            <a:noFill/>
+          </a:ln>
+        </p:spPr>
+        <p:txBody>
+          <a:bodyPr wrap="square" lIns="91440" tIns="45720" rIns="91440" bIns="45720" anchor="t"/>
+          <a:lstStyle/>
+          <a:p>
+            <a:endParaRPr/>
+          </a:p>
+        </p:txBody>
+      </p:sp>
+      <p:sp>
+        <p:nvSpPr>
+          <p:cNvPr id="102" name="Bar0"/>
+          <p:cNvSpPr txBox="1"/>
+          <p:nvPr/>
+        </p:nvSpPr>
+        <p:spPr>
+          <a:xfrm>
+            <a:off x="762000" y="1651000"/>
+            <a:ext cx="101600" cy="1041400"/>
+          </a:xfrm>
+          <a:prstGeom prst="rect">
+            <a:avLst/>
+          </a:prstGeom>
+          <a:solidFill>
+            <a:srgbClr val="BFBFBF"/>
+          </a:solidFill>
+          <a:ln>
+            <a:noFill/>
+          </a:ln>
+        </p:spPr>
+        <p:txBody>
+          <a:bodyPr wrap="square" lIns="91440" tIns="45720" rIns="91440" bIns="45720" anchor="t"/>
+          <a:lstStyle/>
+          <a:p>
+            <a:endParaRPr/>
+          </a:p>
+        </p:txBody>
+      </p:sp>
+      <p:sp>
+        <p:nvSpPr>
+          <p:cNvPr id="103" name="Head0"/>
+          <p:cNvSpPr txBox="1"/>
+          <p:nvPr/>
+        </p:nvSpPr>
+        <p:spPr>
+          <a:xfrm>
+            <a:off x="1066800" y="1752600"/>
+            <a:ext cx="6604000" cy="304800"/>
+          </a:xfrm>
+          <a:prstGeom prst="rect">
+            <a:avLst/>
+          </a:prstGeom>
+          <a:noFill/>
+          <a:ln>
+            <a:noFill/>
+          </a:ln>
+        </p:spPr>
+        <p:txBody>
+          <a:bodyPr wrap="square" lIns="0" tIns="45720" rIns="0" bIns="45720" anchor="t"/>
+          <a:lstStyle/>
+          <a:p>
+            <a:pPr>
+              <a:buNone/>
+            </a:pPr>
+            <a:r>
+              <a:rPr lang="en-US" sz="1500" b="1" dirty="0">
+                <a:solidFill>
+                  <a:srgbClr val="1A1A1A"/>
+                </a:solidFill>
+              </a:rPr>
+              <a:t>Mai 2025 · GitHub MCP</a:t>
+            </a:r>
+            <a:r>
+              <a:rPr lang="en-US" sz="1300" i="1" dirty="0">
+                <a:solidFill>
+                  <a:srgbClr val="6E6E6E"/>
+                </a:solidFill>
+              </a:rPr>
+              <a:t>   demonstriert</a:t>
+            </a:r>
+          </a:p>
+        </p:txBody>
+      </p:sp>
+      <p:sp>
+        <p:nvSpPr>
+          <p:cNvPr id="104" name="Body0"/>
+          <p:cNvSpPr txBox="1"/>
+          <p:nvPr/>
+        </p:nvSpPr>
+        <p:spPr>
+          <a:xfrm>
+            <a:off x="1066800" y="2082800"/>
+            <a:ext cx="6604000" cy="558800"/>
+          </a:xfrm>
+          <a:prstGeom prst="rect">
+            <a:avLst/>
+          </a:prstGeom>
+          <a:noFill/>
+          <a:ln>
+            <a:noFill/>
+          </a:ln>
+        </p:spPr>
+        <p:txBody>
+          <a:bodyPr wrap="square" lIns="0" tIns="45720" rIns="0" bIns="45720" anchor="t"/>
+          <a:lstStyle/>
+          <a:p>
+            <a:pPr>
+              <a:buNone/>
+            </a:pPr>
+            <a:r>
+              <a:rPr lang="en-US" sz="1400" dirty="0">
+                <a:solidFill>
+                  <a:srgbClr val="3C3C3C"/>
+                </a:solidFill>
+              </a:rPr>
+              <a:t>Ein bösartiges öffentliches Issue bringt einen Agent dazu, Daten aus einem privaten Repo in einen öffentlichen Pull Request zu kopieren.</a:t>
+            </a:r>
+          </a:p>
+        </p:txBody>
+      </p:sp>
+      <p:sp>
+        <p:nvSpPr>
+          <p:cNvPr id="105" name="Tag0"/>
+          <p:cNvSpPr txBox="1"/>
+          <p:nvPr/>
+        </p:nvSpPr>
+        <p:spPr>
+          <a:xfrm>
+            <a:off x="8001000" y="1803400"/>
+            <a:ext cx="3251200" cy="736600"/>
+          </a:xfrm>
+          <a:prstGeom prst="rect">
+            <a:avLst/>
+          </a:prstGeom>
+          <a:noFill/>
+          <a:ln>
+            <a:noFill/>
+          </a:ln>
+        </p:spPr>
+        <p:txBody>
+          <a:bodyPr wrap="square" lIns="0" tIns="45720" rIns="0" bIns="45720" anchor="ctr"/>
+          <a:lstStyle/>
+          <a:p>
+            <a:pPr>
+              <a:buNone/>
+            </a:pPr>
+            <a:r>
+              <a:rPr lang="en-US" sz="1400" b="1" dirty="0">
+                <a:solidFill>
+                  <a:srgbClr val="B1063A"/>
+                </a:solidFill>
+              </a:rPr>
+              <a:t>Prompt Injection + zu weit gefasstes Token</a:t>
+            </a:r>
+          </a:p>
+          <a:p>
+            <a:pPr>
+              <a:buNone/>
+            </a:pPr>
+            <a:r>
+              <a:rPr lang="en-US" sz="1200" dirty="0">
+                <a:solidFill>
+                  <a:srgbClr val="6E6E6E"/>
+                </a:solidFill>
+              </a:rPr>
+              <a:t>Quelle: Invariant Labs</a:t>
+            </a:r>
+          </a:p>
+          <a:p>
+            <a:pPr>
+              <a:buNone/>
+            </a:pPr>
+            <a:r>
+              <a:rPr lang="en-US" sz="1000" dirty="0">
+                <a:solidFill>
+                  <a:srgbClr val="6E6E6E"/>
+                </a:solidFill>
+              </a:rPr>
+              <a:t>https://</a:t>
+            </a:r>
+            <a:r>
+              <a:rPr lang="en-US" sz="1000" dirty="0" err="1">
+                <a:solidFill>
+                  <a:srgbClr val="6E6E6E"/>
+                </a:solidFill>
+              </a:rPr>
+              <a:t>invariantlabs.ai</a:t>
+            </a:r>
+            <a:r>
+              <a:rPr lang="en-US" sz="1000" dirty="0">
+                <a:solidFill>
+                  <a:srgbClr val="6E6E6E"/>
+                </a:solidFill>
+              </a:rPr>
+              <a:t>/blog/</a:t>
+            </a:r>
+            <a:r>
+              <a:rPr lang="en-US" sz="1000" dirty="0" err="1">
+                <a:solidFill>
+                  <a:srgbClr val="6E6E6E"/>
+                </a:solidFill>
+              </a:rPr>
+              <a:t>mcp</a:t>
+            </a:r>
+            <a:r>
+              <a:rPr lang="en-US" sz="1000" dirty="0">
+                <a:solidFill>
+                  <a:srgbClr val="6E6E6E"/>
+                </a:solidFill>
+              </a:rPr>
+              <a:t>-</a:t>
+            </a:r>
+            <a:r>
+              <a:rPr lang="en-US" sz="1000" dirty="0" err="1">
+                <a:solidFill>
+                  <a:srgbClr val="6E6E6E"/>
+                </a:solidFill>
+              </a:rPr>
+              <a:t>github</a:t>
+            </a:r>
+            <a:r>
+              <a:rPr lang="en-US" sz="1000" dirty="0">
+                <a:solidFill>
+                  <a:srgbClr val="6E6E6E"/>
+                </a:solidFill>
+              </a:rPr>
+              <a:t>-vulnerability</a:t>
+            </a:r>
+          </a:p>
+        </p:txBody>
+      </p:sp>
+      <p:sp>
+        <p:nvSpPr>
+          <p:cNvPr id="106" name="Card1"/>
+          <p:cNvSpPr txBox="1"/>
+          <p:nvPr/>
+        </p:nvSpPr>
+        <p:spPr>
+          <a:xfrm>
+            <a:off x="762000" y="2819400"/>
+            <a:ext cx="10668000" cy="1041400"/>
+          </a:xfrm>
+          <a:prstGeom prst="roundRect">
+            <a:avLst/>
+          </a:prstGeom>
+          <a:solidFill>
+            <a:srgbClr val="F4F4F4"/>
+          </a:solidFill>
+          <a:ln>
+            <a:noFill/>
+          </a:ln>
+        </p:spPr>
+        <p:txBody>
+          <a:bodyPr wrap="square" lIns="91440" tIns="45720" rIns="91440" bIns="45720" anchor="t"/>
+          <a:lstStyle/>
+          <a:p>
+            <a:endParaRPr/>
+          </a:p>
+        </p:txBody>
+      </p:sp>
+      <p:sp>
+        <p:nvSpPr>
+          <p:cNvPr id="107" name="Bar1"/>
+          <p:cNvSpPr txBox="1"/>
+          <p:nvPr/>
+        </p:nvSpPr>
+        <p:spPr>
+          <a:xfrm>
+            <a:off x="762000" y="2819400"/>
+            <a:ext cx="101600" cy="1041400"/>
+          </a:xfrm>
+          <a:prstGeom prst="rect">
+            <a:avLst/>
+          </a:prstGeom>
+          <a:solidFill>
+            <a:srgbClr val="B1063A"/>
+          </a:solidFill>
+          <a:ln>
+            <a:noFill/>
+          </a:ln>
+        </p:spPr>
+        <p:txBody>
+          <a:bodyPr wrap="square" lIns="91440" tIns="45720" rIns="91440" bIns="45720" anchor="t"/>
+          <a:lstStyle/>
+          <a:p>
+            <a:endParaRPr/>
+          </a:p>
+        </p:txBody>
+      </p:sp>
+      <p:sp>
+        <p:nvSpPr>
+          <p:cNvPr id="108" name="Head1"/>
+          <p:cNvSpPr txBox="1"/>
+          <p:nvPr/>
+        </p:nvSpPr>
+        <p:spPr>
+          <a:xfrm>
+            <a:off x="1066800" y="2921000"/>
+            <a:ext cx="6604000" cy="304800"/>
+          </a:xfrm>
+          <a:prstGeom prst="rect">
+            <a:avLst/>
+          </a:prstGeom>
+          <a:noFill/>
+          <a:ln>
+            <a:noFill/>
+          </a:ln>
+        </p:spPr>
+        <p:txBody>
+          <a:bodyPr wrap="square" lIns="0" tIns="45720" rIns="0" bIns="45720" anchor="t"/>
+          <a:lstStyle/>
+          <a:p>
+            <a:pPr>
+              <a:buNone/>
+            </a:pPr>
+            <a:r>
+              <a:rPr lang="en-US" sz="1500" b="1" dirty="0">
+                <a:solidFill>
+                  <a:srgbClr val="1A1A1A"/>
+                </a:solidFill>
+              </a:rPr>
+              <a:t>Sep. 2025 · postmark-mcp</a:t>
+            </a:r>
+            <a:r>
+              <a:rPr lang="en-US" sz="1300" i="1" dirty="0">
+                <a:solidFill>
+                  <a:srgbClr val="B1063A"/>
+                </a:solidFill>
+              </a:rPr>
+              <a:t>   in der Praxis</a:t>
+            </a:r>
+          </a:p>
+        </p:txBody>
+      </p:sp>
+      <p:sp>
+        <p:nvSpPr>
+          <p:cNvPr id="109" name="Body1"/>
+          <p:cNvSpPr txBox="1"/>
+          <p:nvPr/>
+        </p:nvSpPr>
+        <p:spPr>
+          <a:xfrm>
+            <a:off x="1066800" y="3251200"/>
+            <a:ext cx="6604000" cy="558800"/>
+          </a:xfrm>
+          <a:prstGeom prst="rect">
+            <a:avLst/>
+          </a:prstGeom>
+          <a:noFill/>
+          <a:ln>
+            <a:noFill/>
+          </a:ln>
+        </p:spPr>
+        <p:txBody>
+          <a:bodyPr wrap="square" lIns="0" tIns="45720" rIns="0" bIns="45720" anchor="t"/>
+          <a:lstStyle/>
+          <a:p>
+            <a:pPr>
+              <a:buNone/>
+            </a:pPr>
+            <a:r>
+              <a:rPr lang="en-US" sz="1400" dirty="0">
+                <a:solidFill>
+                  <a:srgbClr val="3C3C3C"/>
+                </a:solidFill>
+              </a:rPr>
+              <a:t>Ein gefälschter E-Mail-Server verhält sich monatelang unauffällig, dann schickt er still jede E-Mail per BCC an </a:t>
+            </a:r>
+            <a:r>
+              <a:rPr lang="en-US" sz="1400" dirty="0" err="1">
+                <a:solidFill>
+                  <a:srgbClr val="3C3C3C"/>
+                </a:solidFill>
+              </a:rPr>
+              <a:t>eine</a:t>
+            </a:r>
+            <a:r>
+              <a:rPr lang="en-US" sz="1400" dirty="0">
+                <a:solidFill>
+                  <a:srgbClr val="3C3C3C"/>
+                </a:solidFill>
+              </a:rPr>
+              <a:t> externe </a:t>
+            </a:r>
+            <a:r>
+              <a:rPr lang="en-US" sz="1400" dirty="0" err="1">
+                <a:solidFill>
+                  <a:srgbClr val="3C3C3C"/>
+                </a:solidFill>
+              </a:rPr>
+              <a:t>Adresse</a:t>
+            </a:r>
+            <a:r>
+              <a:rPr lang="en-US" sz="1400" dirty="0">
+                <a:solidFill>
+                  <a:srgbClr val="3C3C3C"/>
+                </a:solidFill>
+              </a:rPr>
+              <a:t>.</a:t>
+            </a:r>
+          </a:p>
+        </p:txBody>
+      </p:sp>
+      <p:sp>
+        <p:nvSpPr>
+          <p:cNvPr id="110" name="Tag1"/>
+          <p:cNvSpPr txBox="1"/>
+          <p:nvPr/>
+        </p:nvSpPr>
+        <p:spPr>
+          <a:xfrm>
+            <a:off x="8001000" y="2971800"/>
+            <a:ext cx="3251200" cy="736600"/>
+          </a:xfrm>
+          <a:prstGeom prst="rect">
+            <a:avLst/>
+          </a:prstGeom>
+          <a:noFill/>
+          <a:ln>
+            <a:noFill/>
+          </a:ln>
+        </p:spPr>
+        <p:txBody>
+          <a:bodyPr wrap="square" lIns="0" tIns="45720" rIns="0" bIns="45720" anchor="ctr"/>
+          <a:lstStyle/>
+          <a:p>
+            <a:pPr>
+              <a:buNone/>
+            </a:pPr>
+            <a:r>
+              <a:rPr lang="en-US" sz="1400" b="1" dirty="0">
+                <a:solidFill>
+                  <a:srgbClr val="B1063A"/>
+                </a:solidFill>
+              </a:rPr>
+              <a:t>Supply Chain</a:t>
+            </a:r>
+          </a:p>
+          <a:p>
+            <a:pPr>
+              <a:buNone/>
+            </a:pPr>
+            <a:r>
+              <a:rPr lang="en-US" sz="1200" dirty="0">
+                <a:solidFill>
+                  <a:srgbClr val="6E6E6E"/>
+                </a:solidFill>
+              </a:rPr>
+              <a:t>Quelle: Koi Security</a:t>
+            </a:r>
+          </a:p>
+          <a:p>
+            <a:r>
+              <a:rPr lang="en-US" sz="1000" dirty="0">
+                <a:solidFill>
+                  <a:schemeClr val="accent6"/>
+                </a:solidFill>
+              </a:rPr>
+              <a:t>https://</a:t>
+            </a:r>
+            <a:r>
+              <a:rPr lang="en-US" sz="1000" dirty="0" err="1">
+                <a:solidFill>
+                  <a:schemeClr val="accent6"/>
+                </a:solidFill>
+              </a:rPr>
+              <a:t>thehackernews.com</a:t>
+            </a:r>
+            <a:r>
+              <a:rPr lang="en-US" sz="1000" dirty="0">
+                <a:solidFill>
+                  <a:schemeClr val="accent6"/>
+                </a:solidFill>
+              </a:rPr>
+              <a:t>/2025/09/first-malicious-</a:t>
+            </a:r>
+            <a:r>
+              <a:rPr lang="en-US" sz="1000" dirty="0" err="1">
+                <a:solidFill>
+                  <a:schemeClr val="accent6"/>
+                </a:solidFill>
+              </a:rPr>
+              <a:t>mcp</a:t>
+            </a:r>
+            <a:r>
+              <a:rPr lang="en-US" sz="1000" dirty="0">
+                <a:solidFill>
+                  <a:schemeClr val="accent6"/>
+                </a:solidFill>
+              </a:rPr>
+              <a:t>-server-</a:t>
+            </a:r>
+            <a:r>
+              <a:rPr lang="en-US" sz="1000" dirty="0" err="1">
+                <a:solidFill>
+                  <a:schemeClr val="accent6"/>
+                </a:solidFill>
+              </a:rPr>
+              <a:t>found.html</a:t>
+            </a:r>
+            <a:endParaRPr lang="en-US" sz="1000" dirty="0">
+              <a:solidFill>
+                <a:schemeClr val="accent6"/>
+              </a:solidFill>
+            </a:endParaRPr>
+          </a:p>
+          <a:p>
+            <a:pPr>
+              <a:buNone/>
+            </a:pPr>
+            <a:endParaRPr lang="en-US" sz="1200" dirty="0">
+              <a:solidFill>
+                <a:srgbClr val="6E6E6E"/>
+              </a:solidFill>
+            </a:endParaRPr>
+          </a:p>
+        </p:txBody>
+      </p:sp>
+      <p:sp>
+        <p:nvSpPr>
+          <p:cNvPr id="111" name="Card2"/>
+          <p:cNvSpPr txBox="1"/>
+          <p:nvPr/>
+        </p:nvSpPr>
+        <p:spPr>
+          <a:xfrm>
+            <a:off x="762000" y="3987800"/>
+            <a:ext cx="10668000" cy="1041400"/>
+          </a:xfrm>
+          <a:prstGeom prst="roundRect">
+            <a:avLst/>
+          </a:prstGeom>
+          <a:solidFill>
+            <a:srgbClr val="F4F4F4"/>
+          </a:solidFill>
+          <a:ln>
+            <a:noFill/>
+          </a:ln>
+        </p:spPr>
+        <p:txBody>
+          <a:bodyPr wrap="square" lIns="91440" tIns="45720" rIns="91440" bIns="45720" anchor="t"/>
+          <a:lstStyle/>
+          <a:p>
+            <a:endParaRPr/>
+          </a:p>
+        </p:txBody>
+      </p:sp>
+      <p:sp>
+        <p:nvSpPr>
+          <p:cNvPr id="112" name="Bar2"/>
+          <p:cNvSpPr txBox="1"/>
+          <p:nvPr/>
+        </p:nvSpPr>
+        <p:spPr>
+          <a:xfrm>
+            <a:off x="762000" y="3987800"/>
+            <a:ext cx="101600" cy="1041400"/>
+          </a:xfrm>
+          <a:prstGeom prst="rect">
+            <a:avLst/>
+          </a:prstGeom>
+          <a:solidFill>
+            <a:srgbClr val="B1063A"/>
+          </a:solidFill>
+          <a:ln>
+            <a:noFill/>
+          </a:ln>
+        </p:spPr>
+        <p:txBody>
+          <a:bodyPr wrap="square" lIns="91440" tIns="45720" rIns="91440" bIns="45720" anchor="t"/>
+          <a:lstStyle/>
+          <a:p>
+            <a:endParaRPr/>
+          </a:p>
+        </p:txBody>
+      </p:sp>
+      <p:sp>
+        <p:nvSpPr>
+          <p:cNvPr id="113" name="Head2"/>
+          <p:cNvSpPr txBox="1"/>
+          <p:nvPr/>
+        </p:nvSpPr>
+        <p:spPr>
+          <a:xfrm>
+            <a:off x="1066800" y="4089400"/>
+            <a:ext cx="6604000" cy="304800"/>
+          </a:xfrm>
+          <a:prstGeom prst="rect">
+            <a:avLst/>
+          </a:prstGeom>
+          <a:noFill/>
+          <a:ln>
+            <a:noFill/>
+          </a:ln>
+        </p:spPr>
+        <p:txBody>
+          <a:bodyPr wrap="square" lIns="0" tIns="45720" rIns="0" bIns="45720" anchor="t"/>
+          <a:lstStyle/>
+          <a:p>
+            <a:pPr>
+              <a:buNone/>
+            </a:pPr>
+            <a:r>
+              <a:rPr lang="en-US" sz="1500" b="1" dirty="0">
+                <a:solidFill>
+                  <a:srgbClr val="1A1A1A"/>
+                </a:solidFill>
+              </a:rPr>
+              <a:t>2025 · MCPoison · CVE-2025-54136</a:t>
+            </a:r>
+            <a:r>
+              <a:rPr lang="en-US" sz="1300" i="1" dirty="0">
+                <a:solidFill>
+                  <a:srgbClr val="B1063A"/>
+                </a:solidFill>
+              </a:rPr>
+              <a:t>   in der Praxis</a:t>
+            </a:r>
+          </a:p>
+        </p:txBody>
+      </p:sp>
+      <p:sp>
+        <p:nvSpPr>
+          <p:cNvPr id="114" name="Body2"/>
+          <p:cNvSpPr txBox="1"/>
+          <p:nvPr/>
+        </p:nvSpPr>
+        <p:spPr>
+          <a:xfrm>
+            <a:off x="1066800" y="4419600"/>
+            <a:ext cx="6604000" cy="558800"/>
+          </a:xfrm>
+          <a:prstGeom prst="rect">
+            <a:avLst/>
+          </a:prstGeom>
+          <a:noFill/>
+          <a:ln>
+            <a:noFill/>
+          </a:ln>
+        </p:spPr>
+        <p:txBody>
+          <a:bodyPr wrap="square" lIns="0" tIns="45720" rIns="0" bIns="45720" anchor="t"/>
+          <a:lstStyle/>
+          <a:p>
+            <a:pPr>
+              <a:buNone/>
+            </a:pPr>
+            <a:r>
+              <a:rPr lang="en-US" sz="1400" dirty="0">
+                <a:solidFill>
+                  <a:srgbClr val="3C3C3C"/>
+                </a:solidFill>
+              </a:rPr>
+              <a:t>Eine bereits genehmigte MCP-Config wird nachträglich verändert; Code läuft ohne erneute Freigabe.</a:t>
+            </a:r>
+          </a:p>
+        </p:txBody>
+      </p:sp>
+      <p:sp>
+        <p:nvSpPr>
+          <p:cNvPr id="115" name="Tag2"/>
+          <p:cNvSpPr txBox="1"/>
+          <p:nvPr/>
+        </p:nvSpPr>
+        <p:spPr>
+          <a:xfrm>
+            <a:off x="8001000" y="4140200"/>
+            <a:ext cx="3251200" cy="736600"/>
+          </a:xfrm>
+          <a:prstGeom prst="rect">
+            <a:avLst/>
+          </a:prstGeom>
+          <a:noFill/>
+          <a:ln>
+            <a:noFill/>
+          </a:ln>
+        </p:spPr>
+        <p:txBody>
+          <a:bodyPr wrap="square" lIns="0" tIns="45720" rIns="0" bIns="45720" anchor="ctr"/>
+          <a:lstStyle/>
+          <a:p>
+            <a:pPr>
+              <a:buNone/>
+            </a:pPr>
+            <a:r>
+              <a:rPr lang="en-US" sz="1400" b="1" dirty="0">
+                <a:solidFill>
+                  <a:srgbClr val="B1063A"/>
+                </a:solidFill>
+              </a:rPr>
+              <a:t>Rug Pull bei vertrauter Config</a:t>
+            </a:r>
+          </a:p>
+          <a:p>
+            <a:pPr>
+              <a:buNone/>
+            </a:pPr>
+            <a:r>
+              <a:rPr lang="en-US" sz="1200" dirty="0">
+                <a:solidFill>
+                  <a:srgbClr val="6E6E6E"/>
+                </a:solidFill>
+              </a:rPr>
+              <a:t>Quelle: Check Point Research</a:t>
+            </a:r>
+          </a:p>
+          <a:p>
+            <a:pPr>
+              <a:buNone/>
+            </a:pPr>
+            <a:r>
+              <a:rPr lang="en-US" sz="1000" dirty="0">
+                <a:solidFill>
+                  <a:srgbClr val="6E6E6E"/>
+                </a:solidFill>
+              </a:rPr>
+              <a:t>https://</a:t>
+            </a:r>
+            <a:r>
+              <a:rPr lang="en-US" sz="1000" dirty="0" err="1">
+                <a:solidFill>
+                  <a:srgbClr val="6E6E6E"/>
+                </a:solidFill>
+              </a:rPr>
+              <a:t>research.checkpoint.com</a:t>
+            </a:r>
+            <a:r>
+              <a:rPr lang="en-US" sz="1000" dirty="0">
+                <a:solidFill>
+                  <a:srgbClr val="6E6E6E"/>
+                </a:solidFill>
+              </a:rPr>
+              <a:t>/2025/cursor-vulnerability-</a:t>
+            </a:r>
+            <a:r>
+              <a:rPr lang="en-US" sz="1000" dirty="0" err="1">
+                <a:solidFill>
+                  <a:srgbClr val="6E6E6E"/>
+                </a:solidFill>
+              </a:rPr>
+              <a:t>mcpoison</a:t>
+            </a:r>
+            <a:r>
+              <a:rPr lang="en-US" sz="1000" dirty="0">
+                <a:solidFill>
+                  <a:srgbClr val="6E6E6E"/>
+                </a:solidFill>
+              </a:rPr>
+              <a:t>/</a:t>
+            </a:r>
+          </a:p>
+        </p:txBody>
+      </p:sp>
+      <p:sp>
+        <p:nvSpPr>
+          <p:cNvPr id="116" name="Close"/>
+          <p:cNvSpPr txBox="1"/>
+          <p:nvPr/>
+        </p:nvSpPr>
+        <p:spPr>
+          <a:xfrm>
+            <a:off x="762000" y="5334000"/>
+            <a:ext cx="10668000" cy="762000"/>
+          </a:xfrm>
+          <a:prstGeom prst="rect">
+            <a:avLst/>
+          </a:prstGeom>
+          <a:noFill/>
+          <a:ln>
+            <a:noFill/>
+          </a:ln>
+        </p:spPr>
+        <p:txBody>
+          <a:bodyPr wrap="square" lIns="91440" tIns="45720" rIns="91440" bIns="45720" anchor="t"/>
+          <a:lstStyle/>
+          <a:p>
+            <a:pPr>
+              <a:buNone/>
+            </a:pPr>
+            <a:r>
+              <a:rPr lang="en-US" sz="1800" b="1" dirty="0">
+                <a:solidFill>
+                  <a:srgbClr val="1A1A1A"/>
+                </a:solidFill>
+              </a:rPr>
+              <a:t>Drei verschiedene Fehlerarten: </a:t>
+            </a:r>
+            <a:r>
+              <a:rPr lang="en-US" sz="1800" b="1" dirty="0">
+                <a:solidFill>
+                  <a:srgbClr val="B1063A"/>
+                </a:solidFill>
+              </a:rPr>
+              <a:t>ein gekaperter Agent · ein bösartiger Server · eine vertraute Config, die unbemerkt geändert wurde.</a:t>
+            </a:r>
+          </a:p>
+        </p:txBody>
+      </p:sp>
+      <p:pic>
+        <p:nvPicPr>
+          <p:cNvPr id="3" name="Picture 2">
+            <a:extLst>
+              <a:ext uri="{FF2B5EF4-FFF2-40B4-BE49-F238E27FC236}">
+                <a16:creationId xmlns:a16="http://schemas.microsoft.com/office/drawing/2014/main" id="{030928EE-6DD8-0A26-FF5C-88599E5E91C1}"/>
+              </a:ext>
+            </a:extLst>
+          </p:cNvPr>
+          <p:cNvPicPr>
+            <a:picLocks noChangeAspect="1"/>
+          </p:cNvPicPr>
+          <p:nvPr/>
+        </p:nvPicPr>
+        <p:blipFill>
+          <a:blip r:embed="rId3"/>
+          <a:stretch>
+            <a:fillRect/>
+          </a:stretch>
+        </p:blipFill>
+        <p:spPr>
+          <a:xfrm>
+            <a:off x="9489298" y="183584"/>
+            <a:ext cx="2592088" cy="776265"/>
+          </a:xfrm>
+          <a:prstGeom prst="rect">
+            <a:avLst/>
+          </a:prstGeom>
+        </p:spPr>
+      </p:pic>
+    </p:spTree>
+    <p:extLst>
+      <p:ext uri="{BB962C8B-B14F-4D97-AF65-F5344CB8AC3E}">
+        <p14:creationId xmlns:p14="http://schemas.microsoft.com/office/powerpoint/2010/main" val="3233517575"/>
+      </p:ext>
+    </p:extLst>
+  </p:cSld>
+  <p:clrMapOvr>
+    <a:masterClrMapping/>
+  </p:clrMapOvr>
+</p:sld>
+</file>
+
+<file path=ppt/slides/slide11.xml><?xml version="1.0" encoding="utf-8"?>
+<p:sld xmlns:a="http://schemas.openxmlformats.org/drawingml/2006/main" xmlns:r="http://schemas.openxmlformats.org/officeDocument/2006/relationships" xmlns:p="http://schemas.openxmlformats.org/presentationml/2006/main">
+  <p:cSld>
+    <p:spTree>
+      <p:nvGrpSpPr>
+        <p:cNvPr id="1" name=""/>
+        <p:cNvGrpSpPr/>
+        <p:nvPr/>
+      </p:nvGrpSpPr>
+      <p:grpSpPr>
+        <a:xfrm>
+          <a:off x="0" y="0"/>
+          <a:ext cx="0" cy="0"/>
+          <a:chOff x="0" y="0"/>
+          <a:chExt cx="0" cy="0"/>
+        </a:xfrm>
+      </p:grpSpPr>
+      <p:sp>
+        <p:nvSpPr>
+          <p:cNvPr id="2" name="Title 1">
+            <a:extLst>
+              <a:ext uri="{FF2B5EF4-FFF2-40B4-BE49-F238E27FC236}">
                 <a16:creationId xmlns:a16="http://schemas.microsoft.com/office/drawing/2014/main" id="{D92B35FD-5232-5948-000D-1984C8D3583A}"/>
               </a:ext>
             </a:extLst>
@@ -5833,6 +6860,36 @@
           </a:p>
         </p:txBody>
       </p:sp>
+      <p:pic>
+        <p:nvPicPr>
+          <p:cNvPr id="3" name="Picture 2">
+            <a:extLst>
+              <a:ext uri="{FF2B5EF4-FFF2-40B4-BE49-F238E27FC236}">
+                <a16:creationId xmlns:a16="http://schemas.microsoft.com/office/drawing/2014/main" id="{874E17C6-A206-008E-58BE-FD2449DDCA5F}"/>
+              </a:ext>
+            </a:extLst>
+          </p:cNvPr>
+          <p:cNvPicPr>
+            <a:picLocks noChangeAspect="1"/>
+          </p:cNvPicPr>
+          <p:nvPr/>
+        </p:nvPicPr>
+        <p:blipFill>
+          <a:blip r:embed="rId3"/>
+          <a:stretch>
+            <a:fillRect/>
+          </a:stretch>
+        </p:blipFill>
+        <p:spPr>
+          <a:xfrm>
+            <a:off x="9489298" y="183584"/>
+            <a:ext cx="2592088" cy="776265"/>
+          </a:xfrm>
+          <a:prstGeom prst="rect">
+            <a:avLst/>
+          </a:prstGeom>
+        </p:spPr>
+      </p:pic>
     </p:spTree>
     <p:extLst>
       <p:ext uri="{BB962C8B-B14F-4D97-AF65-F5344CB8AC3E}">
@@ -5846,7 +6903,7 @@
 </p:sld>
 </file>
 
-<file path=ppt/slides/slide11.xml><?xml version="1.0" encoding="utf-8"?>
+<file path=ppt/slides/slide12.xml><?xml version="1.0" encoding="utf-8"?>
 <p:sld xmlns:a="http://schemas.openxmlformats.org/drawingml/2006/main" xmlns:r="http://schemas.openxmlformats.org/officeDocument/2006/relationships" xmlns:p="http://schemas.openxmlformats.org/presentationml/2006/main">
   <p:cSld>
     <p:spTree>
@@ -6789,6 +7846,36 @@
           </a:p>
         </p:txBody>
       </p:sp>
+      <p:pic>
+        <p:nvPicPr>
+          <p:cNvPr id="3" name="Picture 2">
+            <a:extLst>
+              <a:ext uri="{FF2B5EF4-FFF2-40B4-BE49-F238E27FC236}">
+                <a16:creationId xmlns:a16="http://schemas.microsoft.com/office/drawing/2014/main" id="{F52F2BFD-AB53-7CEE-35E9-73A806682A8F}"/>
+              </a:ext>
+            </a:extLst>
+          </p:cNvPr>
+          <p:cNvPicPr>
+            <a:picLocks noChangeAspect="1"/>
+          </p:cNvPicPr>
+          <p:nvPr/>
+        </p:nvPicPr>
+        <p:blipFill>
+          <a:blip r:embed="rId3"/>
+          <a:stretch>
+            <a:fillRect/>
+          </a:stretch>
+        </p:blipFill>
+        <p:spPr>
+          <a:xfrm>
+            <a:off x="9489298" y="183584"/>
+            <a:ext cx="2592088" cy="776265"/>
+          </a:xfrm>
+          <a:prstGeom prst="rect">
+            <a:avLst/>
+          </a:prstGeom>
+        </p:spPr>
+      </p:pic>
     </p:spTree>
     <p:extLst>
       <p:ext uri="{BB962C8B-B14F-4D97-AF65-F5344CB8AC3E}">
@@ -6802,7 +7889,7 @@
 </p:sld>
 </file>
 
-<file path=ppt/slides/slide12.xml><?xml version="1.0" encoding="utf-8"?>
+<file path=ppt/slides/slide13.xml><?xml version="1.0" encoding="utf-8"?>
 <p:sld xmlns:a="http://schemas.openxmlformats.org/drawingml/2006/main" xmlns:r="http://schemas.openxmlformats.org/officeDocument/2006/relationships" xmlns:p="http://schemas.openxmlformats.org/presentationml/2006/main">
   <p:cSld>
     <p:spTree>
@@ -7759,6 +8846,36 @@
           </a:p>
         </p:txBody>
       </p:sp>
+      <p:pic>
+        <p:nvPicPr>
+          <p:cNvPr id="3" name="Picture 2">
+            <a:extLst>
+              <a:ext uri="{FF2B5EF4-FFF2-40B4-BE49-F238E27FC236}">
+                <a16:creationId xmlns:a16="http://schemas.microsoft.com/office/drawing/2014/main" id="{5A41FB79-04A9-32D6-2268-66ACD1488443}"/>
+              </a:ext>
+            </a:extLst>
+          </p:cNvPr>
+          <p:cNvPicPr>
+            <a:picLocks noChangeAspect="1"/>
+          </p:cNvPicPr>
+          <p:nvPr/>
+        </p:nvPicPr>
+        <p:blipFill>
+          <a:blip r:embed="rId3"/>
+          <a:stretch>
+            <a:fillRect/>
+          </a:stretch>
+        </p:blipFill>
+        <p:spPr>
+          <a:xfrm>
+            <a:off x="9489298" y="183584"/>
+            <a:ext cx="2592088" cy="776265"/>
+          </a:xfrm>
+          <a:prstGeom prst="rect">
+            <a:avLst/>
+          </a:prstGeom>
+        </p:spPr>
+      </p:pic>
     </p:spTree>
     <p:extLst>
       <p:ext uri="{BB962C8B-B14F-4D97-AF65-F5344CB8AC3E}">
@@ -7772,7 +8889,7 @@
 </p:sld>
 </file>
 
-<file path=ppt/slides/slide13.xml><?xml version="1.0" encoding="utf-8"?>
+<file path=ppt/slides/slide14.xml><?xml version="1.0" encoding="utf-8"?>
 <p:sld xmlns:a="http://schemas.openxmlformats.org/drawingml/2006/main" xmlns:r="http://schemas.openxmlformats.org/officeDocument/2006/relationships" xmlns:p="http://schemas.openxmlformats.org/presentationml/2006/main">
   <p:cSld>
     <p:spTree>
@@ -7795,6 +8912,36 @@
           <a:chExt cx="0" cy="0"/>
         </a:xfrm>
       </p:grpSpPr>
+      <p:pic>
+        <p:nvPicPr>
+          <p:cNvPr id="5" name="Picture 4">
+            <a:extLst>
+              <a:ext uri="{FF2B5EF4-FFF2-40B4-BE49-F238E27FC236}">
+                <a16:creationId xmlns:a16="http://schemas.microsoft.com/office/drawing/2014/main" id="{76BA50C9-2A42-C766-90FB-88EDA470B8DB}"/>
+              </a:ext>
+            </a:extLst>
+          </p:cNvPr>
+          <p:cNvPicPr>
+            <a:picLocks noChangeAspect="1"/>
+          </p:cNvPicPr>
+          <p:nvPr/>
+        </p:nvPicPr>
+        <p:blipFill>
+          <a:blip r:embed="rId3"/>
+          <a:stretch>
+            <a:fillRect/>
+          </a:stretch>
+        </p:blipFill>
+        <p:spPr>
+          <a:xfrm>
+            <a:off x="9489298" y="183584"/>
+            <a:ext cx="2592088" cy="776265"/>
+          </a:xfrm>
+          <a:prstGeom prst="rect">
+            <a:avLst/>
+          </a:prstGeom>
+        </p:spPr>
+      </p:pic>
       <p:sp>
         <p:nvSpPr>
           <p:cNvPr id="2" name="Title 1">
@@ -7830,7 +8977,23 @@
                   <a:srgbClr val="B1063A"/>
                 </a:solidFill>
               </a:rPr>
-              <a:t>Demo: Connect Claude with Gmail and Google Calendar</a:t>
+              <a:t>Demo: Connect Claude with Gmail </a:t>
+            </a:r>
+            <a:r>
+              <a:rPr lang="en-US" sz="3000" dirty="0">
+                <a:solidFill>
+                  <a:srgbClr val="B1063A"/>
+                </a:solidFill>
+              </a:rPr>
+              <a:t>&amp;</a:t>
+            </a:r>
+            <a:r>
+              <a:rPr lang="en-US" sz="3000" b="1" dirty="0">
+                <a:solidFill>
+                  <a:srgbClr val="B1063A"/>
+                </a:solidFill>
+              </a:rPr>
+              <a:t> Google Calendar</a:t>
             </a:r>
           </a:p>
         </p:txBody>
@@ -7924,7 +9087,7 @@
                 <a:solidFill>
                   <a:srgbClr val="6E6E6E"/>
                 </a:solidFill>
-                <a:hlinkClick r:id="rId3"/>
+                <a:hlinkClick r:id="rId4"/>
               </a:rPr>
               <a:t>test@gmail.com</a:t>
             </a:r>
@@ -8573,240 +9736,6 @@
     <p:extLst>
       <p:ext uri="{BB962C8B-B14F-4D97-AF65-F5344CB8AC3E}">
         <p14:creationId xmlns:p14="http://schemas.microsoft.com/office/powerpoint/2010/main" val="157629846"/>
-      </p:ext>
-    </p:extLst>
-  </p:cSld>
-  <p:clrMapOvr>
-    <a:masterClrMapping/>
-  </p:clrMapOvr>
-</p:sld>
-</file>
-
-<file path=ppt/slides/slide14.xml><?xml version="1.0" encoding="utf-8"?>
-<p:sld xmlns:a="http://schemas.openxmlformats.org/drawingml/2006/main" xmlns:r="http://schemas.openxmlformats.org/officeDocument/2006/relationships" xmlns:p="http://schemas.openxmlformats.org/presentationml/2006/main">
-  <p:cSld>
-    <p:spTree>
-      <p:nvGrpSpPr>
-        <p:cNvPr id="1" name=""/>
-        <p:cNvGrpSpPr/>
-        <p:nvPr/>
-      </p:nvGrpSpPr>
-      <p:grpSpPr>
-        <a:xfrm>
-          <a:off x="0" y="0"/>
-          <a:ext cx="0" cy="0"/>
-          <a:chOff x="0" y="0"/>
-          <a:chExt cx="0" cy="0"/>
-        </a:xfrm>
-      </p:grpSpPr>
-      <p:sp>
-        <p:nvSpPr>
-          <p:cNvPr id="2" name="Title 1">
-            <a:extLst>
-              <a:ext uri="{FF2B5EF4-FFF2-40B4-BE49-F238E27FC236}">
-                <a16:creationId xmlns:a16="http://schemas.microsoft.com/office/drawing/2014/main" id="{85BF0031-1235-5D21-8AB5-3C63A1B6E052}"/>
-              </a:ext>
-            </a:extLst>
-          </p:cNvPr>
-          <p:cNvSpPr>
-            <a:spLocks noGrp="1"/>
-          </p:cNvSpPr>
-          <p:nvPr>
-            <p:ph type="title"/>
-          </p:nvPr>
-        </p:nvSpPr>
-        <p:spPr>
-          <a:xfrm>
-            <a:off x="762000" y="457200"/>
-            <a:ext cx="10668000" cy="711200"/>
-          </a:xfrm>
-        </p:spPr>
-        <p:txBody>
-          <a:bodyPr anchor="t" anchorCtr="0"/>
-          <a:lstStyle/>
-          <a:p>
-            <a:pPr algn="l">
-              <a:buNone/>
-            </a:pPr>
-            <a:r>
-              <a:rPr lang="en-US" sz="3000" b="1" dirty="0">
-                <a:solidFill>
-                  <a:srgbClr val="B1063A"/>
-                </a:solidFill>
-              </a:rPr>
-              <a:t>Demo · Schritt 1: Server finden und bewerten</a:t>
-            </a:r>
-          </a:p>
-        </p:txBody>
-      </p:sp>
-      <p:sp>
-        <p:nvSpPr>
-          <p:cNvPr id="100" name="Rule"/>
-          <p:cNvSpPr txBox="1"/>
-          <p:nvPr/>
-        </p:nvSpPr>
-        <p:spPr>
-          <a:xfrm>
-            <a:off x="762000" y="1244600"/>
-            <a:ext cx="762000" cy="38100"/>
-          </a:xfrm>
-          <a:prstGeom prst="rect">
-            <a:avLst/>
-          </a:prstGeom>
-          <a:solidFill>
-            <a:srgbClr val="B1063A"/>
-          </a:solidFill>
-          <a:ln>
-            <a:noFill/>
-          </a:ln>
-        </p:spPr>
-        <p:txBody>
-          <a:bodyPr wrap="square" lIns="91440" tIns="45720" rIns="91440" bIns="45720" anchor="t"/>
-          <a:lstStyle/>
-          <a:p>
-            <a:endParaRPr/>
-          </a:p>
-        </p:txBody>
-      </p:sp>
-      <p:sp>
-        <p:nvSpPr>
-          <p:cNvPr id="104" name="Side"/>
-          <p:cNvSpPr txBox="1"/>
-          <p:nvPr/>
-        </p:nvSpPr>
-        <p:spPr>
-          <a:xfrm>
-            <a:off x="7772400" y="1473200"/>
-            <a:ext cx="3657600" cy="4191000"/>
-          </a:xfrm>
-          <a:prstGeom prst="roundRect">
-            <a:avLst/>
-          </a:prstGeom>
-          <a:solidFill>
-            <a:srgbClr val="F4F4F4"/>
-          </a:solidFill>
-          <a:ln>
-            <a:noFill/>
-          </a:ln>
-        </p:spPr>
-        <p:txBody>
-          <a:bodyPr wrap="square" lIns="177800" tIns="45720" rIns="177800" bIns="45720" anchor="t"/>
-          <a:lstStyle/>
-          <a:p>
-            <a:pPr>
-              <a:buNone/>
-            </a:pPr>
-            <a:r>
-              <a:rPr lang="en-US" sz="1400" b="1" dirty="0">
-                <a:solidFill>
-                  <a:srgbClr val="B1063A"/>
-                </a:solidFill>
-              </a:rPr>
-              <a:t>Worauf achten</a:t>
-            </a:r>
-          </a:p>
-          <a:p>
-            <a:pPr>
-              <a:spcBef>
-                <a:spcPts val="1200"/>
-              </a:spcBef>
-              <a:buNone/>
-            </a:pPr>
-            <a:r>
-              <a:rPr lang="en-US" sz="1600" b="1" dirty="0">
-                <a:solidFill>
-                  <a:srgbClr val="1A1A1A"/>
-                </a:solidFill>
-              </a:rPr>
-              <a:t>Wer hat ihn gebaut?</a:t>
-            </a:r>
-          </a:p>
-          <a:p>
-            <a:pPr>
-              <a:buNone/>
-            </a:pPr>
-            <a:r>
-              <a:rPr lang="en-US" sz="1400" dirty="0">
-                <a:solidFill>
-                  <a:srgbClr val="6E6E6E"/>
-                </a:solidFill>
-              </a:rPr>
-              <a:t>Checkliste F1</a:t>
-            </a:r>
-          </a:p>
-          <a:p>
-            <a:pPr>
-              <a:spcBef>
-                <a:spcPts val="1200"/>
-              </a:spcBef>
-              <a:buNone/>
-            </a:pPr>
-            <a:r>
-              <a:rPr lang="en-US" sz="1600" b="1" dirty="0">
-                <a:solidFill>
-                  <a:srgbClr val="1A1A1A"/>
-                </a:solidFill>
-              </a:rPr>
-              <a:t>Was kann er in Ihrem Namen tun?</a:t>
-            </a:r>
-          </a:p>
-          <a:p>
-            <a:pPr>
-              <a:buNone/>
-            </a:pPr>
-            <a:r>
-              <a:rPr lang="en-US" sz="1400" dirty="0" err="1">
-                <a:solidFill>
-                  <a:srgbClr val="6E6E6E"/>
-                </a:solidFill>
-              </a:rPr>
-              <a:t>Checkliste</a:t>
-            </a:r>
-            <a:r>
-              <a:rPr lang="en-US" sz="1400" dirty="0">
-                <a:solidFill>
-                  <a:srgbClr val="6E6E6E"/>
-                </a:solidFill>
-              </a:rPr>
-              <a:t> F2</a:t>
-            </a:r>
-          </a:p>
-        </p:txBody>
-      </p:sp>
-      <p:pic>
-        <p:nvPicPr>
-          <p:cNvPr id="8" name="Picture 7">
-            <a:extLst>
-              <a:ext uri="{FF2B5EF4-FFF2-40B4-BE49-F238E27FC236}">
-                <a16:creationId xmlns:a16="http://schemas.microsoft.com/office/drawing/2014/main" id="{A2B4263B-2268-2932-3A52-B96E1389D569}"/>
-              </a:ext>
-            </a:extLst>
-          </p:cNvPr>
-          <p:cNvPicPr>
-            <a:picLocks noChangeAspect="1"/>
-          </p:cNvPicPr>
-          <p:nvPr/>
-        </p:nvPicPr>
-        <p:blipFill>
-          <a:blip r:embed="rId3"/>
-          <a:stretch>
-            <a:fillRect/>
-          </a:stretch>
-        </p:blipFill>
-        <p:spPr>
-          <a:xfrm>
-            <a:off x="1168400" y="1358900"/>
-            <a:ext cx="5940350" cy="5156201"/>
-          </a:xfrm>
-          <a:prstGeom prst="rect">
-            <a:avLst/>
-          </a:prstGeom>
-        </p:spPr>
-      </p:pic>
-    </p:spTree>
-    <p:extLst>
-      <p:ext uri="{BB962C8B-B14F-4D97-AF65-F5344CB8AC3E}">
-        <p14:creationId xmlns:p14="http://schemas.microsoft.com/office/powerpoint/2010/main" val="1652790712"/>
       </p:ext>
     </p:extLst>
   </p:cSld>
@@ -8838,7 +9767,7 @@
           <p:cNvPr id="2" name="Title 1">
             <a:extLst>
               <a:ext uri="{FF2B5EF4-FFF2-40B4-BE49-F238E27FC236}">
-                <a16:creationId xmlns:a16="http://schemas.microsoft.com/office/drawing/2014/main" id="{09E24831-0C8B-5F6A-9E76-CE69B5B12FEA}"/>
+                <a16:creationId xmlns:a16="http://schemas.microsoft.com/office/drawing/2014/main" id="{85BF0031-1235-5D21-8AB5-3C63A1B6E052}"/>
               </a:ext>
             </a:extLst>
           </p:cNvPr>
@@ -8868,7 +9797,7 @@
                   <a:srgbClr val="B1063A"/>
                 </a:solidFill>
               </a:rPr>
-              <a:t>Demo · Schritt 2: Mit Least Privilege verbinden</a:t>
+              <a:t>Demo · Schritt 1: Server finden und bewerten</a:t>
             </a:r>
           </a:p>
         </p:txBody>
@@ -8904,25 +9833,27 @@
       </p:sp>
       <p:sp>
         <p:nvSpPr>
-          <p:cNvPr id="101" name="LblA"/>
+          <p:cNvPr id="104" name="Side"/>
           <p:cNvSpPr txBox="1"/>
           <p:nvPr/>
         </p:nvSpPr>
         <p:spPr>
           <a:xfrm>
-            <a:off x="762000" y="1473200"/>
-            <a:ext cx="5080000" cy="304800"/>
-          </a:xfrm>
-          <a:prstGeom prst="rect">
-            <a:avLst/>
-          </a:prstGeom>
-          <a:noFill/>
+            <a:off x="7772400" y="1473200"/>
+            <a:ext cx="3657600" cy="4191000"/>
+          </a:xfrm>
+          <a:prstGeom prst="roundRect">
+            <a:avLst/>
+          </a:prstGeom>
+          <a:solidFill>
+            <a:srgbClr val="F4F4F4"/>
+          </a:solidFill>
           <a:ln>
             <a:noFill/>
           </a:ln>
         </p:spPr>
         <p:txBody>
-          <a:bodyPr wrap="square" lIns="91440" tIns="45720" rIns="91440" bIns="45720" anchor="t"/>
+          <a:bodyPr wrap="square" lIns="177800" tIns="45720" rIns="177800" bIns="45720" anchor="t"/>
           <a:lstStyle/>
           <a:p>
             <a:pPr>
@@ -8931,94 +9862,86 @@
             <a:r>
               <a:rPr lang="en-US" sz="1400" b="1" dirty="0">
                 <a:solidFill>
+                  <a:srgbClr val="B1063A"/>
+                </a:solidFill>
+              </a:rPr>
+              <a:t>Worauf achten</a:t>
+            </a:r>
+          </a:p>
+          <a:p>
+            <a:pPr>
+              <a:spcBef>
+                <a:spcPts val="1200"/>
+              </a:spcBef>
+              <a:buNone/>
+            </a:pPr>
+            <a:r>
+              <a:rPr lang="en-US" sz="1600" b="1" dirty="0">
+                <a:solidFill>
+                  <a:srgbClr val="1A1A1A"/>
+                </a:solidFill>
+              </a:rPr>
+              <a:t>Wer hat ihn gebaut?</a:t>
+            </a:r>
+          </a:p>
+          <a:p>
+            <a:pPr>
+              <a:buNone/>
+            </a:pPr>
+            <a:r>
+              <a:rPr lang="en-US" sz="1400" dirty="0">
+                <a:solidFill>
                   <a:srgbClr val="6E6E6E"/>
                 </a:solidFill>
               </a:rPr>
-              <a:t>A · Gmail-Berechtigungsdialog</a:t>
-            </a:r>
-          </a:p>
-        </p:txBody>
-      </p:sp>
-      <p:sp>
-        <p:nvSpPr>
-          <p:cNvPr id="104" name="LblB"/>
-          <p:cNvSpPr txBox="1"/>
-          <p:nvPr/>
-        </p:nvSpPr>
-        <p:spPr>
-          <a:xfrm>
-            <a:off x="6350000" y="1473200"/>
-            <a:ext cx="5080000" cy="304800"/>
-          </a:xfrm>
-          <a:prstGeom prst="rect">
-            <a:avLst/>
-          </a:prstGeom>
-          <a:noFill/>
-          <a:ln>
-            <a:noFill/>
-          </a:ln>
-        </p:spPr>
-        <p:txBody>
-          <a:bodyPr wrap="square" lIns="91440" tIns="45720" rIns="91440" bIns="45720" anchor="t"/>
-          <a:lstStyle/>
+              <a:t>Checkliste F1</a:t>
+            </a:r>
+          </a:p>
           <a:p>
             <a:pPr>
+              <a:spcBef>
+                <a:spcPts val="1200"/>
+              </a:spcBef>
               <a:buNone/>
             </a:pPr>
             <a:r>
-              <a:rPr lang="en-US" sz="1400" b="1" dirty="0">
+              <a:rPr lang="en-US" sz="1600" b="1" dirty="0">
+                <a:solidFill>
+                  <a:srgbClr val="1A1A1A"/>
+                </a:solidFill>
+              </a:rPr>
+              <a:t>Was kann er in Ihrem Namen tun?</a:t>
+            </a:r>
+          </a:p>
+          <a:p>
+            <a:pPr>
+              <a:buNone/>
+            </a:pPr>
+            <a:r>
+              <a:rPr lang="en-US" sz="1400" dirty="0" err="1">
                 <a:solidFill>
                   <a:srgbClr val="6E6E6E"/>
                 </a:solidFill>
               </a:rPr>
-              <a:t>B · Google-Kalender-Berechtigungsdialog</a:t>
-            </a:r>
-          </a:p>
-        </p:txBody>
-      </p:sp>
-      <p:sp>
-        <p:nvSpPr>
-          <p:cNvPr id="107" name="Caption"/>
-          <p:cNvSpPr txBox="1"/>
-          <p:nvPr/>
-        </p:nvSpPr>
-        <p:spPr>
-          <a:xfrm>
-            <a:off x="762000" y="5664200"/>
-            <a:ext cx="10668000" cy="508000"/>
-          </a:xfrm>
-          <a:prstGeom prst="rect">
-            <a:avLst/>
-          </a:prstGeom>
-          <a:noFill/>
-          <a:ln>
-            <a:noFill/>
-          </a:ln>
-        </p:spPr>
-        <p:txBody>
-          <a:bodyPr wrap="square" lIns="91440" tIns="45720" rIns="91440" bIns="45720" anchor="ctr"/>
-          <a:lstStyle/>
-          <a:p>
-            <a:pPr>
-              <a:buNone/>
-            </a:pPr>
-            <a:r>
-              <a:rPr lang="en-US" sz="1800" b="1" dirty="0">
-                <a:solidFill>
-                  <a:srgbClr val="1A1A1A"/>
-                </a:solidFill>
-              </a:rPr>
-              <a:t>Nur gewähren, was die Aufgabe braucht. Gmail: lesen + entwerfen. Kalender: nur lesen.</a:t>
+              <a:t>Checkliste</a:t>
+            </a:r>
+            <a:r>
+              <a:rPr lang="en-US" sz="1400" dirty="0">
+                <a:solidFill>
+                  <a:srgbClr val="6E6E6E"/>
+                </a:solidFill>
+              </a:rPr>
+              <a:t> F2</a:t>
             </a:r>
           </a:p>
         </p:txBody>
       </p:sp>
       <p:pic>
         <p:nvPicPr>
-          <p:cNvPr id="6" name="Picture 5">
+          <p:cNvPr id="8" name="Picture 7">
             <a:extLst>
               <a:ext uri="{FF2B5EF4-FFF2-40B4-BE49-F238E27FC236}">
-                <a16:creationId xmlns:a16="http://schemas.microsoft.com/office/drawing/2014/main" id="{B0F50A85-F046-F2B8-651B-916A709D5BD4}"/>
+                <a16:creationId xmlns:a16="http://schemas.microsoft.com/office/drawing/2014/main" id="{A2B4263B-2268-2932-3A52-B96E1389D569}"/>
               </a:ext>
             </a:extLst>
           </p:cNvPr>
@@ -9035,8 +9958,8 @@
         </p:blipFill>
         <p:spPr>
           <a:xfrm>
-            <a:off x="6756607" y="1778000"/>
-            <a:ext cx="4472538" cy="3835400"/>
+            <a:off x="1168400" y="1358900"/>
+            <a:ext cx="5940350" cy="5156201"/>
           </a:xfrm>
           <a:prstGeom prst="rect">
             <a:avLst/>
@@ -9045,10 +9968,10 @@
       </p:pic>
       <p:pic>
         <p:nvPicPr>
-          <p:cNvPr id="7" name="Picture 6">
+          <p:cNvPr id="3" name="Picture 2">
             <a:extLst>
               <a:ext uri="{FF2B5EF4-FFF2-40B4-BE49-F238E27FC236}">
-                <a16:creationId xmlns:a16="http://schemas.microsoft.com/office/drawing/2014/main" id="{C2C446D8-1CEC-A9E2-9CB5-B160CB4E5B33}"/>
+                <a16:creationId xmlns:a16="http://schemas.microsoft.com/office/drawing/2014/main" id="{C965CA71-CC93-2951-4902-B3FC36A8A9DE}"/>
               </a:ext>
             </a:extLst>
           </p:cNvPr>
@@ -9065,8 +9988,8 @@
         </p:blipFill>
         <p:spPr>
           <a:xfrm>
-            <a:off x="962855" y="1778000"/>
-            <a:ext cx="4720493" cy="3835400"/>
+            <a:off x="9489298" y="183584"/>
+            <a:ext cx="2592088" cy="776265"/>
           </a:xfrm>
           <a:prstGeom prst="rect">
             <a:avLst/>
@@ -9076,7 +9999,7 @@
     </p:spTree>
     <p:extLst>
       <p:ext uri="{BB962C8B-B14F-4D97-AF65-F5344CB8AC3E}">
-        <p14:creationId xmlns:p14="http://schemas.microsoft.com/office/powerpoint/2010/main" val="3014146161"/>
+        <p14:creationId xmlns:p14="http://schemas.microsoft.com/office/powerpoint/2010/main" val="1652790712"/>
       </p:ext>
     </p:extLst>
   </p:cSld>
@@ -9108,7 +10031,7 @@
           <p:cNvPr id="2" name="Title 1">
             <a:extLst>
               <a:ext uri="{FF2B5EF4-FFF2-40B4-BE49-F238E27FC236}">
-                <a16:creationId xmlns:a16="http://schemas.microsoft.com/office/drawing/2014/main" id="{21A9E976-E223-FFDB-E91E-8B514418EBB7}"/>
+                <a16:creationId xmlns:a16="http://schemas.microsoft.com/office/drawing/2014/main" id="{09E24831-0C8B-5F6A-9E76-CE69B5B12FEA}"/>
               </a:ext>
             </a:extLst>
           </p:cNvPr>
@@ -9129,19 +10052,17 @@
           <a:bodyPr anchor="t" anchorCtr="0"/>
           <a:lstStyle/>
           <a:p>
-            <a:r>
-              <a:rPr lang="en-US" sz="3000" dirty="0">
+            <a:pPr algn="l">
+              <a:buNone/>
+            </a:pPr>
+            <a:r>
+              <a:rPr lang="en-US" sz="3000" b="1" dirty="0">
                 <a:solidFill>
                   <a:srgbClr val="B1063A"/>
                 </a:solidFill>
               </a:rPr>
-              <a:t>Demo · Schritt 3: Testen</a:t>
-            </a:r>
-            <a:endParaRPr lang="en-US" sz="3000" b="1" dirty="0">
-              <a:solidFill>
-                <a:srgbClr val="B1063A"/>
-              </a:solidFill>
-            </a:endParaRPr>
+              <a:t>Demo · Schritt 2: Mit Least Privilege verbinden</a:t>
+            </a:r>
           </a:p>
         </p:txBody>
       </p:sp>
@@ -9176,184 +10097,111 @@
       </p:sp>
       <p:sp>
         <p:nvSpPr>
-          <p:cNvPr id="104" name="Side"/>
+          <p:cNvPr id="101" name="LblA"/>
           <p:cNvSpPr txBox="1"/>
           <p:nvPr/>
         </p:nvSpPr>
         <p:spPr>
           <a:xfrm>
-            <a:off x="8158480" y="1545696"/>
-            <a:ext cx="3657600" cy="4191000"/>
-          </a:xfrm>
-          <a:prstGeom prst="roundRect">
-            <a:avLst/>
-          </a:prstGeom>
-          <a:solidFill>
-            <a:srgbClr val="F4F4F4"/>
-          </a:solidFill>
+            <a:off x="762000" y="1473200"/>
+            <a:ext cx="5080000" cy="304800"/>
+          </a:xfrm>
+          <a:prstGeom prst="rect">
+            <a:avLst/>
+          </a:prstGeom>
+          <a:noFill/>
           <a:ln>
             <a:noFill/>
           </a:ln>
         </p:spPr>
         <p:txBody>
-          <a:bodyPr wrap="square" lIns="177800" tIns="45720" rIns="177800" bIns="45720" anchor="t"/>
+          <a:bodyPr wrap="square" lIns="91440" tIns="45720" rIns="91440" bIns="45720" anchor="t"/>
           <a:lstStyle/>
           <a:p>
             <a:pPr>
-              <a:spcBef>
-                <a:spcPts val="1200"/>
-              </a:spcBef>
               <a:buNone/>
             </a:pPr>
             <a:r>
-              <a:rPr lang="en-US" sz="1600" b="1" dirty="0" err="1">
+              <a:rPr lang="en-US" sz="1400" b="1" dirty="0">
+                <a:solidFill>
+                  <a:srgbClr val="6E6E6E"/>
+                </a:solidFill>
+              </a:rPr>
+              <a:t>A · Gmail-Berechtigungsdialog</a:t>
+            </a:r>
+          </a:p>
+        </p:txBody>
+      </p:sp>
+      <p:sp>
+        <p:nvSpPr>
+          <p:cNvPr id="104" name="LblB"/>
+          <p:cNvSpPr txBox="1"/>
+          <p:nvPr/>
+        </p:nvSpPr>
+        <p:spPr>
+          <a:xfrm>
+            <a:off x="6350000" y="1473200"/>
+            <a:ext cx="5080000" cy="304800"/>
+          </a:xfrm>
+          <a:prstGeom prst="rect">
+            <a:avLst/>
+          </a:prstGeom>
+          <a:noFill/>
+          <a:ln>
+            <a:noFill/>
+          </a:ln>
+        </p:spPr>
+        <p:txBody>
+          <a:bodyPr wrap="square" lIns="91440" tIns="45720" rIns="91440" bIns="45720" anchor="t"/>
+          <a:lstStyle/>
+          <a:p>
+            <a:pPr>
+              <a:buNone/>
+            </a:pPr>
+            <a:r>
+              <a:rPr lang="en-US" sz="1400" b="1" dirty="0">
+                <a:solidFill>
+                  <a:srgbClr val="6E6E6E"/>
+                </a:solidFill>
+              </a:rPr>
+              <a:t>B · Google-Kalender-Berechtigungsdialog</a:t>
+            </a:r>
+          </a:p>
+        </p:txBody>
+      </p:sp>
+      <p:sp>
+        <p:nvSpPr>
+          <p:cNvPr id="107" name="Caption"/>
+          <p:cNvSpPr txBox="1"/>
+          <p:nvPr/>
+        </p:nvSpPr>
+        <p:spPr>
+          <a:xfrm>
+            <a:off x="762000" y="5664200"/>
+            <a:ext cx="10668000" cy="508000"/>
+          </a:xfrm>
+          <a:prstGeom prst="rect">
+            <a:avLst/>
+          </a:prstGeom>
+          <a:noFill/>
+          <a:ln>
+            <a:noFill/>
+          </a:ln>
+        </p:spPr>
+        <p:txBody>
+          <a:bodyPr wrap="square" lIns="91440" tIns="45720" rIns="91440" bIns="45720" anchor="ctr"/>
+          <a:lstStyle/>
+          <a:p>
+            <a:pPr>
+              <a:buNone/>
+            </a:pPr>
+            <a:r>
+              <a:rPr lang="en-US" sz="1800" b="1" dirty="0">
                 <a:solidFill>
                   <a:srgbClr val="1A1A1A"/>
                 </a:solidFill>
               </a:rPr>
-              <a:t>Ungelesene</a:t>
-            </a:r>
-            <a:r>
-              <a:rPr lang="en-US" sz="1600" b="1" dirty="0">
-                <a:solidFill>
-                  <a:srgbClr val="1A1A1A"/>
-                </a:solidFill>
-              </a:rPr>
-              <a:t> Mails -&gt; Agent</a:t>
-            </a:r>
-          </a:p>
-          <a:p>
-            <a:pPr marL="285750" indent="-285750">
-              <a:spcBef>
-                <a:spcPts val="800"/>
-              </a:spcBef>
-              <a:buClr>
-                <a:srgbClr val="B1063A"/>
-              </a:buClr>
-              <a:buFont typeface="Arial"/>
-              <a:buChar char="•"/>
-            </a:pPr>
-            <a:r>
-              <a:rPr lang="en-US" sz="1400" dirty="0">
-                <a:solidFill>
-                  <a:srgbClr val="3C3C3C"/>
-                </a:solidFill>
-              </a:rPr>
-              <a:t>Frage → FAQ-Antwort</a:t>
-            </a:r>
-          </a:p>
-          <a:p>
-            <a:pPr marL="285750" indent="-285750">
-              <a:buClr>
-                <a:srgbClr val="B1063A"/>
-              </a:buClr>
-              <a:buFont typeface="Arial"/>
-              <a:buChar char="•"/>
-            </a:pPr>
-            <a:r>
-              <a:rPr lang="en-US" sz="1400" dirty="0">
-                <a:solidFill>
-                  <a:srgbClr val="3C3C3C"/>
-                </a:solidFill>
-              </a:rPr>
-              <a:t>Buchung → Kalender → freier Slot</a:t>
-            </a:r>
-          </a:p>
-          <a:p>
-            <a:pPr marL="285750" indent="-285750">
-              <a:buClr>
-                <a:srgbClr val="B1063A"/>
-              </a:buClr>
-              <a:buFont typeface="Arial"/>
-              <a:buChar char="•"/>
-            </a:pPr>
-            <a:r>
-              <a:rPr lang="en-US" sz="1400" dirty="0">
-                <a:solidFill>
-                  <a:srgbClr val="3C3C3C"/>
-                </a:solidFill>
-              </a:rPr>
-              <a:t>sonst → eskalieren</a:t>
-            </a:r>
-          </a:p>
-          <a:p>
-            <a:pPr>
-              <a:spcBef>
-                <a:spcPts val="1400"/>
-              </a:spcBef>
-              <a:buNone/>
-            </a:pPr>
-            <a:r>
-              <a:rPr lang="en-US" sz="1500" b="1" dirty="0">
-                <a:solidFill>
-                  <a:srgbClr val="B1063A"/>
-                </a:solidFill>
-              </a:rPr>
-              <a:t>Es </a:t>
-            </a:r>
-            <a:r>
-              <a:rPr lang="en-US" sz="1500" b="1" dirty="0" err="1">
-                <a:solidFill>
-                  <a:srgbClr val="B1063A"/>
-                </a:solidFill>
-              </a:rPr>
-              <a:t>werden</a:t>
-            </a:r>
-            <a:r>
-              <a:rPr lang="en-US" sz="1500" b="1" dirty="0">
-                <a:solidFill>
-                  <a:srgbClr val="B1063A"/>
-                </a:solidFill>
-              </a:rPr>
-              <a:t> </a:t>
-            </a:r>
-            <a:r>
-              <a:rPr lang="en-US" sz="1500" b="1" dirty="0" err="1">
-                <a:solidFill>
-                  <a:srgbClr val="B1063A"/>
-                </a:solidFill>
-              </a:rPr>
-              <a:t>nur</a:t>
-            </a:r>
-            <a:r>
-              <a:rPr lang="en-US" sz="1500" b="1" dirty="0">
-                <a:solidFill>
-                  <a:srgbClr val="B1063A"/>
-                </a:solidFill>
-              </a:rPr>
-              <a:t> </a:t>
-            </a:r>
-            <a:r>
-              <a:rPr lang="en-US" sz="1500" b="1" dirty="0" err="1">
-                <a:solidFill>
-                  <a:srgbClr val="B1063A"/>
-                </a:solidFill>
-              </a:rPr>
-              <a:t>Entwürfe</a:t>
-            </a:r>
-            <a:r>
-              <a:rPr lang="en-US" sz="1500" b="1" dirty="0">
-                <a:solidFill>
-                  <a:srgbClr val="B1063A"/>
-                </a:solidFill>
-              </a:rPr>
-              <a:t> </a:t>
-            </a:r>
-            <a:r>
-              <a:rPr lang="en-US" sz="1500" b="1" dirty="0" err="1">
-                <a:solidFill>
-                  <a:srgbClr val="B1063A"/>
-                </a:solidFill>
-              </a:rPr>
-              <a:t>erstellt</a:t>
-            </a:r>
-            <a:r>
-              <a:rPr lang="en-US" sz="1500" b="1" dirty="0">
-                <a:solidFill>
-                  <a:srgbClr val="B1063A"/>
-                </a:solidFill>
-              </a:rPr>
-              <a:t>!</a:t>
+              <a:t>Nur gewähren, was die Aufgabe braucht. Gmail: lesen + entwerfen. Kalender: nur lesen.</a:t>
             </a:r>
           </a:p>
         </p:txBody>
@@ -9363,7 +10211,7 @@
           <p:cNvPr id="6" name="Picture 5">
             <a:extLst>
               <a:ext uri="{FF2B5EF4-FFF2-40B4-BE49-F238E27FC236}">
-                <a16:creationId xmlns:a16="http://schemas.microsoft.com/office/drawing/2014/main" id="{04F10E4B-42E3-F28E-AC7D-84A7E48F726F}"/>
+                <a16:creationId xmlns:a16="http://schemas.microsoft.com/office/drawing/2014/main" id="{B0F50A85-F046-F2B8-651B-916A709D5BD4}"/>
               </a:ext>
             </a:extLst>
           </p:cNvPr>
@@ -9380,91 +10228,78 @@
         </p:blipFill>
         <p:spPr>
           <a:xfrm>
-            <a:off x="761999" y="1545696"/>
-            <a:ext cx="7307469" cy="4067704"/>
+            <a:off x="6756607" y="1778000"/>
+            <a:ext cx="4472538" cy="3835400"/>
           </a:xfrm>
           <a:prstGeom prst="rect">
             <a:avLst/>
           </a:prstGeom>
         </p:spPr>
       </p:pic>
-      <p:sp>
-        <p:nvSpPr>
-          <p:cNvPr id="8" name="C2">
+      <p:pic>
+        <p:nvPicPr>
+          <p:cNvPr id="7" name="Picture 6">
             <a:extLst>
               <a:ext uri="{FF2B5EF4-FFF2-40B4-BE49-F238E27FC236}">
-                <a16:creationId xmlns:a16="http://schemas.microsoft.com/office/drawing/2014/main" id="{4567600E-5310-341E-FBC0-F5EE5743044D}"/>
+                <a16:creationId xmlns:a16="http://schemas.microsoft.com/office/drawing/2014/main" id="{C2C446D8-1CEC-A9E2-9CB5-B160CB4E5B33}"/>
               </a:ext>
             </a:extLst>
           </p:cNvPr>
-          <p:cNvSpPr txBox="1"/>
-          <p:nvPr/>
-        </p:nvSpPr>
-        <p:spPr>
-          <a:xfrm>
-            <a:off x="2974340" y="5876396"/>
-            <a:ext cx="1778000" cy="381000"/>
-          </a:xfrm>
-          <a:prstGeom prst="roundRect">
-            <a:avLst/>
-          </a:prstGeom>
-          <a:solidFill>
-            <a:srgbClr val="B1063A"/>
-          </a:solidFill>
-          <a:ln>
-            <a:noFill/>
-          </a:ln>
-        </p:spPr>
-        <p:txBody>
-          <a:bodyPr wrap="square" lIns="101600" tIns="45720" rIns="101600" bIns="45720" anchor="ctr"/>
-          <a:lstStyle/>
-          <a:p>
-            <a:pPr algn="ctr">
-              <a:buNone/>
-            </a:pPr>
-            <a:r>
-              <a:rPr lang="en-US" sz="1300" b="1" dirty="0">
-                <a:solidFill>
-                  <a:srgbClr val="FFFFFF"/>
-                </a:solidFill>
-              </a:rPr>
-              <a:t>Human-In-The-Loop</a:t>
-            </a:r>
-          </a:p>
-        </p:txBody>
-      </p:sp>
-      <p:cxnSp>
-        <p:nvCxnSpPr>
-          <p:cNvPr id="9" name="Leader 302">
+          <p:cNvPicPr>
+            <a:picLocks noChangeAspect="1"/>
+          </p:cNvPicPr>
+          <p:nvPr/>
+        </p:nvPicPr>
+        <p:blipFill>
+          <a:blip r:embed="rId4"/>
+          <a:stretch>
+            <a:fillRect/>
+          </a:stretch>
+        </p:blipFill>
+        <p:spPr>
+          <a:xfrm>
+            <a:off x="962855" y="1778000"/>
+            <a:ext cx="4720493" cy="3835400"/>
+          </a:xfrm>
+          <a:prstGeom prst="rect">
+            <a:avLst/>
+          </a:prstGeom>
+        </p:spPr>
+      </p:pic>
+      <p:pic>
+        <p:nvPicPr>
+          <p:cNvPr id="3" name="Picture 2">
             <a:extLst>
               <a:ext uri="{FF2B5EF4-FFF2-40B4-BE49-F238E27FC236}">
-                <a16:creationId xmlns:a16="http://schemas.microsoft.com/office/drawing/2014/main" id="{A2D33438-2E78-56A3-B57A-53FA66DEE51A}"/>
+                <a16:creationId xmlns:a16="http://schemas.microsoft.com/office/drawing/2014/main" id="{A236EB42-8105-776A-1233-20195BCA7FB8}"/>
               </a:ext>
             </a:extLst>
           </p:cNvPr>
-          <p:cNvCxnSpPr/>
-          <p:nvPr/>
-        </p:nvCxnSpPr>
-        <p:spPr>
-          <a:xfrm flipH="1" flipV="1">
-            <a:off x="3429000" y="5359400"/>
-            <a:ext cx="508000" cy="508000"/>
-          </a:xfrm>
-          <a:prstGeom prst="straightConnector1">
-            <a:avLst/>
-          </a:prstGeom>
-          <a:ln w="19050">
-            <a:solidFill>
-              <a:srgbClr val="B1063A"/>
-            </a:solidFill>
-            <a:tailEnd type="oval"/>
-          </a:ln>
-        </p:spPr>
-      </p:cxnSp>
+          <p:cNvPicPr>
+            <a:picLocks noChangeAspect="1"/>
+          </p:cNvPicPr>
+          <p:nvPr/>
+        </p:nvPicPr>
+        <p:blipFill>
+          <a:blip r:embed="rId5"/>
+          <a:stretch>
+            <a:fillRect/>
+          </a:stretch>
+        </p:blipFill>
+        <p:spPr>
+          <a:xfrm>
+            <a:off x="9489298" y="183584"/>
+            <a:ext cx="2592088" cy="776265"/>
+          </a:xfrm>
+          <a:prstGeom prst="rect">
+            <a:avLst/>
+          </a:prstGeom>
+        </p:spPr>
+      </p:pic>
     </p:spTree>
     <p:extLst>
       <p:ext uri="{BB962C8B-B14F-4D97-AF65-F5344CB8AC3E}">
-        <p14:creationId xmlns:p14="http://schemas.microsoft.com/office/powerpoint/2010/main" val="1372864458"/>
+        <p14:creationId xmlns:p14="http://schemas.microsoft.com/office/powerpoint/2010/main" val="3014146161"/>
       </p:ext>
     </p:extLst>
   </p:cSld>
@@ -9496,6 +10331,424 @@
           <p:cNvPr id="2" name="Title 1">
             <a:extLst>
               <a:ext uri="{FF2B5EF4-FFF2-40B4-BE49-F238E27FC236}">
+                <a16:creationId xmlns:a16="http://schemas.microsoft.com/office/drawing/2014/main" id="{21A9E976-E223-FFDB-E91E-8B514418EBB7}"/>
+              </a:ext>
+            </a:extLst>
+          </p:cNvPr>
+          <p:cNvSpPr>
+            <a:spLocks noGrp="1"/>
+          </p:cNvSpPr>
+          <p:nvPr>
+            <p:ph type="title"/>
+          </p:nvPr>
+        </p:nvSpPr>
+        <p:spPr>
+          <a:xfrm>
+            <a:off x="762000" y="457200"/>
+            <a:ext cx="10668000" cy="711200"/>
+          </a:xfrm>
+        </p:spPr>
+        <p:txBody>
+          <a:bodyPr anchor="t" anchorCtr="0"/>
+          <a:lstStyle/>
+          <a:p>
+            <a:r>
+              <a:rPr lang="en-US" sz="3000" dirty="0">
+                <a:solidFill>
+                  <a:srgbClr val="B1063A"/>
+                </a:solidFill>
+              </a:rPr>
+              <a:t>Demo · Schritt 3: Testen</a:t>
+            </a:r>
+            <a:endParaRPr lang="en-US" sz="3000" b="1" dirty="0">
+              <a:solidFill>
+                <a:srgbClr val="B1063A"/>
+              </a:solidFill>
+            </a:endParaRPr>
+          </a:p>
+        </p:txBody>
+      </p:sp>
+      <p:sp>
+        <p:nvSpPr>
+          <p:cNvPr id="100" name="Rule"/>
+          <p:cNvSpPr txBox="1"/>
+          <p:nvPr/>
+        </p:nvSpPr>
+        <p:spPr>
+          <a:xfrm>
+            <a:off x="762000" y="1244600"/>
+            <a:ext cx="762000" cy="38100"/>
+          </a:xfrm>
+          <a:prstGeom prst="rect">
+            <a:avLst/>
+          </a:prstGeom>
+          <a:solidFill>
+            <a:srgbClr val="B1063A"/>
+          </a:solidFill>
+          <a:ln>
+            <a:noFill/>
+          </a:ln>
+        </p:spPr>
+        <p:txBody>
+          <a:bodyPr wrap="square" lIns="91440" tIns="45720" rIns="91440" bIns="45720" anchor="t"/>
+          <a:lstStyle/>
+          <a:p>
+            <a:endParaRPr/>
+          </a:p>
+        </p:txBody>
+      </p:sp>
+      <p:sp>
+        <p:nvSpPr>
+          <p:cNvPr id="104" name="Side"/>
+          <p:cNvSpPr txBox="1"/>
+          <p:nvPr/>
+        </p:nvSpPr>
+        <p:spPr>
+          <a:xfrm>
+            <a:off x="8158480" y="1545696"/>
+            <a:ext cx="3657600" cy="4191000"/>
+          </a:xfrm>
+          <a:prstGeom prst="roundRect">
+            <a:avLst/>
+          </a:prstGeom>
+          <a:solidFill>
+            <a:srgbClr val="F4F4F4"/>
+          </a:solidFill>
+          <a:ln>
+            <a:noFill/>
+          </a:ln>
+        </p:spPr>
+        <p:txBody>
+          <a:bodyPr wrap="square" lIns="177800" tIns="45720" rIns="177800" bIns="45720" anchor="t"/>
+          <a:lstStyle/>
+          <a:p>
+            <a:pPr>
+              <a:spcBef>
+                <a:spcPts val="1200"/>
+              </a:spcBef>
+              <a:buNone/>
+            </a:pPr>
+            <a:r>
+              <a:rPr lang="en-US" sz="1600" b="1" dirty="0" err="1">
+                <a:solidFill>
+                  <a:srgbClr val="1A1A1A"/>
+                </a:solidFill>
+              </a:rPr>
+              <a:t>Ungelesene</a:t>
+            </a:r>
+            <a:r>
+              <a:rPr lang="en-US" sz="1600" b="1" dirty="0">
+                <a:solidFill>
+                  <a:srgbClr val="1A1A1A"/>
+                </a:solidFill>
+              </a:rPr>
+              <a:t> Mails -&gt; Agent</a:t>
+            </a:r>
+          </a:p>
+          <a:p>
+            <a:pPr marL="285750" indent="-285750">
+              <a:spcBef>
+                <a:spcPts val="800"/>
+              </a:spcBef>
+              <a:buClr>
+                <a:srgbClr val="B1063A"/>
+              </a:buClr>
+              <a:buFont typeface="Arial"/>
+              <a:buChar char="•"/>
+            </a:pPr>
+            <a:r>
+              <a:rPr lang="en-US" sz="1400" dirty="0">
+                <a:solidFill>
+                  <a:srgbClr val="3C3C3C"/>
+                </a:solidFill>
+              </a:rPr>
+              <a:t>Frage → FAQ-Antwort</a:t>
+            </a:r>
+          </a:p>
+          <a:p>
+            <a:pPr marL="285750" indent="-285750">
+              <a:buClr>
+                <a:srgbClr val="B1063A"/>
+              </a:buClr>
+              <a:buFont typeface="Arial"/>
+              <a:buChar char="•"/>
+            </a:pPr>
+            <a:r>
+              <a:rPr lang="en-US" sz="1400" dirty="0">
+                <a:solidFill>
+                  <a:srgbClr val="3C3C3C"/>
+                </a:solidFill>
+              </a:rPr>
+              <a:t>Buchung → Kalender → freier Slot</a:t>
+            </a:r>
+          </a:p>
+          <a:p>
+            <a:pPr marL="285750" indent="-285750">
+              <a:buClr>
+                <a:srgbClr val="B1063A"/>
+              </a:buClr>
+              <a:buFont typeface="Arial"/>
+              <a:buChar char="•"/>
+            </a:pPr>
+            <a:r>
+              <a:rPr lang="en-US" sz="1400" dirty="0">
+                <a:solidFill>
+                  <a:srgbClr val="3C3C3C"/>
+                </a:solidFill>
+              </a:rPr>
+              <a:t>sonst → eskalieren</a:t>
+            </a:r>
+          </a:p>
+          <a:p>
+            <a:pPr>
+              <a:spcBef>
+                <a:spcPts val="1400"/>
+              </a:spcBef>
+              <a:buNone/>
+            </a:pPr>
+            <a:r>
+              <a:rPr lang="en-US" sz="1500" b="1" dirty="0">
+                <a:solidFill>
+                  <a:srgbClr val="B1063A"/>
+                </a:solidFill>
+              </a:rPr>
+              <a:t>Es </a:t>
+            </a:r>
+            <a:r>
+              <a:rPr lang="en-US" sz="1500" b="1" dirty="0" err="1">
+                <a:solidFill>
+                  <a:srgbClr val="B1063A"/>
+                </a:solidFill>
+              </a:rPr>
+              <a:t>werden</a:t>
+            </a:r>
+            <a:r>
+              <a:rPr lang="en-US" sz="1500" b="1" dirty="0">
+                <a:solidFill>
+                  <a:srgbClr val="B1063A"/>
+                </a:solidFill>
+              </a:rPr>
+              <a:t> </a:t>
+            </a:r>
+            <a:r>
+              <a:rPr lang="en-US" sz="1500" b="1" dirty="0" err="1">
+                <a:solidFill>
+                  <a:srgbClr val="B1063A"/>
+                </a:solidFill>
+              </a:rPr>
+              <a:t>nur</a:t>
+            </a:r>
+            <a:r>
+              <a:rPr lang="en-US" sz="1500" b="1" dirty="0">
+                <a:solidFill>
+                  <a:srgbClr val="B1063A"/>
+                </a:solidFill>
+              </a:rPr>
+              <a:t> </a:t>
+            </a:r>
+            <a:r>
+              <a:rPr lang="en-US" sz="1500" b="1" dirty="0" err="1">
+                <a:solidFill>
+                  <a:srgbClr val="B1063A"/>
+                </a:solidFill>
+              </a:rPr>
+              <a:t>Entwürfe</a:t>
+            </a:r>
+            <a:r>
+              <a:rPr lang="en-US" sz="1500" b="1" dirty="0">
+                <a:solidFill>
+                  <a:srgbClr val="B1063A"/>
+                </a:solidFill>
+              </a:rPr>
+              <a:t> </a:t>
+            </a:r>
+            <a:r>
+              <a:rPr lang="en-US" sz="1500" b="1" dirty="0" err="1">
+                <a:solidFill>
+                  <a:srgbClr val="B1063A"/>
+                </a:solidFill>
+              </a:rPr>
+              <a:t>erstellt</a:t>
+            </a:r>
+            <a:r>
+              <a:rPr lang="en-US" sz="1500" b="1" dirty="0">
+                <a:solidFill>
+                  <a:srgbClr val="B1063A"/>
+                </a:solidFill>
+              </a:rPr>
+              <a:t>!</a:t>
+            </a:r>
+          </a:p>
+        </p:txBody>
+      </p:sp>
+      <p:pic>
+        <p:nvPicPr>
+          <p:cNvPr id="6" name="Picture 5">
+            <a:extLst>
+              <a:ext uri="{FF2B5EF4-FFF2-40B4-BE49-F238E27FC236}">
+                <a16:creationId xmlns:a16="http://schemas.microsoft.com/office/drawing/2014/main" id="{04F10E4B-42E3-F28E-AC7D-84A7E48F726F}"/>
+              </a:ext>
+            </a:extLst>
+          </p:cNvPr>
+          <p:cNvPicPr>
+            <a:picLocks noChangeAspect="1"/>
+          </p:cNvPicPr>
+          <p:nvPr/>
+        </p:nvPicPr>
+        <p:blipFill>
+          <a:blip r:embed="rId3"/>
+          <a:stretch>
+            <a:fillRect/>
+          </a:stretch>
+        </p:blipFill>
+        <p:spPr>
+          <a:xfrm>
+            <a:off x="761999" y="1545696"/>
+            <a:ext cx="7307469" cy="4067704"/>
+          </a:xfrm>
+          <a:prstGeom prst="rect">
+            <a:avLst/>
+          </a:prstGeom>
+        </p:spPr>
+      </p:pic>
+      <p:sp>
+        <p:nvSpPr>
+          <p:cNvPr id="8" name="C2">
+            <a:extLst>
+              <a:ext uri="{FF2B5EF4-FFF2-40B4-BE49-F238E27FC236}">
+                <a16:creationId xmlns:a16="http://schemas.microsoft.com/office/drawing/2014/main" id="{4567600E-5310-341E-FBC0-F5EE5743044D}"/>
+              </a:ext>
+            </a:extLst>
+          </p:cNvPr>
+          <p:cNvSpPr txBox="1"/>
+          <p:nvPr/>
+        </p:nvSpPr>
+        <p:spPr>
+          <a:xfrm>
+            <a:off x="2974340" y="5876396"/>
+            <a:ext cx="1778000" cy="381000"/>
+          </a:xfrm>
+          <a:prstGeom prst="roundRect">
+            <a:avLst/>
+          </a:prstGeom>
+          <a:solidFill>
+            <a:srgbClr val="B1063A"/>
+          </a:solidFill>
+          <a:ln>
+            <a:noFill/>
+          </a:ln>
+        </p:spPr>
+        <p:txBody>
+          <a:bodyPr wrap="square" lIns="101600" tIns="45720" rIns="101600" bIns="45720" anchor="ctr"/>
+          <a:lstStyle/>
+          <a:p>
+            <a:pPr algn="ctr">
+              <a:buNone/>
+            </a:pPr>
+            <a:r>
+              <a:rPr lang="en-US" sz="1300" b="1" dirty="0">
+                <a:solidFill>
+                  <a:srgbClr val="FFFFFF"/>
+                </a:solidFill>
+              </a:rPr>
+              <a:t>Human-In-The-Loop</a:t>
+            </a:r>
+          </a:p>
+        </p:txBody>
+      </p:sp>
+      <p:cxnSp>
+        <p:nvCxnSpPr>
+          <p:cNvPr id="9" name="Leader 302">
+            <a:extLst>
+              <a:ext uri="{FF2B5EF4-FFF2-40B4-BE49-F238E27FC236}">
+                <a16:creationId xmlns:a16="http://schemas.microsoft.com/office/drawing/2014/main" id="{A2D33438-2E78-56A3-B57A-53FA66DEE51A}"/>
+              </a:ext>
+            </a:extLst>
+          </p:cNvPr>
+          <p:cNvCxnSpPr/>
+          <p:nvPr/>
+        </p:nvCxnSpPr>
+        <p:spPr>
+          <a:xfrm flipH="1" flipV="1">
+            <a:off x="3429000" y="5359400"/>
+            <a:ext cx="508000" cy="508000"/>
+          </a:xfrm>
+          <a:prstGeom prst="straightConnector1">
+            <a:avLst/>
+          </a:prstGeom>
+          <a:ln w="19050">
+            <a:solidFill>
+              <a:srgbClr val="B1063A"/>
+            </a:solidFill>
+            <a:tailEnd type="oval"/>
+          </a:ln>
+        </p:spPr>
+      </p:cxnSp>
+      <p:pic>
+        <p:nvPicPr>
+          <p:cNvPr id="3" name="Picture 2">
+            <a:extLst>
+              <a:ext uri="{FF2B5EF4-FFF2-40B4-BE49-F238E27FC236}">
+                <a16:creationId xmlns:a16="http://schemas.microsoft.com/office/drawing/2014/main" id="{5B611B7B-9184-C639-6E12-D56691AF9FF4}"/>
+              </a:ext>
+            </a:extLst>
+          </p:cNvPr>
+          <p:cNvPicPr>
+            <a:picLocks noChangeAspect="1"/>
+          </p:cNvPicPr>
+          <p:nvPr/>
+        </p:nvPicPr>
+        <p:blipFill>
+          <a:blip r:embed="rId4"/>
+          <a:stretch>
+            <a:fillRect/>
+          </a:stretch>
+        </p:blipFill>
+        <p:spPr>
+          <a:xfrm>
+            <a:off x="9489298" y="183584"/>
+            <a:ext cx="2592088" cy="776265"/>
+          </a:xfrm>
+          <a:prstGeom prst="rect">
+            <a:avLst/>
+          </a:prstGeom>
+        </p:spPr>
+      </p:pic>
+    </p:spTree>
+    <p:extLst>
+      <p:ext uri="{BB962C8B-B14F-4D97-AF65-F5344CB8AC3E}">
+        <p14:creationId xmlns:p14="http://schemas.microsoft.com/office/powerpoint/2010/main" val="1372864458"/>
+      </p:ext>
+    </p:extLst>
+  </p:cSld>
+  <p:clrMapOvr>
+    <a:masterClrMapping/>
+  </p:clrMapOvr>
+</p:sld>
+</file>
+
+<file path=ppt/slides/slide18.xml><?xml version="1.0" encoding="utf-8"?>
+<p:sld xmlns:a="http://schemas.openxmlformats.org/drawingml/2006/main" xmlns:r="http://schemas.openxmlformats.org/officeDocument/2006/relationships" xmlns:p="http://schemas.openxmlformats.org/presentationml/2006/main">
+  <p:cSld>
+    <p:spTree>
+      <p:nvGrpSpPr>
+        <p:cNvPr id="1" name=""/>
+        <p:cNvGrpSpPr/>
+        <p:nvPr/>
+      </p:nvGrpSpPr>
+      <p:grpSpPr>
+        <a:xfrm>
+          <a:off x="0" y="0"/>
+          <a:ext cx="0" cy="0"/>
+          <a:chOff x="0" y="0"/>
+          <a:chExt cx="0" cy="0"/>
+        </a:xfrm>
+      </p:grpSpPr>
+      <p:sp>
+        <p:nvSpPr>
+          <p:cNvPr id="2" name="Title 1">
+            <a:extLst>
+              <a:ext uri="{FF2B5EF4-FFF2-40B4-BE49-F238E27FC236}">
                 <a16:creationId xmlns:a16="http://schemas.microsoft.com/office/drawing/2014/main" id="{E4C33B5A-B82F-504E-033B-6582695D1A94}"/>
               </a:ext>
             </a:extLst>
@@ -10295,7 +11548,1898 @@
 </p:sld>
 </file>
 
-<file path=ppt/slides/slide18.xml><?xml version="1.0" encoding="utf-8"?>
+<file path=ppt/slides/slide19.xml><?xml version="1.0" encoding="utf-8"?>
+<p:sld xmlns:a="http://schemas.openxmlformats.org/drawingml/2006/main" xmlns:r="http://schemas.openxmlformats.org/officeDocument/2006/relationships" xmlns:p="http://schemas.openxmlformats.org/presentationml/2006/main">
+  <p:cSld>
+    <p:spTree>
+      <p:nvGrpSpPr>
+        <p:cNvPr id="1" name=""/>
+        <p:cNvGrpSpPr/>
+        <p:nvPr/>
+      </p:nvGrpSpPr>
+      <p:grpSpPr>
+        <a:xfrm>
+          <a:off x="0" y="0"/>
+          <a:ext cx="0" cy="0"/>
+          <a:chOff x="0" y="0"/>
+          <a:chExt cx="0" cy="0"/>
+        </a:xfrm>
+      </p:grpSpPr>
+      <p:sp>
+        <p:nvSpPr>
+          <p:cNvPr id="2" name="Title 1">
+            <a:extLst>
+              <a:ext uri="{FF2B5EF4-FFF2-40B4-BE49-F238E27FC236}">
+                <a16:creationId xmlns:a16="http://schemas.microsoft.com/office/drawing/2014/main" id="{B2945878-3DC6-407A-E1CC-85A560B4D62C}"/>
+              </a:ext>
+            </a:extLst>
+          </p:cNvPr>
+          <p:cNvSpPr>
+            <a:spLocks noGrp="1"/>
+          </p:cNvSpPr>
+          <p:nvPr>
+            <p:ph type="title"/>
+          </p:nvPr>
+        </p:nvSpPr>
+        <p:spPr>
+          <a:xfrm>
+            <a:off x="762000" y="457200"/>
+            <a:ext cx="10668000" cy="711200"/>
+          </a:xfrm>
+        </p:spPr>
+        <p:txBody>
+          <a:bodyPr/>
+          <a:lstStyle/>
+          <a:p>
+            <a:pPr algn="l">
+              <a:buNone/>
+            </a:pPr>
+            <a:r>
+              <a:rPr lang="de-DE" sz="3000" b="1" dirty="0">
+                <a:solidFill>
+                  <a:srgbClr val="B1063A"/>
+                </a:solidFill>
+              </a:rPr>
+              <a:t>Nützliche Links</a:t>
+            </a:r>
+          </a:p>
+        </p:txBody>
+      </p:sp>
+      <p:sp>
+        <p:nvSpPr>
+          <p:cNvPr id="100" name="Rule"/>
+          <p:cNvSpPr/>
+          <p:nvPr/>
+        </p:nvSpPr>
+        <p:spPr>
+          <a:xfrm>
+            <a:off x="762000" y="1244600"/>
+            <a:ext cx="762000" cy="38100"/>
+          </a:xfrm>
+          <a:prstGeom prst="rect">
+            <a:avLst/>
+          </a:prstGeom>
+          <a:solidFill>
+            <a:srgbClr val="B1063A"/>
+          </a:solidFill>
+          <a:ln>
+            <a:noFill/>
+          </a:ln>
+        </p:spPr>
+        <p:txBody>
+          <a:bodyPr/>
+          <a:lstStyle/>
+          <a:p>
+            <a:endParaRPr lang="de-DE"/>
+          </a:p>
+        </p:txBody>
+      </p:sp>
+      <p:sp>
+        <p:nvSpPr>
+          <p:cNvPr id="101" name="Num1"/>
+          <p:cNvSpPr txBox="1"/>
+          <p:nvPr/>
+        </p:nvSpPr>
+        <p:spPr>
+          <a:xfrm>
+            <a:off x="762000" y="1803400"/>
+            <a:ext cx="381000" cy="508000"/>
+          </a:xfrm>
+          <a:prstGeom prst="rect">
+            <a:avLst/>
+          </a:prstGeom>
+          <a:noFill/>
+        </p:spPr>
+        <p:txBody>
+          <a:bodyPr wrap="square" lIns="0" tIns="0" rIns="0" bIns="0" anchor="t">
+            <a:normAutofit/>
+          </a:bodyPr>
+          <a:lstStyle/>
+          <a:p>
+            <a:r>
+              <a:rPr lang="de-DE" sz="2000" b="1" dirty="0">
+                <a:solidFill>
+                  <a:srgbClr val="B1063A"/>
+                </a:solidFill>
+              </a:rPr>
+              <a:t>1</a:t>
+            </a:r>
+          </a:p>
+        </p:txBody>
+      </p:sp>
+      <p:sp>
+        <p:nvSpPr>
+          <p:cNvPr id="102" name="Label1"/>
+          <p:cNvSpPr txBox="1"/>
+          <p:nvPr/>
+        </p:nvSpPr>
+        <p:spPr>
+          <a:xfrm>
+            <a:off x="1219200" y="1778000"/>
+            <a:ext cx="5588000" cy="685800"/>
+          </a:xfrm>
+          <a:prstGeom prst="rect">
+            <a:avLst/>
+          </a:prstGeom>
+          <a:noFill/>
+        </p:spPr>
+        <p:txBody>
+          <a:bodyPr wrap="square" lIns="0" tIns="0" rIns="0" bIns="0" anchor="t">
+            <a:normAutofit/>
+          </a:bodyPr>
+          <a:lstStyle/>
+          <a:p>
+            <a:r>
+              <a:rPr lang="de-DE" sz="1800" b="1" dirty="0">
+                <a:solidFill>
+                  <a:srgbClr val="1A1A1A"/>
+                </a:solidFill>
+              </a:rPr>
+              <a:t>Model Context Protocol</a:t>
+            </a:r>
+          </a:p>
+          <a:p>
+            <a:r>
+              <a:rPr lang="de-DE" sz="1400" dirty="0">
+                <a:solidFill>
+                  <a:srgbClr val="595959"/>
+                </a:solidFill>
+              </a:rPr>
+              <a:t>Offizielle Website: Spezifikation, Dokumentation, Einstieg</a:t>
+            </a:r>
+          </a:p>
+        </p:txBody>
+      </p:sp>
+      <p:sp>
+        <p:nvSpPr>
+          <p:cNvPr id="103" name="Url1"/>
+          <p:cNvSpPr txBox="1"/>
+          <p:nvPr/>
+        </p:nvSpPr>
+        <p:spPr>
+          <a:xfrm>
+            <a:off x="7061200" y="1778000"/>
+            <a:ext cx="4368800" cy="685800"/>
+          </a:xfrm>
+          <a:prstGeom prst="rect">
+            <a:avLst/>
+          </a:prstGeom>
+          <a:noFill/>
+        </p:spPr>
+        <p:txBody>
+          <a:bodyPr wrap="square" lIns="0" tIns="0" rIns="0" bIns="0" anchor="ctr">
+            <a:normAutofit/>
+          </a:bodyPr>
+          <a:lstStyle/>
+          <a:p>
+            <a:r>
+              <a:rPr lang="de-DE" sz="1400" u="sng" dirty="0">
+                <a:solidFill>
+                  <a:srgbClr val="B1063A"/>
+                </a:solidFill>
+                <a:hlinkClick r:id="rId2"/>
+              </a:rPr>
+              <a:t>https://modelcontextprotocol.io</a:t>
+            </a:r>
+          </a:p>
+        </p:txBody>
+      </p:sp>
+      <p:sp>
+        <p:nvSpPr>
+          <p:cNvPr id="104" name="Div1"/>
+          <p:cNvSpPr/>
+          <p:nvPr/>
+        </p:nvSpPr>
+        <p:spPr>
+          <a:xfrm>
+            <a:off x="762000" y="2590800"/>
+            <a:ext cx="10668000" cy="12700"/>
+          </a:xfrm>
+          <a:prstGeom prst="rect">
+            <a:avLst/>
+          </a:prstGeom>
+          <a:solidFill>
+            <a:srgbClr val="E0E0E0"/>
+          </a:solidFill>
+          <a:ln>
+            <a:noFill/>
+          </a:ln>
+        </p:spPr>
+        <p:txBody>
+          <a:bodyPr/>
+          <a:lstStyle/>
+          <a:p>
+            <a:endParaRPr lang="de-DE"/>
+          </a:p>
+        </p:txBody>
+      </p:sp>
+      <p:sp>
+        <p:nvSpPr>
+          <p:cNvPr id="105" name="Num2"/>
+          <p:cNvSpPr txBox="1"/>
+          <p:nvPr/>
+        </p:nvSpPr>
+        <p:spPr>
+          <a:xfrm>
+            <a:off x="762000" y="2768600"/>
+            <a:ext cx="381000" cy="508000"/>
+          </a:xfrm>
+          <a:prstGeom prst="rect">
+            <a:avLst/>
+          </a:prstGeom>
+          <a:noFill/>
+        </p:spPr>
+        <p:txBody>
+          <a:bodyPr wrap="square" lIns="0" tIns="0" rIns="0" bIns="0" anchor="t">
+            <a:normAutofit/>
+          </a:bodyPr>
+          <a:lstStyle/>
+          <a:p>
+            <a:r>
+              <a:rPr lang="de-DE" sz="2000" b="1" dirty="0">
+                <a:solidFill>
+                  <a:srgbClr val="B1063A"/>
+                </a:solidFill>
+              </a:rPr>
+              <a:t>2</a:t>
+            </a:r>
+          </a:p>
+        </p:txBody>
+      </p:sp>
+      <p:sp>
+        <p:nvSpPr>
+          <p:cNvPr id="106" name="Label2"/>
+          <p:cNvSpPr txBox="1"/>
+          <p:nvPr/>
+        </p:nvSpPr>
+        <p:spPr>
+          <a:xfrm>
+            <a:off x="1219200" y="2743200"/>
+            <a:ext cx="5588000" cy="685800"/>
+          </a:xfrm>
+          <a:prstGeom prst="rect">
+            <a:avLst/>
+          </a:prstGeom>
+          <a:noFill/>
+        </p:spPr>
+        <p:txBody>
+          <a:bodyPr wrap="square" lIns="0" tIns="0" rIns="0" bIns="0" anchor="t">
+            <a:normAutofit/>
+          </a:bodyPr>
+          <a:lstStyle/>
+          <a:p>
+            <a:r>
+              <a:rPr lang="de-DE" sz="1800" b="1" dirty="0">
+                <a:solidFill>
+                  <a:srgbClr val="1A1A1A"/>
+                </a:solidFill>
+              </a:rPr>
+              <a:t>MCP Security Best Practices</a:t>
+            </a:r>
+          </a:p>
+          <a:p>
+            <a:r>
+              <a:rPr lang="de-DE" sz="1400" dirty="0">
+                <a:solidFill>
+                  <a:srgbClr val="595959"/>
+                </a:solidFill>
+              </a:rPr>
+              <a:t>Sicherheitsempfehlungen der offiziellen MCP-Dokumentation</a:t>
+            </a:r>
+          </a:p>
+        </p:txBody>
+      </p:sp>
+      <p:sp>
+        <p:nvSpPr>
+          <p:cNvPr id="107" name="Url2"/>
+          <p:cNvSpPr txBox="1"/>
+          <p:nvPr/>
+        </p:nvSpPr>
+        <p:spPr>
+          <a:xfrm>
+            <a:off x="7061200" y="2743200"/>
+            <a:ext cx="4368800" cy="685800"/>
+          </a:xfrm>
+          <a:prstGeom prst="rect">
+            <a:avLst/>
+          </a:prstGeom>
+          <a:noFill/>
+        </p:spPr>
+        <p:txBody>
+          <a:bodyPr wrap="square" lIns="0" tIns="0" rIns="0" bIns="0" anchor="ctr">
+            <a:normAutofit/>
+          </a:bodyPr>
+          <a:lstStyle/>
+          <a:p>
+            <a:r>
+              <a:rPr lang="de-DE" sz="1400" u="sng" dirty="0">
+                <a:solidFill>
+                  <a:schemeClr val="hlink"/>
+                </a:solidFill>
+              </a:rPr>
+              <a:t>https://modelcontextprotocol.io/docs/2026-07-28/tutorials/security/security_best_practices</a:t>
+            </a:r>
+          </a:p>
+        </p:txBody>
+      </p:sp>
+      <p:sp>
+        <p:nvSpPr>
+          <p:cNvPr id="108" name="Div2"/>
+          <p:cNvSpPr/>
+          <p:nvPr/>
+        </p:nvSpPr>
+        <p:spPr>
+          <a:xfrm>
+            <a:off x="762000" y="3556000"/>
+            <a:ext cx="10668000" cy="12700"/>
+          </a:xfrm>
+          <a:prstGeom prst="rect">
+            <a:avLst/>
+          </a:prstGeom>
+          <a:solidFill>
+            <a:srgbClr val="E0E0E0"/>
+          </a:solidFill>
+          <a:ln>
+            <a:noFill/>
+          </a:ln>
+        </p:spPr>
+        <p:txBody>
+          <a:bodyPr/>
+          <a:lstStyle/>
+          <a:p>
+            <a:endParaRPr lang="de-DE"/>
+          </a:p>
+        </p:txBody>
+      </p:sp>
+      <p:sp>
+        <p:nvSpPr>
+          <p:cNvPr id="109" name="Num3"/>
+          <p:cNvSpPr txBox="1"/>
+          <p:nvPr/>
+        </p:nvSpPr>
+        <p:spPr>
+          <a:xfrm>
+            <a:off x="762000" y="3733800"/>
+            <a:ext cx="381000" cy="508000"/>
+          </a:xfrm>
+          <a:prstGeom prst="rect">
+            <a:avLst/>
+          </a:prstGeom>
+          <a:noFill/>
+        </p:spPr>
+        <p:txBody>
+          <a:bodyPr wrap="square" lIns="0" tIns="0" rIns="0" bIns="0" anchor="t">
+            <a:normAutofit/>
+          </a:bodyPr>
+          <a:lstStyle/>
+          <a:p>
+            <a:r>
+              <a:rPr lang="de-DE" sz="2000" b="1" dirty="0">
+                <a:solidFill>
+                  <a:srgbClr val="B1063A"/>
+                </a:solidFill>
+              </a:rPr>
+              <a:t>3</a:t>
+            </a:r>
+          </a:p>
+        </p:txBody>
+      </p:sp>
+      <p:sp>
+        <p:nvSpPr>
+          <p:cNvPr id="110" name="Label3"/>
+          <p:cNvSpPr txBox="1"/>
+          <p:nvPr/>
+        </p:nvSpPr>
+        <p:spPr>
+          <a:xfrm>
+            <a:off x="1219200" y="3708400"/>
+            <a:ext cx="5588000" cy="685800"/>
+          </a:xfrm>
+          <a:prstGeom prst="rect">
+            <a:avLst/>
+          </a:prstGeom>
+          <a:noFill/>
+        </p:spPr>
+        <p:txBody>
+          <a:bodyPr wrap="square" lIns="0" tIns="0" rIns="0" bIns="0" anchor="t">
+            <a:normAutofit/>
+          </a:bodyPr>
+          <a:lstStyle/>
+          <a:p>
+            <a:r>
+              <a:rPr lang="de-DE" sz="1800" b="1" dirty="0">
+                <a:solidFill>
+                  <a:srgbClr val="1A1A1A"/>
+                </a:solidFill>
+              </a:rPr>
+              <a:t>MCP Inspector</a:t>
+            </a:r>
+          </a:p>
+          <a:p>
+            <a:r>
+              <a:rPr lang="de-DE" sz="1400" dirty="0">
+                <a:solidFill>
+                  <a:srgbClr val="595959"/>
+                </a:solidFill>
+              </a:rPr>
+              <a:t>Tool zum Testen und Debuggen von MCP-Servern</a:t>
+            </a:r>
+          </a:p>
+        </p:txBody>
+      </p:sp>
+      <p:sp>
+        <p:nvSpPr>
+          <p:cNvPr id="111" name="Url3"/>
+          <p:cNvSpPr txBox="1"/>
+          <p:nvPr/>
+        </p:nvSpPr>
+        <p:spPr>
+          <a:xfrm>
+            <a:off x="7061200" y="3708400"/>
+            <a:ext cx="4368800" cy="685800"/>
+          </a:xfrm>
+          <a:prstGeom prst="rect">
+            <a:avLst/>
+          </a:prstGeom>
+          <a:noFill/>
+        </p:spPr>
+        <p:txBody>
+          <a:bodyPr wrap="square" lIns="0" tIns="0" rIns="0" bIns="0" anchor="ctr">
+            <a:normAutofit/>
+          </a:bodyPr>
+          <a:lstStyle/>
+          <a:p>
+            <a:r>
+              <a:rPr lang="de-DE" sz="1400" u="sng" dirty="0">
+                <a:solidFill>
+                  <a:srgbClr val="B1063A"/>
+                </a:solidFill>
+                <a:hlinkClick r:id="rId3"/>
+              </a:rPr>
+              <a:t>https://modelcontextprotocol.io/docs/2026-07-28/tools/inspector</a:t>
+            </a:r>
+          </a:p>
+        </p:txBody>
+      </p:sp>
+      <p:sp>
+        <p:nvSpPr>
+          <p:cNvPr id="112" name="Div3"/>
+          <p:cNvSpPr/>
+          <p:nvPr/>
+        </p:nvSpPr>
+        <p:spPr>
+          <a:xfrm>
+            <a:off x="762000" y="4521200"/>
+            <a:ext cx="10668000" cy="12700"/>
+          </a:xfrm>
+          <a:prstGeom prst="rect">
+            <a:avLst/>
+          </a:prstGeom>
+          <a:solidFill>
+            <a:srgbClr val="E0E0E0"/>
+          </a:solidFill>
+          <a:ln>
+            <a:noFill/>
+          </a:ln>
+        </p:spPr>
+        <p:txBody>
+          <a:bodyPr/>
+          <a:lstStyle/>
+          <a:p>
+            <a:endParaRPr lang="de-DE"/>
+          </a:p>
+        </p:txBody>
+      </p:sp>
+      <p:sp>
+        <p:nvSpPr>
+          <p:cNvPr id="113" name="Num4"/>
+          <p:cNvSpPr txBox="1"/>
+          <p:nvPr/>
+        </p:nvSpPr>
+        <p:spPr>
+          <a:xfrm>
+            <a:off x="762000" y="4699000"/>
+            <a:ext cx="381000" cy="508000"/>
+          </a:xfrm>
+          <a:prstGeom prst="rect">
+            <a:avLst/>
+          </a:prstGeom>
+          <a:noFill/>
+        </p:spPr>
+        <p:txBody>
+          <a:bodyPr wrap="square" lIns="0" tIns="0" rIns="0" bIns="0" anchor="t">
+            <a:normAutofit/>
+          </a:bodyPr>
+          <a:lstStyle/>
+          <a:p>
+            <a:r>
+              <a:rPr lang="de-DE" sz="2000" b="1" dirty="0">
+                <a:solidFill>
+                  <a:srgbClr val="B1063A"/>
+                </a:solidFill>
+              </a:rPr>
+              <a:t>4</a:t>
+            </a:r>
+          </a:p>
+        </p:txBody>
+      </p:sp>
+      <p:sp>
+        <p:nvSpPr>
+          <p:cNvPr id="114" name="Label4"/>
+          <p:cNvSpPr txBox="1"/>
+          <p:nvPr/>
+        </p:nvSpPr>
+        <p:spPr>
+          <a:xfrm>
+            <a:off x="1219200" y="4673600"/>
+            <a:ext cx="5588000" cy="685800"/>
+          </a:xfrm>
+          <a:prstGeom prst="rect">
+            <a:avLst/>
+          </a:prstGeom>
+          <a:noFill/>
+        </p:spPr>
+        <p:txBody>
+          <a:bodyPr wrap="square" lIns="0" tIns="0" rIns="0" bIns="0" anchor="t">
+            <a:normAutofit/>
+          </a:bodyPr>
+          <a:lstStyle/>
+          <a:p>
+            <a:r>
+              <a:rPr lang="de-DE" sz="1800" b="1" dirty="0">
+                <a:solidFill>
+                  <a:srgbClr val="1A1A1A"/>
+                </a:solidFill>
+              </a:rPr>
+              <a:t>MCP-Scan (Invariant Labs)</a:t>
+            </a:r>
+          </a:p>
+          <a:p>
+            <a:r>
+              <a:rPr lang="de-DE" sz="1400" dirty="0">
+                <a:solidFill>
+                  <a:srgbClr val="595959"/>
+                </a:solidFill>
+              </a:rPr>
+              <a:t>Sicherheits-Scanner für MCP-Server und -Konfigurationen</a:t>
+            </a:r>
+          </a:p>
+        </p:txBody>
+      </p:sp>
+      <p:sp>
+        <p:nvSpPr>
+          <p:cNvPr id="115" name="Url4"/>
+          <p:cNvSpPr txBox="1"/>
+          <p:nvPr/>
+        </p:nvSpPr>
+        <p:spPr>
+          <a:xfrm>
+            <a:off x="7061200" y="4673600"/>
+            <a:ext cx="4368800" cy="685800"/>
+          </a:xfrm>
+          <a:prstGeom prst="rect">
+            <a:avLst/>
+          </a:prstGeom>
+          <a:noFill/>
+        </p:spPr>
+        <p:txBody>
+          <a:bodyPr wrap="square" lIns="0" tIns="0" rIns="0" bIns="0" anchor="ctr">
+            <a:normAutofit/>
+          </a:bodyPr>
+          <a:lstStyle/>
+          <a:p>
+            <a:r>
+              <a:rPr lang="de-DE" sz="1400" u="sng" dirty="0">
+                <a:solidFill>
+                  <a:srgbClr val="B1063A"/>
+                </a:solidFill>
+                <a:hlinkClick r:id="rId4"/>
+              </a:rPr>
+              <a:t>https://invariantlabs.ai/blog/introducing-mcp-scan</a:t>
+            </a:r>
+          </a:p>
+        </p:txBody>
+      </p:sp>
+      <p:sp>
+        <p:nvSpPr>
+          <p:cNvPr id="116" name="Div4"/>
+          <p:cNvSpPr/>
+          <p:nvPr/>
+        </p:nvSpPr>
+        <p:spPr>
+          <a:xfrm>
+            <a:off x="762000" y="5486400"/>
+            <a:ext cx="10668000" cy="12700"/>
+          </a:xfrm>
+          <a:prstGeom prst="rect">
+            <a:avLst/>
+          </a:prstGeom>
+          <a:solidFill>
+            <a:srgbClr val="E0E0E0"/>
+          </a:solidFill>
+          <a:ln>
+            <a:noFill/>
+          </a:ln>
+        </p:spPr>
+        <p:txBody>
+          <a:bodyPr/>
+          <a:lstStyle/>
+          <a:p>
+            <a:endParaRPr lang="de-DE"/>
+          </a:p>
+        </p:txBody>
+      </p:sp>
+      <p:sp>
+        <p:nvSpPr>
+          <p:cNvPr id="117" name="Num5"/>
+          <p:cNvSpPr txBox="1"/>
+          <p:nvPr/>
+        </p:nvSpPr>
+        <p:spPr>
+          <a:xfrm>
+            <a:off x="762000" y="5664200"/>
+            <a:ext cx="381000" cy="508000"/>
+          </a:xfrm>
+          <a:prstGeom prst="rect">
+            <a:avLst/>
+          </a:prstGeom>
+          <a:noFill/>
+        </p:spPr>
+        <p:txBody>
+          <a:bodyPr wrap="square" lIns="0" tIns="0" rIns="0" bIns="0" anchor="t">
+            <a:normAutofit/>
+          </a:bodyPr>
+          <a:lstStyle/>
+          <a:p>
+            <a:r>
+              <a:rPr lang="de-DE" sz="2000" b="1" dirty="0">
+                <a:solidFill>
+                  <a:srgbClr val="B1063A"/>
+                </a:solidFill>
+              </a:rPr>
+              <a:t>5</a:t>
+            </a:r>
+          </a:p>
+        </p:txBody>
+      </p:sp>
+      <p:sp>
+        <p:nvSpPr>
+          <p:cNvPr id="118" name="Label5"/>
+          <p:cNvSpPr txBox="1"/>
+          <p:nvPr/>
+        </p:nvSpPr>
+        <p:spPr>
+          <a:xfrm>
+            <a:off x="1219200" y="5638800"/>
+            <a:ext cx="5588000" cy="685800"/>
+          </a:xfrm>
+          <a:prstGeom prst="rect">
+            <a:avLst/>
+          </a:prstGeom>
+          <a:noFill/>
+        </p:spPr>
+        <p:txBody>
+          <a:bodyPr wrap="square" lIns="0" tIns="0" rIns="0" bIns="0" anchor="t">
+            <a:normAutofit/>
+          </a:bodyPr>
+          <a:lstStyle/>
+          <a:p>
+            <a:r>
+              <a:rPr lang="de-DE" sz="1800" b="1" dirty="0">
+                <a:solidFill>
+                  <a:srgbClr val="1A1A1A"/>
+                </a:solidFill>
+              </a:rPr>
+              <a:t>OWASP MCP Security Cheat Sheet</a:t>
+            </a:r>
+          </a:p>
+          <a:p>
+            <a:r>
+              <a:rPr lang="de-DE" sz="1400" dirty="0">
+                <a:solidFill>
+                  <a:srgbClr val="595959"/>
+                </a:solidFill>
+              </a:rPr>
+              <a:t>Kompakte Checkliste zur Absicherung von MCP-Systemen</a:t>
+            </a:r>
+          </a:p>
+        </p:txBody>
+      </p:sp>
+      <p:sp>
+        <p:nvSpPr>
+          <p:cNvPr id="119" name="Url5"/>
+          <p:cNvSpPr txBox="1"/>
+          <p:nvPr/>
+        </p:nvSpPr>
+        <p:spPr>
+          <a:xfrm>
+            <a:off x="7061200" y="5638800"/>
+            <a:ext cx="4368800" cy="685800"/>
+          </a:xfrm>
+          <a:prstGeom prst="rect">
+            <a:avLst/>
+          </a:prstGeom>
+          <a:noFill/>
+        </p:spPr>
+        <p:txBody>
+          <a:bodyPr wrap="square" lIns="0" tIns="0" rIns="0" bIns="0" anchor="ctr">
+            <a:normAutofit/>
+          </a:bodyPr>
+          <a:lstStyle/>
+          <a:p>
+            <a:r>
+              <a:rPr lang="de-DE" sz="1400" u="sng" dirty="0">
+                <a:solidFill>
+                  <a:srgbClr val="B1063A"/>
+                </a:solidFill>
+                <a:hlinkClick r:id="rId5"/>
+              </a:rPr>
+              <a:t>https://cheatsheetseries.owasp.org/cheatsheets/MCP_Security_Cheat_Sheet.html</a:t>
+            </a:r>
+          </a:p>
+        </p:txBody>
+      </p:sp>
+      <p:pic>
+        <p:nvPicPr>
+          <p:cNvPr id="3" name="Picture 2">
+            <a:extLst>
+              <a:ext uri="{FF2B5EF4-FFF2-40B4-BE49-F238E27FC236}">
+                <a16:creationId xmlns:a16="http://schemas.microsoft.com/office/drawing/2014/main" id="{FF9A0DDF-C035-D9E3-3D41-E4DF9FA3CAF3}"/>
+              </a:ext>
+            </a:extLst>
+          </p:cNvPr>
+          <p:cNvPicPr>
+            <a:picLocks noChangeAspect="1"/>
+          </p:cNvPicPr>
+          <p:nvPr/>
+        </p:nvPicPr>
+        <p:blipFill>
+          <a:blip r:embed="rId6"/>
+          <a:stretch>
+            <a:fillRect/>
+          </a:stretch>
+        </p:blipFill>
+        <p:spPr>
+          <a:xfrm>
+            <a:off x="9489298" y="183584"/>
+            <a:ext cx="2592088" cy="776265"/>
+          </a:xfrm>
+          <a:prstGeom prst="rect">
+            <a:avLst/>
+          </a:prstGeom>
+        </p:spPr>
+      </p:pic>
+    </p:spTree>
+    <p:extLst>
+      <p:ext uri="{BB962C8B-B14F-4D97-AF65-F5344CB8AC3E}">
+        <p14:creationId xmlns:p14="http://schemas.microsoft.com/office/powerpoint/2010/main" val="4121057650"/>
+      </p:ext>
+    </p:extLst>
+  </p:cSld>
+  <p:clrMapOvr>
+    <a:masterClrMapping/>
+  </p:clrMapOvr>
+</p:sld>
+</file>
+
+<file path=ppt/slides/slide2.xml><?xml version="1.0" encoding="utf-8"?>
+<p:sld xmlns:a="http://schemas.openxmlformats.org/drawingml/2006/main" xmlns:r="http://schemas.openxmlformats.org/officeDocument/2006/relationships" xmlns:p="http://schemas.openxmlformats.org/presentationml/2006/main">
+  <p:cSld>
+    <p:spTree>
+      <p:nvGrpSpPr>
+        <p:cNvPr id="1" name=""/>
+        <p:cNvGrpSpPr/>
+        <p:nvPr/>
+      </p:nvGrpSpPr>
+      <p:grpSpPr>
+        <a:xfrm>
+          <a:off x="0" y="0"/>
+          <a:ext cx="0" cy="0"/>
+          <a:chOff x="0" y="0"/>
+          <a:chExt cx="0" cy="0"/>
+        </a:xfrm>
+      </p:grpSpPr>
+      <p:sp>
+        <p:nvSpPr>
+          <p:cNvPr id="2" name="Title 1">
+            <a:extLst>
+              <a:ext uri="{FF2B5EF4-FFF2-40B4-BE49-F238E27FC236}">
+                <a16:creationId xmlns:a16="http://schemas.microsoft.com/office/drawing/2014/main" id="{8CEF957D-9ACA-C063-AC4D-7D0D831D2A36}"/>
+              </a:ext>
+            </a:extLst>
+          </p:cNvPr>
+          <p:cNvSpPr>
+            <a:spLocks noGrp="1"/>
+          </p:cNvSpPr>
+          <p:nvPr>
+            <p:ph type="title"/>
+          </p:nvPr>
+        </p:nvSpPr>
+        <p:spPr>
+          <a:xfrm>
+            <a:off x="719136" y="474077"/>
+            <a:ext cx="10668000" cy="711200"/>
+          </a:xfrm>
+        </p:spPr>
+        <p:txBody>
+          <a:bodyPr/>
+          <a:lstStyle/>
+          <a:p>
+            <a:pPr algn="l">
+              <a:buNone/>
+            </a:pPr>
+            <a:r>
+              <a:rPr lang="de-DE" sz="3000" b="1" dirty="0">
+                <a:solidFill>
+                  <a:srgbClr val="B1063A"/>
+                </a:solidFill>
+              </a:rPr>
+              <a:t>Das KI-Servicezentrum Berlin-Brandenburg</a:t>
+            </a:r>
+          </a:p>
+        </p:txBody>
+      </p:sp>
+      <p:sp>
+        <p:nvSpPr>
+          <p:cNvPr id="4" name="Rule">
+            <a:extLst>
+              <a:ext uri="{FF2B5EF4-FFF2-40B4-BE49-F238E27FC236}">
+                <a16:creationId xmlns:a16="http://schemas.microsoft.com/office/drawing/2014/main" id="{840D60FB-D298-CD4D-B297-22607EAB4EA2}"/>
+              </a:ext>
+            </a:extLst>
+          </p:cNvPr>
+          <p:cNvSpPr/>
+          <p:nvPr/>
+        </p:nvSpPr>
+        <p:spPr>
+          <a:xfrm>
+            <a:off x="762000" y="1244600"/>
+            <a:ext cx="762000" cy="38100"/>
+          </a:xfrm>
+          <a:prstGeom prst="rect">
+            <a:avLst/>
+          </a:prstGeom>
+          <a:solidFill>
+            <a:srgbClr val="B1063A"/>
+          </a:solidFill>
+          <a:ln w="19050" cap="flat" cmpd="sng" algn="ctr">
+            <a:noFill/>
+            <a:prstDash val="solid"/>
+            <a:miter lim="800000"/>
+          </a:ln>
+        </p:spPr>
+        <p:style>
+          <a:lnRef idx="2">
+            <a:schemeClr val="accent1">
+              <a:shade val="15000"/>
+            </a:schemeClr>
+          </a:lnRef>
+          <a:fillRef idx="1">
+            <a:schemeClr val="accent1"/>
+          </a:fillRef>
+          <a:effectRef idx="0">
+            <a:schemeClr val="accent1"/>
+          </a:effectRef>
+          <a:fontRef idx="minor">
+            <a:schemeClr val="lt1"/>
+          </a:fontRef>
+        </p:style>
+        <p:txBody>
+          <a:bodyPr vertOverflow="clip" horzOverflow="clip" rtlCol="0" anchor="t"/>
+          <a:lstStyle/>
+          <a:p>
+            <a:pPr algn="l"/>
+            <a:endParaRPr lang="en-US"/>
+          </a:p>
+        </p:txBody>
+      </p:sp>
+      <p:sp>
+        <p:nvSpPr>
+          <p:cNvPr id="5" name="Intro">
+            <a:extLst>
+              <a:ext uri="{FF2B5EF4-FFF2-40B4-BE49-F238E27FC236}">
+                <a16:creationId xmlns:a16="http://schemas.microsoft.com/office/drawing/2014/main" id="{6BC4E88F-29A3-D34C-9491-63B85F7126CC}"/>
+              </a:ext>
+            </a:extLst>
+          </p:cNvPr>
+          <p:cNvSpPr txBox="1"/>
+          <p:nvPr/>
+        </p:nvSpPr>
+        <p:spPr>
+          <a:xfrm>
+            <a:off x="762000" y="1422400"/>
+            <a:ext cx="10668000" cy="338554"/>
+          </a:xfrm>
+          <a:prstGeom prst="rect">
+            <a:avLst/>
+          </a:prstGeom>
+          <a:noFill/>
+        </p:spPr>
+        <p:txBody>
+          <a:bodyPr vertOverflow="overflow" vert="horz" wrap="square" lIns="0" rIns="0" rtlCol="0" anchor="t">
+            <a:spAutoFit/>
+          </a:bodyPr>
+          <a:lstStyle/>
+          <a:p>
+            <a:r>
+              <a:rPr lang="de-DE" sz="1600" b="1" dirty="0"/>
+              <a:t>Gefördert vom BMFTR - Alle Angebote sind kostenlos</a:t>
+            </a:r>
+          </a:p>
+        </p:txBody>
+      </p:sp>
+      <p:sp>
+        <p:nvSpPr>
+          <p:cNvPr id="6" name="Card1">
+            <a:extLst>
+              <a:ext uri="{FF2B5EF4-FFF2-40B4-BE49-F238E27FC236}">
+                <a16:creationId xmlns:a16="http://schemas.microsoft.com/office/drawing/2014/main" id="{913211A5-81A4-934F-A3F4-2CF596BB03DC}"/>
+              </a:ext>
+            </a:extLst>
+          </p:cNvPr>
+          <p:cNvSpPr/>
+          <p:nvPr/>
+        </p:nvSpPr>
+        <p:spPr>
+          <a:xfrm>
+            <a:off x="762000" y="2260600"/>
+            <a:ext cx="3378200" cy="2540000"/>
+          </a:xfrm>
+          <a:prstGeom prst="rect">
+            <a:avLst/>
+          </a:prstGeom>
+          <a:solidFill>
+            <a:srgbClr val="F5F5F5"/>
+          </a:solidFill>
+          <a:ln w="19050" cap="flat" cmpd="sng" algn="ctr">
+            <a:noFill/>
+            <a:prstDash val="solid"/>
+            <a:miter lim="800000"/>
+          </a:ln>
+        </p:spPr>
+        <p:style>
+          <a:lnRef idx="2">
+            <a:schemeClr val="accent1">
+              <a:shade val="15000"/>
+            </a:schemeClr>
+          </a:lnRef>
+          <a:fillRef idx="1">
+            <a:schemeClr val="accent1"/>
+          </a:fillRef>
+          <a:effectRef idx="0">
+            <a:schemeClr val="accent1"/>
+          </a:effectRef>
+          <a:fontRef idx="minor">
+            <a:schemeClr val="lt1"/>
+          </a:fontRef>
+        </p:style>
+        <p:txBody>
+          <a:bodyPr vertOverflow="clip" horzOverflow="clip" rtlCol="0" anchor="t"/>
+          <a:lstStyle/>
+          <a:p>
+            <a:pPr algn="l"/>
+            <a:endParaRPr lang="en-US"/>
+          </a:p>
+        </p:txBody>
+      </p:sp>
+      <p:sp>
+        <p:nvSpPr>
+          <p:cNvPr id="7" name="Bar1">
+            <a:extLst>
+              <a:ext uri="{FF2B5EF4-FFF2-40B4-BE49-F238E27FC236}">
+                <a16:creationId xmlns:a16="http://schemas.microsoft.com/office/drawing/2014/main" id="{0C4B9E81-7FE6-3C4E-BDD4-BB2952CD5EC3}"/>
+              </a:ext>
+            </a:extLst>
+          </p:cNvPr>
+          <p:cNvSpPr/>
+          <p:nvPr/>
+        </p:nvSpPr>
+        <p:spPr>
+          <a:xfrm>
+            <a:off x="762000" y="2260600"/>
+            <a:ext cx="3378200" cy="50800"/>
+          </a:xfrm>
+          <a:prstGeom prst="rect">
+            <a:avLst/>
+          </a:prstGeom>
+          <a:solidFill>
+            <a:srgbClr val="B1063A"/>
+          </a:solidFill>
+          <a:ln w="19050" cap="flat" cmpd="sng" algn="ctr">
+            <a:noFill/>
+            <a:prstDash val="solid"/>
+            <a:miter lim="800000"/>
+          </a:ln>
+        </p:spPr>
+        <p:style>
+          <a:lnRef idx="2">
+            <a:schemeClr val="accent1">
+              <a:shade val="15000"/>
+            </a:schemeClr>
+          </a:lnRef>
+          <a:fillRef idx="1">
+            <a:schemeClr val="accent1"/>
+          </a:fillRef>
+          <a:effectRef idx="0">
+            <a:schemeClr val="accent1"/>
+          </a:effectRef>
+          <a:fontRef idx="minor">
+            <a:schemeClr val="lt1"/>
+          </a:fontRef>
+        </p:style>
+        <p:txBody>
+          <a:bodyPr vertOverflow="clip" horzOverflow="clip" rtlCol="0" anchor="t"/>
+          <a:lstStyle/>
+          <a:p>
+            <a:pPr algn="l"/>
+            <a:endParaRPr lang="en-US"/>
+          </a:p>
+        </p:txBody>
+      </p:sp>
+      <p:sp>
+        <p:nvSpPr>
+          <p:cNvPr id="8" name="Head1">
+            <a:extLst>
+              <a:ext uri="{FF2B5EF4-FFF2-40B4-BE49-F238E27FC236}">
+                <a16:creationId xmlns:a16="http://schemas.microsoft.com/office/drawing/2014/main" id="{8E9005C8-D038-D245-8E36-2DAC470741DC}"/>
+              </a:ext>
+            </a:extLst>
+          </p:cNvPr>
+          <p:cNvSpPr txBox="1"/>
+          <p:nvPr/>
+        </p:nvSpPr>
+        <p:spPr>
+          <a:xfrm>
+            <a:off x="1498600" y="2543145"/>
+            <a:ext cx="2463800" cy="400110"/>
+          </a:xfrm>
+          <a:prstGeom prst="rect">
+            <a:avLst/>
+          </a:prstGeom>
+          <a:noFill/>
+        </p:spPr>
+        <p:txBody>
+          <a:bodyPr vertOverflow="overflow" vert="horz" wrap="square" lIns="0" rIns="0" rtlCol="0" anchor="ctr">
+            <a:spAutoFit/>
+          </a:bodyPr>
+          <a:lstStyle/>
+          <a:p>
+            <a:r>
+              <a:rPr lang="de-DE" sz="2000" b="1" dirty="0">
+                <a:solidFill>
+                  <a:srgbClr val="1A1A1A"/>
+                </a:solidFill>
+              </a:rPr>
+              <a:t>Beratung</a:t>
+            </a:r>
+          </a:p>
+        </p:txBody>
+      </p:sp>
+      <p:sp>
+        <p:nvSpPr>
+          <p:cNvPr id="9" name="Body1">
+            <a:extLst>
+              <a:ext uri="{FF2B5EF4-FFF2-40B4-BE49-F238E27FC236}">
+                <a16:creationId xmlns:a16="http://schemas.microsoft.com/office/drawing/2014/main" id="{1321D8D3-F2BA-FF46-A2F0-B8C175DBCA77}"/>
+              </a:ext>
+            </a:extLst>
+          </p:cNvPr>
+          <p:cNvSpPr txBox="1"/>
+          <p:nvPr/>
+        </p:nvSpPr>
+        <p:spPr>
+          <a:xfrm>
+            <a:off x="939800" y="3175000"/>
+            <a:ext cx="3022600" cy="851515"/>
+          </a:xfrm>
+          <a:prstGeom prst="rect">
+            <a:avLst/>
+          </a:prstGeom>
+          <a:noFill/>
+        </p:spPr>
+        <p:txBody>
+          <a:bodyPr vertOverflow="overflow" vert="horz" wrap="square" lIns="0" rIns="0" rtlCol="0" anchor="t">
+            <a:spAutoFit/>
+          </a:bodyPr>
+          <a:lstStyle/>
+          <a:p>
+            <a:pPr marL="171450" indent="-171450">
+              <a:spcBef>
+                <a:spcPts val="1600"/>
+              </a:spcBef>
+              <a:buClr>
+                <a:srgbClr val="B1063A"/>
+              </a:buClr>
+              <a:buFont typeface="Arial"/>
+              <a:buChar char="•"/>
+            </a:pPr>
+            <a:r>
+              <a:rPr lang="de-DE" sz="1800" dirty="0">
+                <a:solidFill>
+                  <a:srgbClr val="1A1A1A"/>
+                </a:solidFill>
+              </a:rPr>
+              <a:t>KI-Sprechstunde</a:t>
+            </a:r>
+          </a:p>
+          <a:p>
+            <a:pPr marL="171450" indent="-171450">
+              <a:spcBef>
+                <a:spcPts val="1600"/>
+              </a:spcBef>
+              <a:buClr>
+                <a:srgbClr val="B1063A"/>
+              </a:buClr>
+              <a:buFont typeface="Arial"/>
+              <a:buChar char="•"/>
+            </a:pPr>
+            <a:r>
+              <a:rPr lang="de-DE" sz="1800" dirty="0">
+                <a:solidFill>
+                  <a:srgbClr val="1A1A1A"/>
+                </a:solidFill>
+              </a:rPr>
+              <a:t>Pilotprojekte</a:t>
+            </a:r>
+          </a:p>
+        </p:txBody>
+      </p:sp>
+      <p:sp>
+        <p:nvSpPr>
+          <p:cNvPr id="10" name="Card2">
+            <a:extLst>
+              <a:ext uri="{FF2B5EF4-FFF2-40B4-BE49-F238E27FC236}">
+                <a16:creationId xmlns:a16="http://schemas.microsoft.com/office/drawing/2014/main" id="{708B2498-3DF5-F744-8C26-DA2D3658CA0A}"/>
+              </a:ext>
+            </a:extLst>
+          </p:cNvPr>
+          <p:cNvSpPr/>
+          <p:nvPr/>
+        </p:nvSpPr>
+        <p:spPr>
+          <a:xfrm>
+            <a:off x="4406900" y="2260600"/>
+            <a:ext cx="3378200" cy="2540000"/>
+          </a:xfrm>
+          <a:prstGeom prst="rect">
+            <a:avLst/>
+          </a:prstGeom>
+          <a:solidFill>
+            <a:srgbClr val="F5F5F5"/>
+          </a:solidFill>
+          <a:ln w="19050" cap="flat" cmpd="sng" algn="ctr">
+            <a:noFill/>
+            <a:prstDash val="solid"/>
+            <a:miter lim="800000"/>
+          </a:ln>
+        </p:spPr>
+        <p:style>
+          <a:lnRef idx="2">
+            <a:schemeClr val="accent1">
+              <a:shade val="15000"/>
+            </a:schemeClr>
+          </a:lnRef>
+          <a:fillRef idx="1">
+            <a:schemeClr val="accent1"/>
+          </a:fillRef>
+          <a:effectRef idx="0">
+            <a:schemeClr val="accent1"/>
+          </a:effectRef>
+          <a:fontRef idx="minor">
+            <a:schemeClr val="lt1"/>
+          </a:fontRef>
+        </p:style>
+        <p:txBody>
+          <a:bodyPr vertOverflow="clip" horzOverflow="clip" rtlCol="0" anchor="t"/>
+          <a:lstStyle/>
+          <a:p>
+            <a:pPr algn="l"/>
+            <a:endParaRPr lang="en-US"/>
+          </a:p>
+        </p:txBody>
+      </p:sp>
+      <p:sp>
+        <p:nvSpPr>
+          <p:cNvPr id="11" name="Bar2">
+            <a:extLst>
+              <a:ext uri="{FF2B5EF4-FFF2-40B4-BE49-F238E27FC236}">
+                <a16:creationId xmlns:a16="http://schemas.microsoft.com/office/drawing/2014/main" id="{AC4FA17D-F2D4-5F4B-B915-825576E08DB6}"/>
+              </a:ext>
+            </a:extLst>
+          </p:cNvPr>
+          <p:cNvSpPr/>
+          <p:nvPr/>
+        </p:nvSpPr>
+        <p:spPr>
+          <a:xfrm>
+            <a:off x="4406900" y="2260600"/>
+            <a:ext cx="3378200" cy="50800"/>
+          </a:xfrm>
+          <a:prstGeom prst="rect">
+            <a:avLst/>
+          </a:prstGeom>
+          <a:solidFill>
+            <a:srgbClr val="B1063A"/>
+          </a:solidFill>
+          <a:ln w="19050" cap="flat" cmpd="sng" algn="ctr">
+            <a:noFill/>
+            <a:prstDash val="solid"/>
+            <a:miter lim="800000"/>
+          </a:ln>
+        </p:spPr>
+        <p:style>
+          <a:lnRef idx="2">
+            <a:schemeClr val="accent1">
+              <a:shade val="15000"/>
+            </a:schemeClr>
+          </a:lnRef>
+          <a:fillRef idx="1">
+            <a:schemeClr val="accent1"/>
+          </a:fillRef>
+          <a:effectRef idx="0">
+            <a:schemeClr val="accent1"/>
+          </a:effectRef>
+          <a:fontRef idx="minor">
+            <a:schemeClr val="lt1"/>
+          </a:fontRef>
+        </p:style>
+        <p:txBody>
+          <a:bodyPr vertOverflow="clip" horzOverflow="clip" rtlCol="0" anchor="t"/>
+          <a:lstStyle/>
+          <a:p>
+            <a:pPr algn="l"/>
+            <a:endParaRPr lang="en-US"/>
+          </a:p>
+        </p:txBody>
+      </p:sp>
+      <p:sp>
+        <p:nvSpPr>
+          <p:cNvPr id="12" name="Head2">
+            <a:extLst>
+              <a:ext uri="{FF2B5EF4-FFF2-40B4-BE49-F238E27FC236}">
+                <a16:creationId xmlns:a16="http://schemas.microsoft.com/office/drawing/2014/main" id="{E2A9C4FF-3F2F-D741-B314-0B157E92049C}"/>
+              </a:ext>
+            </a:extLst>
+          </p:cNvPr>
+          <p:cNvSpPr txBox="1"/>
+          <p:nvPr/>
+        </p:nvSpPr>
+        <p:spPr>
+          <a:xfrm>
+            <a:off x="5143500" y="2543145"/>
+            <a:ext cx="2463800" cy="400110"/>
+          </a:xfrm>
+          <a:prstGeom prst="rect">
+            <a:avLst/>
+          </a:prstGeom>
+          <a:noFill/>
+        </p:spPr>
+        <p:txBody>
+          <a:bodyPr vertOverflow="overflow" vert="horz" wrap="square" lIns="0" rIns="0" rtlCol="0" anchor="ctr">
+            <a:spAutoFit/>
+          </a:bodyPr>
+          <a:lstStyle/>
+          <a:p>
+            <a:r>
+              <a:rPr lang="de-DE" sz="2000" b="1" dirty="0">
+                <a:solidFill>
+                  <a:srgbClr val="1A1A1A"/>
+                </a:solidFill>
+              </a:rPr>
+              <a:t>Weiterbildung</a:t>
+            </a:r>
+          </a:p>
+        </p:txBody>
+      </p:sp>
+      <p:sp>
+        <p:nvSpPr>
+          <p:cNvPr id="13" name="Body2">
+            <a:extLst>
+              <a:ext uri="{FF2B5EF4-FFF2-40B4-BE49-F238E27FC236}">
+                <a16:creationId xmlns:a16="http://schemas.microsoft.com/office/drawing/2014/main" id="{D9E2D2F0-592B-6640-9DC0-2283CF275623}"/>
+              </a:ext>
+            </a:extLst>
+          </p:cNvPr>
+          <p:cNvSpPr txBox="1"/>
+          <p:nvPr/>
+        </p:nvSpPr>
+        <p:spPr>
+          <a:xfrm>
+            <a:off x="4584700" y="3175000"/>
+            <a:ext cx="3022600" cy="1333698"/>
+          </a:xfrm>
+          <a:prstGeom prst="rect">
+            <a:avLst/>
+          </a:prstGeom>
+          <a:noFill/>
+        </p:spPr>
+        <p:txBody>
+          <a:bodyPr vertOverflow="overflow" vert="horz" wrap="square" lIns="0" rIns="0" rtlCol="0" anchor="t">
+            <a:spAutoFit/>
+          </a:bodyPr>
+          <a:lstStyle/>
+          <a:p>
+            <a:pPr marL="171450" indent="-171450">
+              <a:spcBef>
+                <a:spcPts val="1600"/>
+              </a:spcBef>
+              <a:buClr>
+                <a:srgbClr val="B1063A"/>
+              </a:buClr>
+              <a:buFont typeface="Arial"/>
+              <a:buChar char="•"/>
+            </a:pPr>
+            <a:r>
+              <a:rPr lang="de-DE" sz="1800" dirty="0">
+                <a:solidFill>
+                  <a:srgbClr val="1A1A1A"/>
+                </a:solidFill>
+              </a:rPr>
+              <a:t>Workshops</a:t>
+            </a:r>
+          </a:p>
+          <a:p>
+            <a:pPr marL="171450" indent="-171450">
+              <a:spcBef>
+                <a:spcPts val="1600"/>
+              </a:spcBef>
+              <a:buClr>
+                <a:srgbClr val="B1063A"/>
+              </a:buClr>
+              <a:buFont typeface="Arial"/>
+              <a:buChar char="•"/>
+            </a:pPr>
+            <a:r>
+              <a:rPr lang="de-DE" sz="1800" dirty="0">
+                <a:solidFill>
+                  <a:srgbClr val="1A1A1A"/>
+                </a:solidFill>
+              </a:rPr>
+              <a:t>Onlinekurse</a:t>
+            </a:r>
+          </a:p>
+          <a:p>
+            <a:pPr marL="171450" indent="-171450">
+              <a:spcBef>
+                <a:spcPts val="1600"/>
+              </a:spcBef>
+              <a:buClr>
+                <a:srgbClr val="B1063A"/>
+              </a:buClr>
+              <a:buFont typeface="Arial"/>
+              <a:buChar char="•"/>
+            </a:pPr>
+            <a:r>
+              <a:rPr lang="de-DE" sz="1800" dirty="0">
+                <a:solidFill>
+                  <a:srgbClr val="1A1A1A"/>
+                </a:solidFill>
+              </a:rPr>
+              <a:t>Guest Talks</a:t>
+            </a:r>
+          </a:p>
+        </p:txBody>
+      </p:sp>
+      <p:sp>
+        <p:nvSpPr>
+          <p:cNvPr id="14" name="Card3">
+            <a:extLst>
+              <a:ext uri="{FF2B5EF4-FFF2-40B4-BE49-F238E27FC236}">
+                <a16:creationId xmlns:a16="http://schemas.microsoft.com/office/drawing/2014/main" id="{DCB6290A-C988-F547-BBD2-34D4AFE16CFC}"/>
+              </a:ext>
+            </a:extLst>
+          </p:cNvPr>
+          <p:cNvSpPr/>
+          <p:nvPr/>
+        </p:nvSpPr>
+        <p:spPr>
+          <a:xfrm>
+            <a:off x="8051800" y="2260600"/>
+            <a:ext cx="3378200" cy="2540000"/>
+          </a:xfrm>
+          <a:prstGeom prst="rect">
+            <a:avLst/>
+          </a:prstGeom>
+          <a:solidFill>
+            <a:srgbClr val="F5F5F5"/>
+          </a:solidFill>
+          <a:ln w="19050" cap="flat" cmpd="sng" algn="ctr">
+            <a:noFill/>
+            <a:prstDash val="solid"/>
+            <a:miter lim="800000"/>
+          </a:ln>
+        </p:spPr>
+        <p:style>
+          <a:lnRef idx="2">
+            <a:schemeClr val="accent1">
+              <a:shade val="15000"/>
+            </a:schemeClr>
+          </a:lnRef>
+          <a:fillRef idx="1">
+            <a:schemeClr val="accent1"/>
+          </a:fillRef>
+          <a:effectRef idx="0">
+            <a:schemeClr val="accent1"/>
+          </a:effectRef>
+          <a:fontRef idx="minor">
+            <a:schemeClr val="lt1"/>
+          </a:fontRef>
+        </p:style>
+        <p:txBody>
+          <a:bodyPr vertOverflow="clip" horzOverflow="clip" rtlCol="0" anchor="t"/>
+          <a:lstStyle/>
+          <a:p>
+            <a:pPr algn="l"/>
+            <a:endParaRPr lang="en-US"/>
+          </a:p>
+        </p:txBody>
+      </p:sp>
+      <p:sp>
+        <p:nvSpPr>
+          <p:cNvPr id="15" name="Bar3">
+            <a:extLst>
+              <a:ext uri="{FF2B5EF4-FFF2-40B4-BE49-F238E27FC236}">
+                <a16:creationId xmlns:a16="http://schemas.microsoft.com/office/drawing/2014/main" id="{A6E6DCA6-51A5-2842-9E35-4C5A6447C441}"/>
+              </a:ext>
+            </a:extLst>
+          </p:cNvPr>
+          <p:cNvSpPr/>
+          <p:nvPr/>
+        </p:nvSpPr>
+        <p:spPr>
+          <a:xfrm>
+            <a:off x="8051800" y="2260600"/>
+            <a:ext cx="3378200" cy="50800"/>
+          </a:xfrm>
+          <a:prstGeom prst="rect">
+            <a:avLst/>
+          </a:prstGeom>
+          <a:solidFill>
+            <a:srgbClr val="B1063A"/>
+          </a:solidFill>
+          <a:ln w="19050" cap="flat" cmpd="sng" algn="ctr">
+            <a:noFill/>
+            <a:prstDash val="solid"/>
+            <a:miter lim="800000"/>
+          </a:ln>
+        </p:spPr>
+        <p:style>
+          <a:lnRef idx="2">
+            <a:schemeClr val="accent1">
+              <a:shade val="15000"/>
+            </a:schemeClr>
+          </a:lnRef>
+          <a:fillRef idx="1">
+            <a:schemeClr val="accent1"/>
+          </a:fillRef>
+          <a:effectRef idx="0">
+            <a:schemeClr val="accent1"/>
+          </a:effectRef>
+          <a:fontRef idx="minor">
+            <a:schemeClr val="lt1"/>
+          </a:fontRef>
+        </p:style>
+        <p:txBody>
+          <a:bodyPr vertOverflow="clip" horzOverflow="clip" rtlCol="0" anchor="t"/>
+          <a:lstStyle/>
+          <a:p>
+            <a:pPr algn="l"/>
+            <a:endParaRPr lang="en-US"/>
+          </a:p>
+        </p:txBody>
+      </p:sp>
+      <p:sp>
+        <p:nvSpPr>
+          <p:cNvPr id="16" name="Head3">
+            <a:extLst>
+              <a:ext uri="{FF2B5EF4-FFF2-40B4-BE49-F238E27FC236}">
+                <a16:creationId xmlns:a16="http://schemas.microsoft.com/office/drawing/2014/main" id="{4FB23BFF-4E95-874D-AEF4-0F85E44B21C7}"/>
+              </a:ext>
+            </a:extLst>
+          </p:cNvPr>
+          <p:cNvSpPr txBox="1"/>
+          <p:nvPr/>
+        </p:nvSpPr>
+        <p:spPr>
+          <a:xfrm>
+            <a:off x="8788400" y="2543145"/>
+            <a:ext cx="2463800" cy="400110"/>
+          </a:xfrm>
+          <a:prstGeom prst="rect">
+            <a:avLst/>
+          </a:prstGeom>
+          <a:noFill/>
+        </p:spPr>
+        <p:txBody>
+          <a:bodyPr vertOverflow="overflow" vert="horz" wrap="square" lIns="0" rIns="0" rtlCol="0" anchor="ctr">
+            <a:spAutoFit/>
+          </a:bodyPr>
+          <a:lstStyle/>
+          <a:p>
+            <a:r>
+              <a:rPr lang="de-DE" sz="2000" b="1" dirty="0">
+                <a:solidFill>
+                  <a:srgbClr val="1A1A1A"/>
+                </a:solidFill>
+              </a:rPr>
+              <a:t>Infrastruktur</a:t>
+            </a:r>
+          </a:p>
+        </p:txBody>
+      </p:sp>
+      <p:sp>
+        <p:nvSpPr>
+          <p:cNvPr id="17" name="Body3">
+            <a:extLst>
+              <a:ext uri="{FF2B5EF4-FFF2-40B4-BE49-F238E27FC236}">
+                <a16:creationId xmlns:a16="http://schemas.microsoft.com/office/drawing/2014/main" id="{97C5C0C9-FA03-F042-BFE8-84B19EE577B4}"/>
+              </a:ext>
+            </a:extLst>
+          </p:cNvPr>
+          <p:cNvSpPr txBox="1"/>
+          <p:nvPr/>
+        </p:nvSpPr>
+        <p:spPr>
+          <a:xfrm>
+            <a:off x="8229600" y="3175000"/>
+            <a:ext cx="3022600" cy="851515"/>
+          </a:xfrm>
+          <a:prstGeom prst="rect">
+            <a:avLst/>
+          </a:prstGeom>
+          <a:noFill/>
+        </p:spPr>
+        <p:txBody>
+          <a:bodyPr vertOverflow="overflow" vert="horz" wrap="square" lIns="0" rIns="0" rtlCol="0" anchor="t">
+            <a:spAutoFit/>
+          </a:bodyPr>
+          <a:lstStyle/>
+          <a:p>
+            <a:pPr marL="171450" indent="-171450">
+              <a:spcBef>
+                <a:spcPts val="1600"/>
+              </a:spcBef>
+              <a:buClr>
+                <a:srgbClr val="B1063A"/>
+              </a:buClr>
+              <a:buFont typeface="Arial"/>
+              <a:buChar char="•"/>
+            </a:pPr>
+            <a:r>
+              <a:rPr lang="de-DE" sz="1800" dirty="0">
+                <a:solidFill>
+                  <a:srgbClr val="1A1A1A"/>
+                </a:solidFill>
+              </a:rPr>
+              <a:t>GPU-Cluster für Training</a:t>
+            </a:r>
+          </a:p>
+          <a:p>
+            <a:pPr marL="171450" indent="-171450">
+              <a:spcBef>
+                <a:spcPts val="1600"/>
+              </a:spcBef>
+              <a:buClr>
+                <a:srgbClr val="B1063A"/>
+              </a:buClr>
+              <a:buFont typeface="Arial"/>
+              <a:buChar char="•"/>
+            </a:pPr>
+            <a:r>
+              <a:rPr lang="de-DE" sz="1800" dirty="0">
+                <a:solidFill>
+                  <a:srgbClr val="1A1A1A"/>
+                </a:solidFill>
+              </a:rPr>
+              <a:t>Inferenz-Cluster</a:t>
+            </a:r>
+          </a:p>
+        </p:txBody>
+      </p:sp>
+      <p:sp>
+        <p:nvSpPr>
+          <p:cNvPr id="18" name="Footer">
+            <a:extLst>
+              <a:ext uri="{FF2B5EF4-FFF2-40B4-BE49-F238E27FC236}">
+                <a16:creationId xmlns:a16="http://schemas.microsoft.com/office/drawing/2014/main" id="{B9CCBC34-396D-1642-9B50-603462F118D3}"/>
+              </a:ext>
+            </a:extLst>
+          </p:cNvPr>
+          <p:cNvSpPr txBox="1"/>
+          <p:nvPr/>
+        </p:nvSpPr>
+        <p:spPr>
+          <a:xfrm>
+            <a:off x="762000" y="5080000"/>
+            <a:ext cx="10668000" cy="369332"/>
+          </a:xfrm>
+          <a:prstGeom prst="rect">
+            <a:avLst/>
+          </a:prstGeom>
+          <a:noFill/>
+        </p:spPr>
+        <p:txBody>
+          <a:bodyPr vertOverflow="overflow" vert="horz" wrap="square" lIns="0" rIns="0" rtlCol="0" anchor="t">
+            <a:spAutoFit/>
+          </a:bodyPr>
+          <a:lstStyle/>
+          <a:p>
+            <a:r>
+              <a:rPr lang="de-DE" b="1" dirty="0">
+                <a:solidFill>
+                  <a:srgbClr val="595959"/>
+                </a:solidFill>
+              </a:rPr>
+              <a:t>hpi.de/</a:t>
+            </a:r>
+            <a:r>
+              <a:rPr lang="de-DE" b="1" dirty="0" err="1">
+                <a:solidFill>
+                  <a:srgbClr val="595959"/>
+                </a:solidFill>
+              </a:rPr>
+              <a:t>ki</a:t>
+            </a:r>
+            <a:r>
+              <a:rPr lang="de-DE" b="1" dirty="0">
+                <a:solidFill>
+                  <a:srgbClr val="595959"/>
+                </a:solidFill>
+              </a:rPr>
+              <a:t>-servicezentrum</a:t>
+            </a:r>
+            <a:r>
+              <a:rPr lang="de-DE" dirty="0">
+                <a:solidFill>
+                  <a:srgbClr val="595959"/>
+                </a:solidFill>
+              </a:rPr>
+              <a:t> </a:t>
+            </a:r>
+          </a:p>
+        </p:txBody>
+      </p:sp>
+      <p:pic>
+        <p:nvPicPr>
+          <p:cNvPr id="19" name="Graphic 19" descr="Beratung"/>
+          <p:cNvPicPr>
+            <a:picLocks noChangeAspect="1"/>
+          </p:cNvPicPr>
+          <p:nvPr/>
+        </p:nvPicPr>
+        <p:blipFill>
+          <a:blip>
+            <a:extLst>
+              <a:ext uri="{96DAC541-7B7A-43D3-8B79-37D633B846F1}">
+                <asvg:svgBlip xmlns:asvg="http://schemas.microsoft.com/office/drawing/2016/SVG/main" r:embed="rId2"/>
+              </a:ext>
+            </a:extLst>
+          </a:blip>
+          <a:stretch>
+            <a:fillRect/>
+          </a:stretch>
+        </p:blipFill>
+        <p:spPr>
+          <a:xfrm>
+            <a:off x="939800" y="2489200"/>
+            <a:ext cx="457200" cy="457200"/>
+          </a:xfrm>
+          <a:prstGeom prst="rect">
+            <a:avLst/>
+          </a:prstGeom>
+        </p:spPr>
+      </p:pic>
+      <p:pic>
+        <p:nvPicPr>
+          <p:cNvPr id="20" name="Graphic 20" descr="Weiterbildung"/>
+          <p:cNvPicPr>
+            <a:picLocks noChangeAspect="1"/>
+          </p:cNvPicPr>
+          <p:nvPr/>
+        </p:nvPicPr>
+        <p:blipFill>
+          <a:blip>
+            <a:extLst>
+              <a:ext uri="{96DAC541-7B7A-43D3-8B79-37D633B846F1}">
+                <asvg:svgBlip xmlns:asvg="http://schemas.microsoft.com/office/drawing/2016/SVG/main" r:embed="rId3"/>
+              </a:ext>
+            </a:extLst>
+          </a:blip>
+          <a:stretch>
+            <a:fillRect/>
+          </a:stretch>
+        </p:blipFill>
+        <p:spPr>
+          <a:xfrm>
+            <a:off x="4584700" y="2489200"/>
+            <a:ext cx="457200" cy="457200"/>
+          </a:xfrm>
+          <a:prstGeom prst="rect">
+            <a:avLst/>
+          </a:prstGeom>
+        </p:spPr>
+      </p:pic>
+      <p:pic>
+        <p:nvPicPr>
+          <p:cNvPr id="21" name="Graphic 21" descr="Infrastruktur"/>
+          <p:cNvPicPr>
+            <a:picLocks noChangeAspect="1"/>
+          </p:cNvPicPr>
+          <p:nvPr/>
+        </p:nvPicPr>
+        <p:blipFill>
+          <a:blip>
+            <a:extLst>
+              <a:ext uri="{96DAC541-7B7A-43D3-8B79-37D633B846F1}">
+                <asvg:svgBlip xmlns:asvg="http://schemas.microsoft.com/office/drawing/2016/SVG/main" r:embed="rId4"/>
+              </a:ext>
+            </a:extLst>
+          </a:blip>
+          <a:stretch>
+            <a:fillRect/>
+          </a:stretch>
+        </p:blipFill>
+        <p:spPr>
+          <a:xfrm>
+            <a:off x="8229600" y="2489200"/>
+            <a:ext cx="457200" cy="457200"/>
+          </a:xfrm>
+          <a:prstGeom prst="rect">
+            <a:avLst/>
+          </a:prstGeom>
+        </p:spPr>
+      </p:pic>
+      <p:pic>
+        <p:nvPicPr>
+          <p:cNvPr id="3" name="Picture 2">
+            <a:extLst>
+              <a:ext uri="{FF2B5EF4-FFF2-40B4-BE49-F238E27FC236}">
+                <a16:creationId xmlns:a16="http://schemas.microsoft.com/office/drawing/2014/main" id="{3B0E9783-90F9-E4DD-1FE7-00ECC44B4550}"/>
+              </a:ext>
+            </a:extLst>
+          </p:cNvPr>
+          <p:cNvPicPr>
+            <a:picLocks noChangeAspect="1"/>
+          </p:cNvPicPr>
+          <p:nvPr/>
+        </p:nvPicPr>
+        <p:blipFill>
+          <a:blip r:embed="rId5"/>
+          <a:stretch>
+            <a:fillRect/>
+          </a:stretch>
+        </p:blipFill>
+        <p:spPr>
+          <a:xfrm>
+            <a:off x="9489298" y="183584"/>
+            <a:ext cx="2592088" cy="776265"/>
+          </a:xfrm>
+          <a:prstGeom prst="rect">
+            <a:avLst/>
+          </a:prstGeom>
+        </p:spPr>
+      </p:pic>
+    </p:spTree>
+    <p:extLst>
+      <p:ext uri="{BB962C8B-B14F-4D97-AF65-F5344CB8AC3E}">
+        <p14:creationId xmlns:p14="http://schemas.microsoft.com/office/powerpoint/2010/main" val="536530066"/>
+      </p:ext>
+    </p:extLst>
+  </p:cSld>
+  <p:clrMapOvr>
+    <a:masterClrMapping/>
+  </p:clrMapOvr>
+</p:sld>
+</file>
+
+<file path=ppt/slides/slide20.xml><?xml version="1.0" encoding="utf-8"?>
+<p:sld xmlns:a="http://schemas.openxmlformats.org/drawingml/2006/main" xmlns:r="http://schemas.openxmlformats.org/officeDocument/2006/relationships" xmlns:p="http://schemas.openxmlformats.org/presentationml/2006/main">
+  <p:cSld>
+    <p:spTree>
+      <p:nvGrpSpPr>
+        <p:cNvPr id="1" name=""/>
+        <p:cNvGrpSpPr/>
+        <p:nvPr/>
+      </p:nvGrpSpPr>
+      <p:grpSpPr>
+        <a:xfrm>
+          <a:off x="0" y="0"/>
+          <a:ext cx="0" cy="0"/>
+          <a:chOff x="0" y="0"/>
+          <a:chExt cx="0" cy="0"/>
+        </a:xfrm>
+      </p:grpSpPr>
+      <p:sp>
+        <p:nvSpPr>
+          <p:cNvPr id="2" name="Title 1">
+            <a:extLst>
+              <a:ext uri="{FF2B5EF4-FFF2-40B4-BE49-F238E27FC236}">
+                <a16:creationId xmlns:a16="http://schemas.microsoft.com/office/drawing/2014/main" id="{75D75E2F-C232-E476-36C3-D1C2ABE61F01}"/>
+              </a:ext>
+            </a:extLst>
+          </p:cNvPr>
+          <p:cNvSpPr>
+            <a:spLocks noGrp="1"/>
+          </p:cNvSpPr>
+          <p:nvPr>
+            <p:ph type="title"/>
+          </p:nvPr>
+        </p:nvSpPr>
+        <p:spPr>
+          <a:xfrm>
+            <a:off x="486833" y="1240896"/>
+            <a:ext cx="11218333" cy="4376208"/>
+          </a:xfrm>
+        </p:spPr>
+        <p:txBody>
+          <a:bodyPr/>
+          <a:lstStyle/>
+          <a:p>
+            <a:r>
+              <a:rPr lang="en-US" dirty="0"/>
+              <a:t>https://</a:t>
+            </a:r>
+            <a:r>
+              <a:rPr lang="en-US" dirty="0" err="1"/>
+              <a:t>github.com</a:t>
+            </a:r>
+            <a:r>
+              <a:rPr lang="en-US" dirty="0"/>
+              <a:t>/</a:t>
+            </a:r>
+            <a:r>
+              <a:rPr lang="en-US" dirty="0" err="1"/>
+              <a:t>aihpi</a:t>
+            </a:r>
+            <a:r>
+              <a:rPr lang="en-US" dirty="0"/>
+              <a:t>/workshop-</a:t>
+            </a:r>
+            <a:r>
+              <a:rPr lang="en-US" dirty="0" err="1"/>
+              <a:t>mcp</a:t>
+            </a:r>
+            <a:r>
+              <a:rPr lang="en-US" dirty="0"/>
+              <a:t>-mini</a:t>
+            </a:r>
+          </a:p>
+        </p:txBody>
+      </p:sp>
+    </p:spTree>
+    <p:extLst>
+      <p:ext uri="{BB962C8B-B14F-4D97-AF65-F5344CB8AC3E}">
+        <p14:creationId xmlns:p14="http://schemas.microsoft.com/office/powerpoint/2010/main" val="625454708"/>
+      </p:ext>
+    </p:extLst>
+  </p:cSld>
+  <p:clrMapOvr>
+    <a:masterClrMapping/>
+  </p:clrMapOvr>
+</p:sld>
+</file>
+
+<file path=ppt/slides/slide21.xml><?xml version="1.0" encoding="utf-8"?>
 <p:sld xmlns:a="http://schemas.openxmlformats.org/drawingml/2006/main" xmlns:r="http://schemas.openxmlformats.org/officeDocument/2006/relationships" xmlns:p="http://schemas.openxmlformats.org/presentationml/2006/main">
   <p:cSld>
     <p:spTree>
@@ -10384,7 +13528,7 @@
 </p:sld>
 </file>
 
-<file path=ppt/slides/slide19.xml><?xml version="1.0" encoding="utf-8"?>
+<file path=ppt/slides/slide22.xml><?xml version="1.0" encoding="utf-8"?>
 <p:sld xmlns:a="http://schemas.openxmlformats.org/drawingml/2006/main" xmlns:r="http://schemas.openxmlformats.org/officeDocument/2006/relationships" xmlns:p="http://schemas.openxmlformats.org/presentationml/2006/main">
   <p:cSld>
     <p:spTree>
@@ -11408,6 +14552,36 @@
           </a:p>
         </p:txBody>
       </p:sp>
+      <p:pic>
+        <p:nvPicPr>
+          <p:cNvPr id="3" name="Picture 2">
+            <a:extLst>
+              <a:ext uri="{FF2B5EF4-FFF2-40B4-BE49-F238E27FC236}">
+                <a16:creationId xmlns:a16="http://schemas.microsoft.com/office/drawing/2014/main" id="{9829894A-5B80-DF69-825B-B4909D0CEF42}"/>
+              </a:ext>
+            </a:extLst>
+          </p:cNvPr>
+          <p:cNvPicPr>
+            <a:picLocks noChangeAspect="1"/>
+          </p:cNvPicPr>
+          <p:nvPr/>
+        </p:nvPicPr>
+        <p:blipFill>
+          <a:blip r:embed="rId3"/>
+          <a:stretch>
+            <a:fillRect/>
+          </a:stretch>
+        </p:blipFill>
+        <p:spPr>
+          <a:xfrm>
+            <a:off x="9489298" y="183584"/>
+            <a:ext cx="2592088" cy="776265"/>
+          </a:xfrm>
+          <a:prstGeom prst="rect">
+            <a:avLst/>
+          </a:prstGeom>
+        </p:spPr>
+      </p:pic>
     </p:spTree>
     <p:extLst>
       <p:ext uri="{BB962C8B-B14F-4D97-AF65-F5344CB8AC3E}">
@@ -11421,7 +14595,1761 @@
 </p:sld>
 </file>
 
-<file path=ppt/slides/slide2.xml><?xml version="1.0" encoding="utf-8"?>
+<file path=ppt/slides/slide23.xml><?xml version="1.0" encoding="utf-8"?>
+<p:sld xmlns:a="http://schemas.openxmlformats.org/drawingml/2006/main" xmlns:r="http://schemas.openxmlformats.org/officeDocument/2006/relationships" xmlns:p="http://schemas.openxmlformats.org/presentationml/2006/main">
+  <p:cSld>
+    <p:spTree>
+      <p:nvGrpSpPr>
+        <p:cNvPr id="1" name=""/>
+        <p:cNvGrpSpPr/>
+        <p:nvPr/>
+      </p:nvGrpSpPr>
+      <p:grpSpPr>
+        <a:xfrm>
+          <a:off x="0" y="0"/>
+          <a:ext cx="0" cy="0"/>
+          <a:chOff x="0" y="0"/>
+          <a:chExt cx="0" cy="0"/>
+        </a:xfrm>
+      </p:grpSpPr>
+      <p:sp>
+        <p:nvSpPr>
+          <p:cNvPr id="2" name="Title 1">
+            <a:extLst>
+              <a:ext uri="{FF2B5EF4-FFF2-40B4-BE49-F238E27FC236}">
+                <a16:creationId xmlns:a16="http://schemas.microsoft.com/office/drawing/2014/main" id="{374D1413-8304-7BC4-157E-177B81D1E86A}"/>
+              </a:ext>
+            </a:extLst>
+          </p:cNvPr>
+          <p:cNvSpPr>
+            <a:spLocks noGrp="1"/>
+          </p:cNvSpPr>
+          <p:nvPr>
+            <p:ph type="title"/>
+          </p:nvPr>
+        </p:nvSpPr>
+        <p:spPr>
+          <a:xfrm>
+            <a:off x="762000" y="457200"/>
+            <a:ext cx="10668000" cy="711200"/>
+          </a:xfrm>
+        </p:spPr>
+        <p:txBody>
+          <a:bodyPr anchor="t" anchorCtr="0"/>
+          <a:lstStyle/>
+          <a:p>
+            <a:pPr algn="l">
+              <a:buNone/>
+            </a:pPr>
+            <a:r>
+              <a:rPr lang="en-US" sz="3000" b="1" dirty="0">
+                <a:solidFill>
+                  <a:srgbClr val="B1063A"/>
+                </a:solidFill>
+              </a:rPr>
+              <a:t>Backup · Was tatsächlich über die Leitung geht</a:t>
+            </a:r>
+          </a:p>
+        </p:txBody>
+      </p:sp>
+      <p:sp>
+        <p:nvSpPr>
+          <p:cNvPr id="100" name="Rule"/>
+          <p:cNvSpPr txBox="1"/>
+          <p:nvPr/>
+        </p:nvSpPr>
+        <p:spPr>
+          <a:xfrm>
+            <a:off x="762000" y="1244600"/>
+            <a:ext cx="762000" cy="38100"/>
+          </a:xfrm>
+          <a:prstGeom prst="rect">
+            <a:avLst/>
+          </a:prstGeom>
+          <a:solidFill>
+            <a:srgbClr val="B1063A"/>
+          </a:solidFill>
+          <a:ln>
+            <a:noFill/>
+          </a:ln>
+        </p:spPr>
+        <p:txBody>
+          <a:bodyPr wrap="square" lIns="91440" tIns="45720" rIns="91440" bIns="45720" anchor="t"/>
+          <a:lstStyle/>
+          <a:p>
+            <a:endParaRPr/>
+          </a:p>
+        </p:txBody>
+      </p:sp>
+      <p:sp>
+        <p:nvSpPr>
+          <p:cNvPr id="101" name="Lbl1"/>
+          <p:cNvSpPr txBox="1"/>
+          <p:nvPr/>
+        </p:nvSpPr>
+        <p:spPr>
+          <a:xfrm>
+            <a:off x="762000" y="1574800"/>
+            <a:ext cx="5207000" cy="304800"/>
+          </a:xfrm>
+          <a:prstGeom prst="rect">
+            <a:avLst/>
+          </a:prstGeom>
+          <a:noFill/>
+          <a:ln>
+            <a:noFill/>
+          </a:ln>
+        </p:spPr>
+        <p:txBody>
+          <a:bodyPr wrap="square" lIns="91440" tIns="45720" rIns="91440" bIns="45720" anchor="t"/>
+          <a:lstStyle/>
+          <a:p>
+            <a:pPr>
+              <a:buNone/>
+            </a:pPr>
+            <a:r>
+              <a:rPr lang="en-US" sz="1400" b="1" dirty="0">
+                <a:solidFill>
+                  <a:srgbClr val="6E6E6E"/>
+                </a:solidFill>
+              </a:rPr>
+              <a:t>1 · Discovery: </a:t>
+            </a:r>
+            <a:r>
+              <a:rPr lang="en-US" sz="1400" b="1" dirty="0">
+                <a:solidFill>
+                  <a:srgbClr val="B1063A"/>
+                </a:solidFill>
+                <a:latin typeface="Consolas"/>
+              </a:rPr>
+              <a:t>tools/list</a:t>
+            </a:r>
+          </a:p>
+        </p:txBody>
+      </p:sp>
+      <p:sp>
+        <p:nvSpPr>
+          <p:cNvPr id="102" name="Card1"/>
+          <p:cNvSpPr txBox="1"/>
+          <p:nvPr/>
+        </p:nvSpPr>
+        <p:spPr>
+          <a:xfrm>
+            <a:off x="762000" y="1905000"/>
+            <a:ext cx="5207000" cy="3175000"/>
+          </a:xfrm>
+          <a:prstGeom prst="roundRect">
+            <a:avLst/>
+          </a:prstGeom>
+          <a:solidFill>
+            <a:srgbClr val="2B2B2B"/>
+          </a:solidFill>
+          <a:ln>
+            <a:noFill/>
+          </a:ln>
+        </p:spPr>
+        <p:txBody>
+          <a:bodyPr wrap="square" lIns="91440" tIns="45720" rIns="91440" bIns="45720" anchor="t"/>
+          <a:lstStyle/>
+          <a:p>
+            <a:endParaRPr/>
+          </a:p>
+        </p:txBody>
+      </p:sp>
+      <p:sp>
+        <p:nvSpPr>
+          <p:cNvPr id="103" name="Code1"/>
+          <p:cNvSpPr txBox="1"/>
+          <p:nvPr/>
+        </p:nvSpPr>
+        <p:spPr>
+          <a:xfrm>
+            <a:off x="939800" y="2032000"/>
+            <a:ext cx="4902200" cy="2946400"/>
+          </a:xfrm>
+          <a:prstGeom prst="rect">
+            <a:avLst/>
+          </a:prstGeom>
+          <a:noFill/>
+          <a:ln>
+            <a:noFill/>
+          </a:ln>
+        </p:spPr>
+        <p:txBody>
+          <a:bodyPr wrap="square" lIns="0" tIns="45720" rIns="0" bIns="45720" anchor="t"/>
+          <a:lstStyle/>
+          <a:p>
+            <a:pPr>
+              <a:buNone/>
+            </a:pPr>
+            <a:r>
+              <a:rPr lang="en-US" sz="1200" dirty="0">
+                <a:solidFill>
+                  <a:srgbClr val="9A9A9A"/>
+                </a:solidFill>
+                <a:latin typeface="Consolas"/>
+              </a:rPr>
+              <a:t>// request</a:t>
+            </a:r>
+          </a:p>
+          <a:p>
+            <a:pPr>
+              <a:buNone/>
+            </a:pPr>
+            <a:r>
+              <a:rPr lang="en-US" sz="1200" dirty="0">
+                <a:solidFill>
+                  <a:srgbClr val="E8E8E8"/>
+                </a:solidFill>
+                <a:latin typeface="Consolas"/>
+              </a:rPr>
+              <a:t>{ </a:t>
+            </a:r>
+            <a:r>
+              <a:rPr lang="en-US" sz="1200" dirty="0">
+                <a:solidFill>
+                  <a:srgbClr val="8FB4E8"/>
+                </a:solidFill>
+                <a:latin typeface="Consolas"/>
+              </a:rPr>
+              <a:t>"method"</a:t>
+            </a:r>
+            <a:r>
+              <a:rPr lang="en-US" sz="1200" dirty="0">
+                <a:solidFill>
+                  <a:srgbClr val="E8E8E8"/>
+                </a:solidFill>
+                <a:latin typeface="Consolas"/>
+              </a:rPr>
+              <a:t>: </a:t>
+            </a:r>
+            <a:r>
+              <a:rPr lang="en-US" sz="1200" dirty="0">
+                <a:solidFill>
+                  <a:srgbClr val="F5D77A"/>
+                </a:solidFill>
+                <a:latin typeface="Consolas"/>
+              </a:rPr>
+              <a:t>"tools/list"</a:t>
+            </a:r>
+            <a:r>
+              <a:rPr lang="en-US" sz="1200" dirty="0">
+                <a:solidFill>
+                  <a:srgbClr val="E8E8E8"/>
+                </a:solidFill>
+                <a:latin typeface="Consolas"/>
+              </a:rPr>
+              <a:t> }</a:t>
+            </a:r>
+          </a:p>
+          <a:p>
+            <a:pPr>
+              <a:buNone/>
+            </a:pPr>
+            <a:r>
+              <a:rPr lang="en-US" sz="1200" dirty="0">
+                <a:solidFill>
+                  <a:srgbClr val="E8E8E8"/>
+                </a:solidFill>
+                <a:latin typeface="Consolas"/>
+              </a:rPr>
+              <a:t> </a:t>
+            </a:r>
+          </a:p>
+          <a:p>
+            <a:pPr>
+              <a:buNone/>
+            </a:pPr>
+            <a:r>
+              <a:rPr lang="en-US" sz="1200" dirty="0">
+                <a:solidFill>
+                  <a:srgbClr val="9A9A9A"/>
+                </a:solidFill>
+                <a:latin typeface="Consolas"/>
+              </a:rPr>
+              <a:t>// response</a:t>
+            </a:r>
+          </a:p>
+          <a:p>
+            <a:pPr>
+              <a:buNone/>
+            </a:pPr>
+            <a:r>
+              <a:rPr lang="en-US" sz="1200" dirty="0">
+                <a:solidFill>
+                  <a:srgbClr val="E8E8E8"/>
+                </a:solidFill>
+                <a:latin typeface="Consolas"/>
+              </a:rPr>
+              <a:t>{ </a:t>
+            </a:r>
+            <a:r>
+              <a:rPr lang="en-US" sz="1200" dirty="0">
+                <a:solidFill>
+                  <a:srgbClr val="8FB4E8"/>
+                </a:solidFill>
+                <a:latin typeface="Consolas"/>
+              </a:rPr>
+              <a:t>"tools"</a:t>
+            </a:r>
+            <a:r>
+              <a:rPr lang="en-US" sz="1200" dirty="0">
+                <a:solidFill>
+                  <a:srgbClr val="E8E8E8"/>
+                </a:solidFill>
+                <a:latin typeface="Consolas"/>
+              </a:rPr>
+              <a:t>: [ {</a:t>
+            </a:r>
+          </a:p>
+          <a:p>
+            <a:pPr>
+              <a:buNone/>
+            </a:pPr>
+            <a:r>
+              <a:rPr lang="en-US" sz="1200" dirty="0">
+                <a:solidFill>
+                  <a:srgbClr val="E8E8E8"/>
+                </a:solidFill>
+                <a:latin typeface="Consolas"/>
+              </a:rPr>
+              <a:t>    </a:t>
+            </a:r>
+            <a:r>
+              <a:rPr lang="en-US" sz="1200" dirty="0">
+                <a:solidFill>
+                  <a:srgbClr val="8FB4E8"/>
+                </a:solidFill>
+                <a:latin typeface="Consolas"/>
+              </a:rPr>
+              <a:t>"name"</a:t>
+            </a:r>
+            <a:r>
+              <a:rPr lang="en-US" sz="1200" dirty="0">
+                <a:solidFill>
+                  <a:srgbClr val="E8E8E8"/>
+                </a:solidFill>
+                <a:latin typeface="Consolas"/>
+              </a:rPr>
+              <a:t>: </a:t>
+            </a:r>
+            <a:r>
+              <a:rPr lang="en-US" sz="1200" dirty="0">
+                <a:solidFill>
+                  <a:srgbClr val="F5D77A"/>
+                </a:solidFill>
+                <a:latin typeface="Consolas"/>
+              </a:rPr>
+              <a:t>"get_forecast"</a:t>
+            </a:r>
+            <a:r>
+              <a:rPr lang="en-US" sz="1200" dirty="0">
+                <a:solidFill>
+                  <a:srgbClr val="E8E8E8"/>
+                </a:solidFill>
+                <a:latin typeface="Consolas"/>
+              </a:rPr>
+              <a:t>,</a:t>
+            </a:r>
+          </a:p>
+          <a:p>
+            <a:pPr>
+              <a:buNone/>
+            </a:pPr>
+            <a:r>
+              <a:rPr lang="en-US" sz="1200" dirty="0">
+                <a:solidFill>
+                  <a:srgbClr val="E8E8E8"/>
+                </a:solidFill>
+                <a:latin typeface="Consolas"/>
+              </a:rPr>
+              <a:t>    </a:t>
+            </a:r>
+            <a:r>
+              <a:rPr lang="en-US" sz="1200" dirty="0">
+                <a:solidFill>
+                  <a:srgbClr val="8FB4E8"/>
+                </a:solidFill>
+                <a:latin typeface="Consolas"/>
+              </a:rPr>
+              <a:t>"description"</a:t>
+            </a:r>
+            <a:r>
+              <a:rPr lang="en-US" sz="1200" dirty="0">
+                <a:solidFill>
+                  <a:srgbClr val="E8E8E8"/>
+                </a:solidFill>
+                <a:latin typeface="Consolas"/>
+              </a:rPr>
+              <a:t>: </a:t>
+            </a:r>
+            <a:r>
+              <a:rPr lang="en-US" sz="1200" dirty="0">
+                <a:solidFill>
+                  <a:srgbClr val="F5D77A"/>
+                </a:solidFill>
+                <a:latin typeface="Consolas"/>
+              </a:rPr>
+              <a:t>"Daily weather forecast</a:t>
+            </a:r>
+          </a:p>
+          <a:p>
+            <a:pPr>
+              <a:buNone/>
+            </a:pPr>
+            <a:r>
+              <a:rPr lang="en-US" sz="1200" dirty="0">
+                <a:solidFill>
+                  <a:srgbClr val="F5D77A"/>
+                </a:solidFill>
+                <a:latin typeface="Consolas"/>
+              </a:rPr>
+              <a:t>        for a city. Use for …"</a:t>
+            </a:r>
+            <a:r>
+              <a:rPr lang="en-US" sz="1200" dirty="0">
+                <a:solidFill>
+                  <a:srgbClr val="E8E8E8"/>
+                </a:solidFill>
+                <a:latin typeface="Consolas"/>
+              </a:rPr>
+              <a:t>,</a:t>
+            </a:r>
+          </a:p>
+          <a:p>
+            <a:pPr>
+              <a:buNone/>
+            </a:pPr>
+            <a:r>
+              <a:rPr lang="en-US" sz="1200" dirty="0">
+                <a:solidFill>
+                  <a:srgbClr val="E8E8E8"/>
+                </a:solidFill>
+                <a:latin typeface="Consolas"/>
+              </a:rPr>
+              <a:t>    </a:t>
+            </a:r>
+            <a:r>
+              <a:rPr lang="en-US" sz="1200" dirty="0">
+                <a:solidFill>
+                  <a:srgbClr val="8FB4E8"/>
+                </a:solidFill>
+                <a:latin typeface="Consolas"/>
+              </a:rPr>
+              <a:t>"inputSchema"</a:t>
+            </a:r>
+            <a:r>
+              <a:rPr lang="en-US" sz="1200" dirty="0">
+                <a:solidFill>
+                  <a:srgbClr val="E8E8E8"/>
+                </a:solidFill>
+                <a:latin typeface="Consolas"/>
+              </a:rPr>
+              <a:t>: { </a:t>
+            </a:r>
+            <a:r>
+              <a:rPr lang="en-US" sz="1200" dirty="0">
+                <a:solidFill>
+                  <a:srgbClr val="8FB4E8"/>
+                </a:solidFill>
+                <a:latin typeface="Consolas"/>
+              </a:rPr>
+              <a:t>"city"</a:t>
+            </a:r>
+            <a:r>
+              <a:rPr lang="en-US" sz="1200" dirty="0">
+                <a:solidFill>
+                  <a:srgbClr val="E8E8E8"/>
+                </a:solidFill>
+                <a:latin typeface="Consolas"/>
+              </a:rPr>
+              <a:t>: </a:t>
+            </a:r>
+            <a:r>
+              <a:rPr lang="en-US" sz="1200" dirty="0">
+                <a:solidFill>
+                  <a:srgbClr val="F5D77A"/>
+                </a:solidFill>
+                <a:latin typeface="Consolas"/>
+              </a:rPr>
+              <a:t>"string"</a:t>
+            </a:r>
+            <a:r>
+              <a:rPr lang="en-US" sz="1200" dirty="0">
+                <a:solidFill>
+                  <a:srgbClr val="E8E8E8"/>
+                </a:solidFill>
+                <a:latin typeface="Consolas"/>
+              </a:rPr>
+              <a:t>,</a:t>
+            </a:r>
+          </a:p>
+          <a:p>
+            <a:pPr>
+              <a:buNone/>
+            </a:pPr>
+            <a:r>
+              <a:rPr lang="en-US" sz="1200" dirty="0">
+                <a:solidFill>
+                  <a:srgbClr val="E8E8E8"/>
+                </a:solidFill>
+                <a:latin typeface="Consolas"/>
+              </a:rPr>
+              <a:t>                     </a:t>
+            </a:r>
+            <a:r>
+              <a:rPr lang="en-US" sz="1200" dirty="0">
+                <a:solidFill>
+                  <a:srgbClr val="8FB4E8"/>
+                </a:solidFill>
+                <a:latin typeface="Consolas"/>
+              </a:rPr>
+              <a:t>"date"</a:t>
+            </a:r>
+            <a:r>
+              <a:rPr lang="en-US" sz="1200" dirty="0">
+                <a:solidFill>
+                  <a:srgbClr val="E8E8E8"/>
+                </a:solidFill>
+                <a:latin typeface="Consolas"/>
+              </a:rPr>
+              <a:t>: </a:t>
+            </a:r>
+            <a:r>
+              <a:rPr lang="en-US" sz="1200" dirty="0">
+                <a:solidFill>
+                  <a:srgbClr val="F5D77A"/>
+                </a:solidFill>
+                <a:latin typeface="Consolas"/>
+              </a:rPr>
+              <a:t>"string"</a:t>
+            </a:r>
+            <a:r>
+              <a:rPr lang="en-US" sz="1200" dirty="0">
+                <a:solidFill>
+                  <a:srgbClr val="E8E8E8"/>
+                </a:solidFill>
+                <a:latin typeface="Consolas"/>
+              </a:rPr>
+              <a:t> }</a:t>
+            </a:r>
+          </a:p>
+          <a:p>
+            <a:pPr>
+              <a:buNone/>
+            </a:pPr>
+            <a:r>
+              <a:rPr lang="en-US" sz="1200" dirty="0">
+                <a:solidFill>
+                  <a:srgbClr val="E8E8E8"/>
+                </a:solidFill>
+                <a:latin typeface="Consolas"/>
+              </a:rPr>
+              <a:t>} ] }</a:t>
+            </a:r>
+          </a:p>
+        </p:txBody>
+      </p:sp>
+      <p:sp>
+        <p:nvSpPr>
+          <p:cNvPr id="104" name="Lbl2"/>
+          <p:cNvSpPr txBox="1"/>
+          <p:nvPr/>
+        </p:nvSpPr>
+        <p:spPr>
+          <a:xfrm>
+            <a:off x="6223000" y="1574800"/>
+            <a:ext cx="5207000" cy="304800"/>
+          </a:xfrm>
+          <a:prstGeom prst="rect">
+            <a:avLst/>
+          </a:prstGeom>
+          <a:noFill/>
+          <a:ln>
+            <a:noFill/>
+          </a:ln>
+        </p:spPr>
+        <p:txBody>
+          <a:bodyPr wrap="square" lIns="91440" tIns="45720" rIns="91440" bIns="45720" anchor="t"/>
+          <a:lstStyle/>
+          <a:p>
+            <a:pPr>
+              <a:buNone/>
+            </a:pPr>
+            <a:r>
+              <a:rPr lang="en-US" sz="1400" b="1" dirty="0">
+                <a:solidFill>
+                  <a:srgbClr val="6E6E6E"/>
+                </a:solidFill>
+              </a:rPr>
+              <a:t>2 · Ausführung: </a:t>
+            </a:r>
+            <a:r>
+              <a:rPr lang="en-US" sz="1400" b="1" dirty="0">
+                <a:solidFill>
+                  <a:srgbClr val="B1063A"/>
+                </a:solidFill>
+                <a:latin typeface="Consolas"/>
+              </a:rPr>
+              <a:t>tools/call</a:t>
+            </a:r>
+          </a:p>
+        </p:txBody>
+      </p:sp>
+      <p:sp>
+        <p:nvSpPr>
+          <p:cNvPr id="105" name="Card2"/>
+          <p:cNvSpPr txBox="1"/>
+          <p:nvPr/>
+        </p:nvSpPr>
+        <p:spPr>
+          <a:xfrm>
+            <a:off x="6223000" y="1905000"/>
+            <a:ext cx="5207000" cy="3175000"/>
+          </a:xfrm>
+          <a:prstGeom prst="roundRect">
+            <a:avLst/>
+          </a:prstGeom>
+          <a:solidFill>
+            <a:srgbClr val="2B2B2B"/>
+          </a:solidFill>
+          <a:ln>
+            <a:noFill/>
+          </a:ln>
+        </p:spPr>
+        <p:txBody>
+          <a:bodyPr wrap="square" lIns="91440" tIns="45720" rIns="91440" bIns="45720" anchor="t"/>
+          <a:lstStyle/>
+          <a:p>
+            <a:endParaRPr/>
+          </a:p>
+        </p:txBody>
+      </p:sp>
+      <p:sp>
+        <p:nvSpPr>
+          <p:cNvPr id="106" name="Code2"/>
+          <p:cNvSpPr txBox="1"/>
+          <p:nvPr/>
+        </p:nvSpPr>
+        <p:spPr>
+          <a:xfrm>
+            <a:off x="6400800" y="2032000"/>
+            <a:ext cx="4902200" cy="2946400"/>
+          </a:xfrm>
+          <a:prstGeom prst="rect">
+            <a:avLst/>
+          </a:prstGeom>
+          <a:noFill/>
+          <a:ln>
+            <a:noFill/>
+          </a:ln>
+        </p:spPr>
+        <p:txBody>
+          <a:bodyPr wrap="square" lIns="0" tIns="45720" rIns="0" bIns="45720" anchor="t"/>
+          <a:lstStyle/>
+          <a:p>
+            <a:pPr>
+              <a:buNone/>
+            </a:pPr>
+            <a:r>
+              <a:rPr lang="en-US" sz="1200" dirty="0">
+                <a:solidFill>
+                  <a:srgbClr val="9A9A9A"/>
+                </a:solidFill>
+                <a:latin typeface="Consolas"/>
+              </a:rPr>
+              <a:t>// request</a:t>
+            </a:r>
+          </a:p>
+          <a:p>
+            <a:pPr>
+              <a:buNone/>
+            </a:pPr>
+            <a:r>
+              <a:rPr lang="en-US" sz="1200" dirty="0">
+                <a:solidFill>
+                  <a:srgbClr val="E8E8E8"/>
+                </a:solidFill>
+                <a:latin typeface="Consolas"/>
+              </a:rPr>
+              <a:t>{ </a:t>
+            </a:r>
+            <a:r>
+              <a:rPr lang="en-US" sz="1200" dirty="0">
+                <a:solidFill>
+                  <a:srgbClr val="8FB4E8"/>
+                </a:solidFill>
+                <a:latin typeface="Consolas"/>
+              </a:rPr>
+              <a:t>"method"</a:t>
+            </a:r>
+            <a:r>
+              <a:rPr lang="en-US" sz="1200" dirty="0">
+                <a:solidFill>
+                  <a:srgbClr val="E8E8E8"/>
+                </a:solidFill>
+                <a:latin typeface="Consolas"/>
+              </a:rPr>
+              <a:t>: </a:t>
+            </a:r>
+            <a:r>
+              <a:rPr lang="en-US" sz="1200" dirty="0">
+                <a:solidFill>
+                  <a:srgbClr val="F5D77A"/>
+                </a:solidFill>
+                <a:latin typeface="Consolas"/>
+              </a:rPr>
+              <a:t>"tools/call"</a:t>
+            </a:r>
+            <a:r>
+              <a:rPr lang="en-US" sz="1200" dirty="0">
+                <a:solidFill>
+                  <a:srgbClr val="E8E8E8"/>
+                </a:solidFill>
+                <a:latin typeface="Consolas"/>
+              </a:rPr>
+              <a:t>,</a:t>
+            </a:r>
+          </a:p>
+          <a:p>
+            <a:pPr>
+              <a:buNone/>
+            </a:pPr>
+            <a:r>
+              <a:rPr lang="en-US" sz="1200" dirty="0">
+                <a:solidFill>
+                  <a:srgbClr val="E8E8E8"/>
+                </a:solidFill>
+                <a:latin typeface="Consolas"/>
+              </a:rPr>
+              <a:t>  </a:t>
+            </a:r>
+            <a:r>
+              <a:rPr lang="en-US" sz="1200" dirty="0">
+                <a:solidFill>
+                  <a:srgbClr val="8FB4E8"/>
+                </a:solidFill>
+                <a:latin typeface="Consolas"/>
+              </a:rPr>
+              <a:t>"params"</a:t>
+            </a:r>
+            <a:r>
+              <a:rPr lang="en-US" sz="1200" dirty="0">
+                <a:solidFill>
+                  <a:srgbClr val="E8E8E8"/>
+                </a:solidFill>
+                <a:latin typeface="Consolas"/>
+              </a:rPr>
+              <a:t>: { </a:t>
+            </a:r>
+            <a:r>
+              <a:rPr lang="en-US" sz="1200" dirty="0">
+                <a:solidFill>
+                  <a:srgbClr val="8FB4E8"/>
+                </a:solidFill>
+                <a:latin typeface="Consolas"/>
+              </a:rPr>
+              <a:t>"name"</a:t>
+            </a:r>
+            <a:r>
+              <a:rPr lang="en-US" sz="1200" dirty="0">
+                <a:solidFill>
+                  <a:srgbClr val="E8E8E8"/>
+                </a:solidFill>
+                <a:latin typeface="Consolas"/>
+              </a:rPr>
+              <a:t>: </a:t>
+            </a:r>
+            <a:r>
+              <a:rPr lang="en-US" sz="1200" dirty="0">
+                <a:solidFill>
+                  <a:srgbClr val="F5D77A"/>
+                </a:solidFill>
+                <a:latin typeface="Consolas"/>
+              </a:rPr>
+              <a:t>"get_forecast"</a:t>
+            </a:r>
+            <a:r>
+              <a:rPr lang="en-US" sz="1200" dirty="0">
+                <a:solidFill>
+                  <a:srgbClr val="E8E8E8"/>
+                </a:solidFill>
+                <a:latin typeface="Consolas"/>
+              </a:rPr>
+              <a:t>,</a:t>
+            </a:r>
+          </a:p>
+          <a:p>
+            <a:pPr>
+              <a:buNone/>
+            </a:pPr>
+            <a:r>
+              <a:rPr lang="en-US" sz="1200" dirty="0">
+                <a:solidFill>
+                  <a:srgbClr val="E8E8E8"/>
+                </a:solidFill>
+                <a:latin typeface="Consolas"/>
+              </a:rPr>
+              <a:t>              </a:t>
+            </a:r>
+            <a:r>
+              <a:rPr lang="en-US" sz="1200" dirty="0">
+                <a:solidFill>
+                  <a:srgbClr val="8FB4E8"/>
+                </a:solidFill>
+                <a:latin typeface="Consolas"/>
+              </a:rPr>
+              <a:t>"arguments"</a:t>
+            </a:r>
+            <a:r>
+              <a:rPr lang="en-US" sz="1200" dirty="0">
+                <a:solidFill>
+                  <a:srgbClr val="E8E8E8"/>
+                </a:solidFill>
+                <a:latin typeface="Consolas"/>
+              </a:rPr>
+              <a:t>: { </a:t>
+            </a:r>
+            <a:r>
+              <a:rPr lang="en-US" sz="1200" dirty="0">
+                <a:solidFill>
+                  <a:srgbClr val="8FB4E8"/>
+                </a:solidFill>
+                <a:latin typeface="Consolas"/>
+              </a:rPr>
+              <a:t>"city"</a:t>
+            </a:r>
+            <a:r>
+              <a:rPr lang="en-US" sz="1200" dirty="0">
+                <a:solidFill>
+                  <a:srgbClr val="E8E8E8"/>
+                </a:solidFill>
+                <a:latin typeface="Consolas"/>
+              </a:rPr>
+              <a:t>: </a:t>
+            </a:r>
+            <a:r>
+              <a:rPr lang="en-US" sz="1200" dirty="0">
+                <a:solidFill>
+                  <a:srgbClr val="F5D77A"/>
+                </a:solidFill>
+                <a:latin typeface="Consolas"/>
+              </a:rPr>
+              <a:t>"Berlin"</a:t>
+            </a:r>
+            <a:r>
+              <a:rPr lang="en-US" sz="1200" dirty="0">
+                <a:solidFill>
+                  <a:srgbClr val="E8E8E8"/>
+                </a:solidFill>
+                <a:latin typeface="Consolas"/>
+              </a:rPr>
+              <a:t>,</a:t>
+            </a:r>
+          </a:p>
+          <a:p>
+            <a:pPr>
+              <a:buNone/>
+            </a:pPr>
+            <a:r>
+              <a:rPr lang="en-US" sz="1200" dirty="0">
+                <a:solidFill>
+                  <a:srgbClr val="E8E8E8"/>
+                </a:solidFill>
+                <a:latin typeface="Consolas"/>
+              </a:rPr>
+              <a:t>                             </a:t>
+            </a:r>
+            <a:r>
+              <a:rPr lang="en-US" sz="1200" dirty="0">
+                <a:solidFill>
+                  <a:srgbClr val="8FB4E8"/>
+                </a:solidFill>
+                <a:latin typeface="Consolas"/>
+              </a:rPr>
+              <a:t>"date"</a:t>
+            </a:r>
+            <a:r>
+              <a:rPr lang="en-US" sz="1200" dirty="0">
+                <a:solidFill>
+                  <a:srgbClr val="E8E8E8"/>
+                </a:solidFill>
+                <a:latin typeface="Consolas"/>
+              </a:rPr>
+              <a:t>: </a:t>
+            </a:r>
+            <a:r>
+              <a:rPr lang="en-US" sz="1200" dirty="0">
+                <a:solidFill>
+                  <a:srgbClr val="F5D77A"/>
+                </a:solidFill>
+                <a:latin typeface="Consolas"/>
+              </a:rPr>
+              <a:t>"2026-09-05"</a:t>
+            </a:r>
+            <a:r>
+              <a:rPr lang="en-US" sz="1200" dirty="0">
+                <a:solidFill>
+                  <a:srgbClr val="E8E8E8"/>
+                </a:solidFill>
+                <a:latin typeface="Consolas"/>
+              </a:rPr>
+              <a:t> } } }</a:t>
+            </a:r>
+          </a:p>
+          <a:p>
+            <a:pPr>
+              <a:buNone/>
+            </a:pPr>
+            <a:r>
+              <a:rPr lang="en-US" sz="1200" dirty="0">
+                <a:solidFill>
+                  <a:srgbClr val="E8E8E8"/>
+                </a:solidFill>
+                <a:latin typeface="Consolas"/>
+              </a:rPr>
+              <a:t> </a:t>
+            </a:r>
+          </a:p>
+          <a:p>
+            <a:pPr>
+              <a:buNone/>
+            </a:pPr>
+            <a:r>
+              <a:rPr lang="en-US" sz="1200" dirty="0">
+                <a:solidFill>
+                  <a:srgbClr val="9A9A9A"/>
+                </a:solidFill>
+                <a:latin typeface="Consolas"/>
+              </a:rPr>
+              <a:t>// response</a:t>
+            </a:r>
+          </a:p>
+          <a:p>
+            <a:pPr>
+              <a:buNone/>
+            </a:pPr>
+            <a:r>
+              <a:rPr lang="en-US" sz="1200" dirty="0">
+                <a:solidFill>
+                  <a:srgbClr val="E8E8E8"/>
+                </a:solidFill>
+                <a:latin typeface="Consolas"/>
+              </a:rPr>
+              <a:t>{ </a:t>
+            </a:r>
+            <a:r>
+              <a:rPr lang="en-US" sz="1200" dirty="0">
+                <a:solidFill>
+                  <a:srgbClr val="8FB4E8"/>
+                </a:solidFill>
+                <a:latin typeface="Consolas"/>
+              </a:rPr>
+              <a:t>"content"</a:t>
+            </a:r>
+            <a:r>
+              <a:rPr lang="en-US" sz="1200" dirty="0">
+                <a:solidFill>
+                  <a:srgbClr val="E8E8E8"/>
+                </a:solidFill>
+                <a:latin typeface="Consolas"/>
+              </a:rPr>
+              <a:t>: [ { </a:t>
+            </a:r>
+            <a:r>
+              <a:rPr lang="en-US" sz="1200" dirty="0">
+                <a:solidFill>
+                  <a:srgbClr val="8FB4E8"/>
+                </a:solidFill>
+                <a:latin typeface="Consolas"/>
+              </a:rPr>
+              <a:t>"type"</a:t>
+            </a:r>
+            <a:r>
+              <a:rPr lang="en-US" sz="1200" dirty="0">
+                <a:solidFill>
+                  <a:srgbClr val="E8E8E8"/>
+                </a:solidFill>
+                <a:latin typeface="Consolas"/>
+              </a:rPr>
+              <a:t>: </a:t>
+            </a:r>
+            <a:r>
+              <a:rPr lang="en-US" sz="1200" dirty="0">
+                <a:solidFill>
+                  <a:srgbClr val="F5D77A"/>
+                </a:solidFill>
+                <a:latin typeface="Consolas"/>
+              </a:rPr>
+              <a:t>"text"</a:t>
+            </a:r>
+            <a:r>
+              <a:rPr lang="en-US" sz="1200" dirty="0">
+                <a:solidFill>
+                  <a:srgbClr val="E8E8E8"/>
+                </a:solidFill>
+                <a:latin typeface="Consolas"/>
+              </a:rPr>
+              <a:t>,</a:t>
+            </a:r>
+          </a:p>
+          <a:p>
+            <a:pPr>
+              <a:buNone/>
+            </a:pPr>
+            <a:r>
+              <a:rPr lang="en-US" sz="1200" dirty="0">
+                <a:solidFill>
+                  <a:srgbClr val="E8E8E8"/>
+                </a:solidFill>
+                <a:latin typeface="Consolas"/>
+              </a:rPr>
+              <a:t>    </a:t>
+            </a:r>
+            <a:r>
+              <a:rPr lang="en-US" sz="1200" dirty="0">
+                <a:solidFill>
+                  <a:srgbClr val="8FB4E8"/>
+                </a:solidFill>
+                <a:latin typeface="Consolas"/>
+              </a:rPr>
+              <a:t>"text"</a:t>
+            </a:r>
+            <a:r>
+              <a:rPr lang="en-US" sz="1200" dirty="0">
+                <a:solidFill>
+                  <a:srgbClr val="E8E8E8"/>
+                </a:solidFill>
+                <a:latin typeface="Consolas"/>
+              </a:rPr>
+              <a:t>: </a:t>
+            </a:r>
+            <a:r>
+              <a:rPr lang="en-US" sz="1200" dirty="0">
+                <a:solidFill>
+                  <a:srgbClr val="F5D77A"/>
+                </a:solidFill>
+                <a:latin typeface="Consolas"/>
+              </a:rPr>
+              <a:t>"Berlin, 5 Sept: 19 °C, light rain"</a:t>
+            </a:r>
+            <a:r>
+              <a:rPr lang="en-US" sz="1200" dirty="0">
+                <a:solidFill>
+                  <a:srgbClr val="E8E8E8"/>
+                </a:solidFill>
+                <a:latin typeface="Consolas"/>
+              </a:rPr>
+              <a:t> } ] }</a:t>
+            </a:r>
+          </a:p>
+        </p:txBody>
+      </p:sp>
+      <p:sp>
+        <p:nvSpPr>
+          <p:cNvPr id="107" name="Footer"/>
+          <p:cNvSpPr txBox="1"/>
+          <p:nvPr/>
+        </p:nvSpPr>
+        <p:spPr>
+          <a:xfrm>
+            <a:off x="762000" y="5308600"/>
+            <a:ext cx="10668000" cy="762000"/>
+          </a:xfrm>
+          <a:prstGeom prst="rect">
+            <a:avLst/>
+          </a:prstGeom>
+          <a:noFill/>
+          <a:ln>
+            <a:noFill/>
+          </a:ln>
+        </p:spPr>
+        <p:txBody>
+          <a:bodyPr wrap="square" lIns="91440" tIns="45720" rIns="91440" bIns="45720" anchor="t"/>
+          <a:lstStyle/>
+          <a:p>
+            <a:pPr>
+              <a:buNone/>
+            </a:pPr>
+            <a:r>
+              <a:rPr lang="en-US" sz="1600" b="1" dirty="0">
+                <a:solidFill>
+                  <a:srgbClr val="1A1A1A"/>
+                </a:solidFill>
+              </a:rPr>
+              <a:t>Reines JSON-RPC · Discovery zur Laufzeit · </a:t>
+            </a:r>
+            <a:r>
+              <a:rPr lang="en-US" sz="1600" b="1" dirty="0">
+                <a:solidFill>
+                  <a:srgbClr val="B1063A"/>
+                </a:solidFill>
+              </a:rPr>
+              <a:t>die Description ist ein Prompt.</a:t>
+            </a:r>
+          </a:p>
+          <a:p>
+            <a:pPr>
+              <a:spcBef>
+                <a:spcPts val="400"/>
+              </a:spcBef>
+              <a:buNone/>
+            </a:pPr>
+            <a:r>
+              <a:rPr lang="en-US" sz="1400" dirty="0">
+                <a:solidFill>
+                  <a:srgbClr val="3C3C3C"/>
+                </a:solidFill>
+              </a:rPr>
+              <a:t>inputSchema ist gewöhnliches JSON Schema. Der Host reicht Name, Description und Schema im nativen Function-Calling-Format an das Model weiter; das Model sieht MCP selbst nie.</a:t>
+            </a:r>
+          </a:p>
+        </p:txBody>
+      </p:sp>
+      <p:pic>
+        <p:nvPicPr>
+          <p:cNvPr id="3" name="Picture 2">
+            <a:extLst>
+              <a:ext uri="{FF2B5EF4-FFF2-40B4-BE49-F238E27FC236}">
+                <a16:creationId xmlns:a16="http://schemas.microsoft.com/office/drawing/2014/main" id="{6D8BF6E8-95D0-0B79-8D16-AF7E79246F48}"/>
+              </a:ext>
+            </a:extLst>
+          </p:cNvPr>
+          <p:cNvPicPr>
+            <a:picLocks noChangeAspect="1"/>
+          </p:cNvPicPr>
+          <p:nvPr/>
+        </p:nvPicPr>
+        <p:blipFill>
+          <a:blip r:embed="rId3"/>
+          <a:stretch>
+            <a:fillRect/>
+          </a:stretch>
+        </p:blipFill>
+        <p:spPr>
+          <a:xfrm>
+            <a:off x="9489298" y="183584"/>
+            <a:ext cx="2592088" cy="776265"/>
+          </a:xfrm>
+          <a:prstGeom prst="rect">
+            <a:avLst/>
+          </a:prstGeom>
+        </p:spPr>
+      </p:pic>
+    </p:spTree>
+    <p:extLst>
+      <p:ext uri="{BB962C8B-B14F-4D97-AF65-F5344CB8AC3E}">
+        <p14:creationId xmlns:p14="http://schemas.microsoft.com/office/powerpoint/2010/main" val="2986761877"/>
+      </p:ext>
+    </p:extLst>
+  </p:cSld>
+  <p:clrMapOvr>
+    <a:masterClrMapping/>
+  </p:clrMapOvr>
+</p:sld>
+</file>
+
+<file path=ppt/slides/slide24.xml><?xml version="1.0" encoding="utf-8"?>
+<p:sld xmlns:a="http://schemas.openxmlformats.org/drawingml/2006/main" xmlns:r="http://schemas.openxmlformats.org/officeDocument/2006/relationships" xmlns:p="http://schemas.openxmlformats.org/presentationml/2006/main">
+  <p:cSld>
+    <p:spTree>
+      <p:nvGrpSpPr>
+        <p:cNvPr id="1" name=""/>
+        <p:cNvGrpSpPr/>
+        <p:nvPr/>
+      </p:nvGrpSpPr>
+      <p:grpSpPr>
+        <a:xfrm>
+          <a:off x="0" y="0"/>
+          <a:ext cx="0" cy="0"/>
+          <a:chOff x="0" y="0"/>
+          <a:chExt cx="0" cy="0"/>
+        </a:xfrm>
+      </p:grpSpPr>
+      <p:sp>
+        <p:nvSpPr>
+          <p:cNvPr id="2" name="Title 1">
+            <a:extLst>
+              <a:ext uri="{FF2B5EF4-FFF2-40B4-BE49-F238E27FC236}">
+                <a16:creationId xmlns:a16="http://schemas.microsoft.com/office/drawing/2014/main" id="{496DDC70-EDD3-97EB-D393-02E5ED3B2593}"/>
+              </a:ext>
+            </a:extLst>
+          </p:cNvPr>
+          <p:cNvSpPr>
+            <a:spLocks noGrp="1"/>
+          </p:cNvSpPr>
+          <p:nvPr>
+            <p:ph type="title"/>
+          </p:nvPr>
+        </p:nvSpPr>
+        <p:spPr>
+          <a:xfrm>
+            <a:off x="762000" y="457200"/>
+            <a:ext cx="10668000" cy="711200"/>
+          </a:xfrm>
+        </p:spPr>
+        <p:txBody>
+          <a:bodyPr anchor="t"/>
+          <a:lstStyle/>
+          <a:p>
+            <a:r>
+              <a:rPr lang="de-DE" sz="3000" b="1" dirty="0">
+                <a:solidFill>
+                  <a:srgbClr val="B1063A"/>
+                </a:solidFill>
+              </a:rPr>
+              <a:t>Backup </a:t>
+            </a:r>
+            <a:r>
+              <a:rPr lang="en-US" sz="3000" dirty="0">
+                <a:solidFill>
+                  <a:srgbClr val="B1063A"/>
+                </a:solidFill>
+              </a:rPr>
+              <a:t>· </a:t>
+            </a:r>
+            <a:r>
+              <a:rPr lang="de-DE" sz="3000" b="1" dirty="0">
+                <a:solidFill>
+                  <a:srgbClr val="B1063A"/>
+                </a:solidFill>
+              </a:rPr>
+              <a:t>Unter der Haube: MCP spricht JSON</a:t>
+            </a:r>
+          </a:p>
+        </p:txBody>
+      </p:sp>
+      <p:sp>
+        <p:nvSpPr>
+          <p:cNvPr id="100" name="Rule"/>
+          <p:cNvSpPr txBox="1"/>
+          <p:nvPr/>
+        </p:nvSpPr>
+        <p:spPr>
+          <a:xfrm>
+            <a:off x="762000" y="1244600"/>
+            <a:ext cx="762000" cy="38100"/>
+          </a:xfrm>
+          <a:prstGeom prst="rect">
+            <a:avLst/>
+          </a:prstGeom>
+          <a:solidFill>
+            <a:srgbClr val="B1063A"/>
+          </a:solidFill>
+          <a:ln>
+            <a:noFill/>
+          </a:ln>
+        </p:spPr>
+        <p:txBody>
+          <a:bodyPr wrap="square" lIns="91440" tIns="91440" rIns="91440" bIns="91440" anchor="t"/>
+          <a:lstStyle/>
+          <a:p>
+            <a:endParaRPr/>
+          </a:p>
+        </p:txBody>
+      </p:sp>
+      <p:sp>
+        <p:nvSpPr>
+          <p:cNvPr id="101" name="Intro"/>
+          <p:cNvSpPr txBox="1"/>
+          <p:nvPr/>
+        </p:nvSpPr>
+        <p:spPr>
+          <a:xfrm>
+            <a:off x="762000" y="1371600"/>
+            <a:ext cx="10668000" cy="381000"/>
+          </a:xfrm>
+          <a:prstGeom prst="rect">
+            <a:avLst/>
+          </a:prstGeom>
+          <a:noFill/>
+          <a:ln>
+            <a:noFill/>
+          </a:ln>
+        </p:spPr>
+        <p:txBody>
+          <a:bodyPr wrap="square" lIns="91440" tIns="91440" rIns="91440" bIns="91440" anchor="t"/>
+          <a:lstStyle/>
+          <a:p>
+            <a:pPr>
+              <a:buNone/>
+            </a:pPr>
+            <a:r>
+              <a:rPr lang="de-DE" sz="1600" dirty="0">
+                <a:solidFill>
+                  <a:srgbClr val="3C3C3C"/>
+                </a:solidFill>
+              </a:rPr>
+              <a:t>Jede Nachricht zwischen Client und Server ist ein </a:t>
+            </a:r>
+            <a:r>
+              <a:rPr lang="de-DE" sz="1600" b="1" dirty="0">
+                <a:solidFill>
+                  <a:srgbClr val="1A1A1A"/>
+                </a:solidFill>
+              </a:rPr>
+              <a:t>JSON-Objekt</a:t>
+            </a:r>
+            <a:r>
+              <a:rPr lang="de-DE" sz="1600" dirty="0">
+                <a:solidFill>
+                  <a:srgbClr val="3C3C3C"/>
+                </a:solidFill>
+              </a:rPr>
+              <a:t> (Standard: </a:t>
+            </a:r>
+            <a:r>
+              <a:rPr lang="de-DE" sz="1600" b="1" dirty="0">
+                <a:solidFill>
+                  <a:srgbClr val="1A1A1A"/>
+                </a:solidFill>
+              </a:rPr>
+              <a:t>JSON-RPC 2.0</a:t>
+            </a:r>
+            <a:r>
+              <a:rPr lang="de-DE" sz="1600" dirty="0">
+                <a:solidFill>
+                  <a:srgbClr val="3C3C3C"/>
+                </a:solidFill>
+              </a:rPr>
+              <a:t>).</a:t>
+            </a:r>
+          </a:p>
+        </p:txBody>
+      </p:sp>
+      <p:sp>
+        <p:nvSpPr>
+          <p:cNvPr id="102" name="Code"/>
+          <p:cNvSpPr txBox="1"/>
+          <p:nvPr/>
+        </p:nvSpPr>
+        <p:spPr>
+          <a:xfrm>
+            <a:off x="762000" y="1828800"/>
+            <a:ext cx="6934200" cy="3352800"/>
+          </a:xfrm>
+          <a:prstGeom prst="roundRect">
+            <a:avLst/>
+          </a:prstGeom>
+          <a:solidFill>
+            <a:srgbClr val="F4F4F4"/>
+          </a:solidFill>
+          <a:ln>
+            <a:noFill/>
+          </a:ln>
+        </p:spPr>
+        <p:txBody>
+          <a:bodyPr wrap="square" lIns="182880" tIns="182880" rIns="182880" bIns="182880" anchor="ctr"/>
+          <a:lstStyle/>
+          <a:p>
+            <a:pPr>
+              <a:lnSpc>
+                <a:spcPct val="100000"/>
+              </a:lnSpc>
+              <a:buNone/>
+            </a:pPr>
+            <a:r>
+              <a:rPr lang="de-DE" sz="1200" dirty="0">
+                <a:solidFill>
+                  <a:srgbClr val="1A1A1A"/>
+                </a:solidFill>
+                <a:latin typeface="Consolas"/>
+                <a:cs typeface="Consolas"/>
+              </a:rPr>
+              <a:t>→ { "method": "tools/list" }</a:t>
+            </a:r>
+            <a:r>
+              <a:rPr lang="de-DE" sz="1200" dirty="0">
+                <a:solidFill>
+                  <a:srgbClr val="6E6E6E"/>
+                </a:solidFill>
+                <a:latin typeface="Consolas"/>
+                <a:cs typeface="Consolas"/>
+              </a:rPr>
+              <a:t>   // Was kannst du?</a:t>
+            </a:r>
+          </a:p>
+          <a:p>
+            <a:pPr>
+              <a:lnSpc>
+                <a:spcPct val="100000"/>
+              </a:lnSpc>
+              <a:buNone/>
+            </a:pPr>
+            <a:r>
+              <a:rPr lang="de-DE" sz="1200" dirty="0">
+                <a:solidFill>
+                  <a:srgbClr val="1A1A1A"/>
+                </a:solidFill>
+                <a:latin typeface="Consolas"/>
+                <a:cs typeface="Consolas"/>
+              </a:rPr>
+              <a:t>← { "tools": [ { "name": "get_local_weather",</a:t>
+            </a:r>
+          </a:p>
+          <a:p>
+            <a:pPr>
+              <a:lnSpc>
+                <a:spcPct val="100000"/>
+              </a:lnSpc>
+              <a:buNone/>
+            </a:pPr>
+            <a:r>
+              <a:rPr lang="de-DE" sz="1200" dirty="0">
+                <a:solidFill>
+                  <a:srgbClr val="1A1A1A"/>
+                </a:solidFill>
+                <a:latin typeface="Consolas"/>
+                <a:cs typeface="Consolas"/>
+              </a:rPr>
+              <a:t>      "description": "Wettervorhersage für eine Stadt …",</a:t>
+            </a:r>
+          </a:p>
+          <a:p>
+            <a:pPr>
+              <a:lnSpc>
+                <a:spcPct val="100000"/>
+              </a:lnSpc>
+              <a:buNone/>
+            </a:pPr>
+            <a:r>
+              <a:rPr lang="de-DE" sz="1200" dirty="0">
+                <a:solidFill>
+                  <a:srgbClr val="1A1A1A"/>
+                </a:solidFill>
+                <a:latin typeface="Consolas"/>
+                <a:cs typeface="Consolas"/>
+              </a:rPr>
+              <a:t>      "inputSchema": { "city": "string", "date": "string" } } ] }</a:t>
+            </a:r>
+          </a:p>
+          <a:p>
+            <a:pPr>
+              <a:lnSpc>
+                <a:spcPct val="100000"/>
+              </a:lnSpc>
+              <a:buNone/>
+            </a:pPr>
+            <a:endParaRPr lang="de-DE" sz="1200"/>
+          </a:p>
+          <a:p>
+            <a:pPr>
+              <a:lnSpc>
+                <a:spcPct val="100000"/>
+              </a:lnSpc>
+              <a:buNone/>
+            </a:pPr>
+            <a:r>
+              <a:rPr lang="de-DE" sz="1200" dirty="0">
+                <a:solidFill>
+                  <a:srgbClr val="1A1A1A"/>
+                </a:solidFill>
+                <a:latin typeface="Consolas"/>
+                <a:cs typeface="Consolas"/>
+              </a:rPr>
+              <a:t>→ { "method": "tools/call",</a:t>
+            </a:r>
+            <a:r>
+              <a:rPr lang="de-DE" sz="1200" dirty="0">
+                <a:solidFill>
+                  <a:srgbClr val="6E6E6E"/>
+                </a:solidFill>
+                <a:latin typeface="Consolas"/>
+                <a:cs typeface="Consolas"/>
+              </a:rPr>
+              <a:t>   // Bitte ausführen</a:t>
+            </a:r>
+          </a:p>
+          <a:p>
+            <a:pPr>
+              <a:lnSpc>
+                <a:spcPct val="100000"/>
+              </a:lnSpc>
+              <a:buNone/>
+            </a:pPr>
+            <a:r>
+              <a:rPr lang="de-DE" sz="1200" dirty="0">
+                <a:solidFill>
+                  <a:srgbClr val="1A1A1A"/>
+                </a:solidFill>
+                <a:latin typeface="Consolas"/>
+                <a:cs typeface="Consolas"/>
+              </a:rPr>
+              <a:t>    "params": { "name": "get_local_weather",</a:t>
+            </a:r>
+          </a:p>
+          <a:p>
+            <a:pPr>
+              <a:lnSpc>
+                <a:spcPct val="100000"/>
+              </a:lnSpc>
+              <a:buNone/>
+            </a:pPr>
+            <a:r>
+              <a:rPr lang="de-DE" sz="1200" dirty="0">
+                <a:solidFill>
+                  <a:srgbClr val="1A1A1A"/>
+                </a:solidFill>
+                <a:latin typeface="Consolas"/>
+                <a:cs typeface="Consolas"/>
+              </a:rPr>
+              <a:t>      "arguments": { "city": "Berlin", "date": "2026-09-09" } } }</a:t>
+            </a:r>
+          </a:p>
+          <a:p>
+            <a:pPr>
+              <a:lnSpc>
+                <a:spcPct val="100000"/>
+              </a:lnSpc>
+              <a:buNone/>
+            </a:pPr>
+            <a:r>
+              <a:rPr lang="de-DE" sz="1200" dirty="0">
+                <a:solidFill>
+                  <a:srgbClr val="1A1A1A"/>
+                </a:solidFill>
+                <a:latin typeface="Consolas"/>
+                <a:cs typeface="Consolas"/>
+              </a:rPr>
+              <a:t>← { "content": [ { "type": "text",</a:t>
+            </a:r>
+          </a:p>
+          <a:p>
+            <a:pPr>
+              <a:lnSpc>
+                <a:spcPct val="100000"/>
+              </a:lnSpc>
+              <a:buNone/>
+            </a:pPr>
+            <a:r>
+              <a:rPr lang="de-DE" sz="1200" dirty="0">
+                <a:solidFill>
+                  <a:srgbClr val="1A1A1A"/>
+                </a:solidFill>
+                <a:latin typeface="Consolas"/>
+                <a:cs typeface="Consolas"/>
+              </a:rPr>
+              <a:t>      "text": "Berlin, 9. Sept: 19 °C, leichter Regen" } ] }</a:t>
+            </a:r>
+          </a:p>
+        </p:txBody>
+      </p:sp>
+      <p:sp>
+        <p:nvSpPr>
+          <p:cNvPr id="103" name="Bullets"/>
+          <p:cNvSpPr txBox="1"/>
+          <p:nvPr/>
+        </p:nvSpPr>
+        <p:spPr>
+          <a:xfrm>
+            <a:off x="7924800" y="1828800"/>
+            <a:ext cx="3505200" cy="3352800"/>
+          </a:xfrm>
+          <a:prstGeom prst="rect">
+            <a:avLst/>
+          </a:prstGeom>
+          <a:noFill/>
+          <a:ln>
+            <a:noFill/>
+          </a:ln>
+        </p:spPr>
+        <p:txBody>
+          <a:bodyPr wrap="square" lIns="0" tIns="0" rIns="0" bIns="0" anchor="ctr"/>
+          <a:lstStyle/>
+          <a:p>
+            <a:pPr marL="228600" indent="-228600">
+              <a:buClr>
+                <a:srgbClr val="B1063A"/>
+              </a:buClr>
+              <a:buFont typeface="Arial"/>
+              <a:buChar char="•"/>
+            </a:pPr>
+            <a:r>
+              <a:rPr lang="de-DE" sz="1500" b="1" dirty="0">
+                <a:solidFill>
+                  <a:srgbClr val="1A1A1A"/>
+                </a:solidFill>
+              </a:rPr>
+              <a:t>Sprachunabhängig</a:t>
+            </a:r>
+            <a:r>
+              <a:rPr lang="de-DE" sz="1500" dirty="0">
+                <a:solidFill>
+                  <a:srgbClr val="3C3C3C"/>
+                </a:solidFill>
+              </a:rPr>
+              <a:t> – jeder Client spricht mit jedem Server (Python, TypeScript, Go …)</a:t>
+            </a:r>
+          </a:p>
+          <a:p>
+            <a:pPr marL="228600" indent="-228600">
+              <a:spcBef>
+                <a:spcPts val="900"/>
+              </a:spcBef>
+              <a:buClr>
+                <a:srgbClr val="B1063A"/>
+              </a:buClr>
+              <a:buFont typeface="Arial"/>
+              <a:buChar char="•"/>
+            </a:pPr>
+            <a:r>
+              <a:rPr lang="de-DE" sz="1500" b="1" dirty="0">
+                <a:solidFill>
+                  <a:srgbClr val="1A1A1A"/>
+                </a:solidFill>
+              </a:rPr>
+              <a:t>Strukturiert &amp; prüfbar</a:t>
+            </a:r>
+            <a:r>
+              <a:rPr lang="de-DE" sz="1500" dirty="0">
+                <a:solidFill>
+                  <a:srgbClr val="3C3C3C"/>
+                </a:solidFill>
+              </a:rPr>
+              <a:t> – Parameter sind per JSON Schema typisiert, das Model erzeugt gültige Aufrufe</a:t>
+            </a:r>
+          </a:p>
+          <a:p>
+            <a:pPr marL="228600" indent="-228600">
+              <a:spcBef>
+                <a:spcPts val="900"/>
+              </a:spcBef>
+              <a:buClr>
+                <a:srgbClr val="B1063A"/>
+              </a:buClr>
+              <a:buFont typeface="Arial"/>
+              <a:buChar char="•"/>
+            </a:pPr>
+            <a:r>
+              <a:rPr lang="de-DE" sz="1500" b="1" dirty="0">
+                <a:solidFill>
+                  <a:srgbClr val="1A1A1A"/>
+                </a:solidFill>
+              </a:rPr>
+              <a:t>Passt zum Function Calling</a:t>
+            </a:r>
+            <a:r>
+              <a:rPr lang="de-DE" sz="1500" dirty="0">
+                <a:solidFill>
+                  <a:srgbClr val="3C3C3C"/>
+                </a:solidFill>
+              </a:rPr>
+              <a:t> – LLMs sprechen ohnehin JSON Schema, also 1:1-Abbildung</a:t>
+            </a:r>
+          </a:p>
+          <a:p>
+            <a:pPr marL="228600" indent="-228600">
+              <a:spcBef>
+                <a:spcPts val="900"/>
+              </a:spcBef>
+              <a:buClr>
+                <a:srgbClr val="B1063A"/>
+              </a:buClr>
+              <a:buFont typeface="Arial"/>
+              <a:buChar char="•"/>
+            </a:pPr>
+            <a:r>
+              <a:rPr lang="de-DE" sz="1500" b="1" dirty="0">
+                <a:solidFill>
+                  <a:srgbClr val="1A1A1A"/>
+                </a:solidFill>
+              </a:rPr>
+              <a:t>Menschenlesbar</a:t>
+            </a:r>
+            <a:r>
+              <a:rPr lang="de-DE" sz="1500" dirty="0">
+                <a:solidFill>
+                  <a:srgbClr val="3C3C3C"/>
+                </a:solidFill>
+              </a:rPr>
+              <a:t> – im MCP Inspector direkt nachvollziehbar</a:t>
+            </a:r>
+          </a:p>
+        </p:txBody>
+      </p:sp>
+      <p:sp>
+        <p:nvSpPr>
+          <p:cNvPr id="104" name="Takeaway"/>
+          <p:cNvSpPr txBox="1"/>
+          <p:nvPr/>
+        </p:nvSpPr>
+        <p:spPr>
+          <a:xfrm>
+            <a:off x="762000" y="5410200"/>
+            <a:ext cx="10668000" cy="762000"/>
+          </a:xfrm>
+          <a:prstGeom prst="roundRect">
+            <a:avLst/>
+          </a:prstGeom>
+          <a:solidFill>
+            <a:srgbClr val="B1063A"/>
+          </a:solidFill>
+          <a:ln>
+            <a:noFill/>
+          </a:ln>
+        </p:spPr>
+        <p:txBody>
+          <a:bodyPr wrap="square" lIns="320040" tIns="320040" rIns="320040" bIns="320040" anchor="ctr"/>
+          <a:lstStyle/>
+          <a:p>
+            <a:pPr>
+              <a:buNone/>
+            </a:pPr>
+            <a:r>
+              <a:rPr lang="de-DE" sz="1600" b="1" dirty="0">
+                <a:solidFill>
+                  <a:srgbClr val="FFFFFF"/>
+                </a:solidFill>
+              </a:rPr>
+              <a:t>Das Model schreibt kein JSON-RPC – der Host übersetzt zwischen Model-Aufruf und Protokoll.</a:t>
+            </a:r>
+          </a:p>
+        </p:txBody>
+      </p:sp>
+      <p:pic>
+        <p:nvPicPr>
+          <p:cNvPr id="3" name="Picture 2">
+            <a:extLst>
+              <a:ext uri="{FF2B5EF4-FFF2-40B4-BE49-F238E27FC236}">
+                <a16:creationId xmlns:a16="http://schemas.microsoft.com/office/drawing/2014/main" id="{9D5BCC79-1601-4D50-7528-879C5F4A5A00}"/>
+              </a:ext>
+            </a:extLst>
+          </p:cNvPr>
+          <p:cNvPicPr>
+            <a:picLocks noChangeAspect="1"/>
+          </p:cNvPicPr>
+          <p:nvPr/>
+        </p:nvPicPr>
+        <p:blipFill>
+          <a:blip r:embed="rId2"/>
+          <a:stretch>
+            <a:fillRect/>
+          </a:stretch>
+        </p:blipFill>
+        <p:spPr>
+          <a:xfrm>
+            <a:off x="9489298" y="183584"/>
+            <a:ext cx="2592088" cy="776265"/>
+          </a:xfrm>
+          <a:prstGeom prst="rect">
+            <a:avLst/>
+          </a:prstGeom>
+        </p:spPr>
+      </p:pic>
+    </p:spTree>
+    <p:extLst>
+      <p:ext uri="{BB962C8B-B14F-4D97-AF65-F5344CB8AC3E}">
+        <p14:creationId xmlns:p14="http://schemas.microsoft.com/office/powerpoint/2010/main" val="4091958246"/>
+      </p:ext>
+    </p:extLst>
+  </p:cSld>
+  <p:clrMapOvr>
+    <a:masterClrMapping/>
+  </p:clrMapOvr>
+</p:sld>
+</file>
+
+<file path=ppt/slides/slide3.xml><?xml version="1.0" encoding="utf-8"?>
 <p:sld xmlns:a="http://schemas.openxmlformats.org/drawingml/2006/main" xmlns:r="http://schemas.openxmlformats.org/officeDocument/2006/relationships" xmlns:p="http://schemas.openxmlformats.org/presentationml/2006/main">
   <p:cSld>
     <p:spTree>
@@ -11642,6 +16570,36 @@
           </a:p>
         </p:txBody>
       </p:sp>
+      <p:pic>
+        <p:nvPicPr>
+          <p:cNvPr id="3" name="Picture 2">
+            <a:extLst>
+              <a:ext uri="{FF2B5EF4-FFF2-40B4-BE49-F238E27FC236}">
+                <a16:creationId xmlns:a16="http://schemas.microsoft.com/office/drawing/2014/main" id="{804CB703-5394-5360-A753-7E5DDD4191F0}"/>
+              </a:ext>
+            </a:extLst>
+          </p:cNvPr>
+          <p:cNvPicPr>
+            <a:picLocks noChangeAspect="1"/>
+          </p:cNvPicPr>
+          <p:nvPr/>
+        </p:nvPicPr>
+        <p:blipFill>
+          <a:blip r:embed="rId5"/>
+          <a:stretch>
+            <a:fillRect/>
+          </a:stretch>
+        </p:blipFill>
+        <p:spPr>
+          <a:xfrm>
+            <a:off x="9489298" y="183584"/>
+            <a:ext cx="2592088" cy="776265"/>
+          </a:xfrm>
+          <a:prstGeom prst="rect">
+            <a:avLst/>
+          </a:prstGeom>
+        </p:spPr>
+      </p:pic>
     </p:spTree>
     <p:extLst>
       <p:ext uri="{BB962C8B-B14F-4D97-AF65-F5344CB8AC3E}">
@@ -11655,1701 +16613,7 @@
 </p:sld>
 </file>
 
-<file path=ppt/slides/slide20.xml><?xml version="1.0" encoding="utf-8"?>
-<p:sld xmlns:a="http://schemas.openxmlformats.org/drawingml/2006/main" xmlns:r="http://schemas.openxmlformats.org/officeDocument/2006/relationships" xmlns:p="http://schemas.openxmlformats.org/presentationml/2006/main">
-  <p:cSld>
-    <p:spTree>
-      <p:nvGrpSpPr>
-        <p:cNvPr id="1" name=""/>
-        <p:cNvGrpSpPr/>
-        <p:nvPr/>
-      </p:nvGrpSpPr>
-      <p:grpSpPr>
-        <a:xfrm>
-          <a:off x="0" y="0"/>
-          <a:ext cx="0" cy="0"/>
-          <a:chOff x="0" y="0"/>
-          <a:chExt cx="0" cy="0"/>
-        </a:xfrm>
-      </p:grpSpPr>
-      <p:sp>
-        <p:nvSpPr>
-          <p:cNvPr id="2" name="Title 1">
-            <a:extLst>
-              <a:ext uri="{FF2B5EF4-FFF2-40B4-BE49-F238E27FC236}">
-                <a16:creationId xmlns:a16="http://schemas.microsoft.com/office/drawing/2014/main" id="{374D1413-8304-7BC4-157E-177B81D1E86A}"/>
-              </a:ext>
-            </a:extLst>
-          </p:cNvPr>
-          <p:cNvSpPr>
-            <a:spLocks noGrp="1"/>
-          </p:cNvSpPr>
-          <p:nvPr>
-            <p:ph type="title"/>
-          </p:nvPr>
-        </p:nvSpPr>
-        <p:spPr>
-          <a:xfrm>
-            <a:off x="762000" y="457200"/>
-            <a:ext cx="10668000" cy="711200"/>
-          </a:xfrm>
-        </p:spPr>
-        <p:txBody>
-          <a:bodyPr anchor="t" anchorCtr="0"/>
-          <a:lstStyle/>
-          <a:p>
-            <a:pPr algn="l">
-              <a:buNone/>
-            </a:pPr>
-            <a:r>
-              <a:rPr lang="en-US" sz="3000" b="1" dirty="0">
-                <a:solidFill>
-                  <a:srgbClr val="B1063A"/>
-                </a:solidFill>
-              </a:rPr>
-              <a:t>Backup · Was tatsächlich über die Leitung geht</a:t>
-            </a:r>
-          </a:p>
-        </p:txBody>
-      </p:sp>
-      <p:sp>
-        <p:nvSpPr>
-          <p:cNvPr id="100" name="Rule"/>
-          <p:cNvSpPr txBox="1"/>
-          <p:nvPr/>
-        </p:nvSpPr>
-        <p:spPr>
-          <a:xfrm>
-            <a:off x="762000" y="1244600"/>
-            <a:ext cx="762000" cy="38100"/>
-          </a:xfrm>
-          <a:prstGeom prst="rect">
-            <a:avLst/>
-          </a:prstGeom>
-          <a:solidFill>
-            <a:srgbClr val="B1063A"/>
-          </a:solidFill>
-          <a:ln>
-            <a:noFill/>
-          </a:ln>
-        </p:spPr>
-        <p:txBody>
-          <a:bodyPr wrap="square" lIns="91440" tIns="45720" rIns="91440" bIns="45720" anchor="t"/>
-          <a:lstStyle/>
-          <a:p>
-            <a:endParaRPr/>
-          </a:p>
-        </p:txBody>
-      </p:sp>
-      <p:sp>
-        <p:nvSpPr>
-          <p:cNvPr id="101" name="Lbl1"/>
-          <p:cNvSpPr txBox="1"/>
-          <p:nvPr/>
-        </p:nvSpPr>
-        <p:spPr>
-          <a:xfrm>
-            <a:off x="762000" y="1574800"/>
-            <a:ext cx="5207000" cy="304800"/>
-          </a:xfrm>
-          <a:prstGeom prst="rect">
-            <a:avLst/>
-          </a:prstGeom>
-          <a:noFill/>
-          <a:ln>
-            <a:noFill/>
-          </a:ln>
-        </p:spPr>
-        <p:txBody>
-          <a:bodyPr wrap="square" lIns="91440" tIns="45720" rIns="91440" bIns="45720" anchor="t"/>
-          <a:lstStyle/>
-          <a:p>
-            <a:pPr>
-              <a:buNone/>
-            </a:pPr>
-            <a:r>
-              <a:rPr lang="en-US" sz="1400" b="1" dirty="0">
-                <a:solidFill>
-                  <a:srgbClr val="6E6E6E"/>
-                </a:solidFill>
-              </a:rPr>
-              <a:t>1 · Discovery: </a:t>
-            </a:r>
-            <a:r>
-              <a:rPr lang="en-US" sz="1400" b="1" dirty="0">
-                <a:solidFill>
-                  <a:srgbClr val="B1063A"/>
-                </a:solidFill>
-                <a:latin typeface="Consolas"/>
-              </a:rPr>
-              <a:t>tools/list</a:t>
-            </a:r>
-          </a:p>
-        </p:txBody>
-      </p:sp>
-      <p:sp>
-        <p:nvSpPr>
-          <p:cNvPr id="102" name="Card1"/>
-          <p:cNvSpPr txBox="1"/>
-          <p:nvPr/>
-        </p:nvSpPr>
-        <p:spPr>
-          <a:xfrm>
-            <a:off x="762000" y="1905000"/>
-            <a:ext cx="5207000" cy="3175000"/>
-          </a:xfrm>
-          <a:prstGeom prst="roundRect">
-            <a:avLst/>
-          </a:prstGeom>
-          <a:solidFill>
-            <a:srgbClr val="2B2B2B"/>
-          </a:solidFill>
-          <a:ln>
-            <a:noFill/>
-          </a:ln>
-        </p:spPr>
-        <p:txBody>
-          <a:bodyPr wrap="square" lIns="91440" tIns="45720" rIns="91440" bIns="45720" anchor="t"/>
-          <a:lstStyle/>
-          <a:p>
-            <a:endParaRPr/>
-          </a:p>
-        </p:txBody>
-      </p:sp>
-      <p:sp>
-        <p:nvSpPr>
-          <p:cNvPr id="103" name="Code1"/>
-          <p:cNvSpPr txBox="1"/>
-          <p:nvPr/>
-        </p:nvSpPr>
-        <p:spPr>
-          <a:xfrm>
-            <a:off x="939800" y="2032000"/>
-            <a:ext cx="4902200" cy="2946400"/>
-          </a:xfrm>
-          <a:prstGeom prst="rect">
-            <a:avLst/>
-          </a:prstGeom>
-          <a:noFill/>
-          <a:ln>
-            <a:noFill/>
-          </a:ln>
-        </p:spPr>
-        <p:txBody>
-          <a:bodyPr wrap="square" lIns="0" tIns="45720" rIns="0" bIns="45720" anchor="t"/>
-          <a:lstStyle/>
-          <a:p>
-            <a:pPr>
-              <a:buNone/>
-            </a:pPr>
-            <a:r>
-              <a:rPr lang="en-US" sz="1200" dirty="0">
-                <a:solidFill>
-                  <a:srgbClr val="9A9A9A"/>
-                </a:solidFill>
-                <a:latin typeface="Consolas"/>
-              </a:rPr>
-              <a:t>// request</a:t>
-            </a:r>
-          </a:p>
-          <a:p>
-            <a:pPr>
-              <a:buNone/>
-            </a:pPr>
-            <a:r>
-              <a:rPr lang="en-US" sz="1200" dirty="0">
-                <a:solidFill>
-                  <a:srgbClr val="E8E8E8"/>
-                </a:solidFill>
-                <a:latin typeface="Consolas"/>
-              </a:rPr>
-              <a:t>{ </a:t>
-            </a:r>
-            <a:r>
-              <a:rPr lang="en-US" sz="1200" dirty="0">
-                <a:solidFill>
-                  <a:srgbClr val="8FB4E8"/>
-                </a:solidFill>
-                <a:latin typeface="Consolas"/>
-              </a:rPr>
-              <a:t>"method"</a:t>
-            </a:r>
-            <a:r>
-              <a:rPr lang="en-US" sz="1200" dirty="0">
-                <a:solidFill>
-                  <a:srgbClr val="E8E8E8"/>
-                </a:solidFill>
-                <a:latin typeface="Consolas"/>
-              </a:rPr>
-              <a:t>: </a:t>
-            </a:r>
-            <a:r>
-              <a:rPr lang="en-US" sz="1200" dirty="0">
-                <a:solidFill>
-                  <a:srgbClr val="F5D77A"/>
-                </a:solidFill>
-                <a:latin typeface="Consolas"/>
-              </a:rPr>
-              <a:t>"tools/list"</a:t>
-            </a:r>
-            <a:r>
-              <a:rPr lang="en-US" sz="1200" dirty="0">
-                <a:solidFill>
-                  <a:srgbClr val="E8E8E8"/>
-                </a:solidFill>
-                <a:latin typeface="Consolas"/>
-              </a:rPr>
-              <a:t> }</a:t>
-            </a:r>
-          </a:p>
-          <a:p>
-            <a:pPr>
-              <a:buNone/>
-            </a:pPr>
-            <a:r>
-              <a:rPr lang="en-US" sz="1200" dirty="0">
-                <a:solidFill>
-                  <a:srgbClr val="E8E8E8"/>
-                </a:solidFill>
-                <a:latin typeface="Consolas"/>
-              </a:rPr>
-              <a:t> </a:t>
-            </a:r>
-          </a:p>
-          <a:p>
-            <a:pPr>
-              <a:buNone/>
-            </a:pPr>
-            <a:r>
-              <a:rPr lang="en-US" sz="1200" dirty="0">
-                <a:solidFill>
-                  <a:srgbClr val="9A9A9A"/>
-                </a:solidFill>
-                <a:latin typeface="Consolas"/>
-              </a:rPr>
-              <a:t>// response</a:t>
-            </a:r>
-          </a:p>
-          <a:p>
-            <a:pPr>
-              <a:buNone/>
-            </a:pPr>
-            <a:r>
-              <a:rPr lang="en-US" sz="1200" dirty="0">
-                <a:solidFill>
-                  <a:srgbClr val="E8E8E8"/>
-                </a:solidFill>
-                <a:latin typeface="Consolas"/>
-              </a:rPr>
-              <a:t>{ </a:t>
-            </a:r>
-            <a:r>
-              <a:rPr lang="en-US" sz="1200" dirty="0">
-                <a:solidFill>
-                  <a:srgbClr val="8FB4E8"/>
-                </a:solidFill>
-                <a:latin typeface="Consolas"/>
-              </a:rPr>
-              <a:t>"tools"</a:t>
-            </a:r>
-            <a:r>
-              <a:rPr lang="en-US" sz="1200" dirty="0">
-                <a:solidFill>
-                  <a:srgbClr val="E8E8E8"/>
-                </a:solidFill>
-                <a:latin typeface="Consolas"/>
-              </a:rPr>
-              <a:t>: [ {</a:t>
-            </a:r>
-          </a:p>
-          <a:p>
-            <a:pPr>
-              <a:buNone/>
-            </a:pPr>
-            <a:r>
-              <a:rPr lang="en-US" sz="1200" dirty="0">
-                <a:solidFill>
-                  <a:srgbClr val="E8E8E8"/>
-                </a:solidFill>
-                <a:latin typeface="Consolas"/>
-              </a:rPr>
-              <a:t>    </a:t>
-            </a:r>
-            <a:r>
-              <a:rPr lang="en-US" sz="1200" dirty="0">
-                <a:solidFill>
-                  <a:srgbClr val="8FB4E8"/>
-                </a:solidFill>
-                <a:latin typeface="Consolas"/>
-              </a:rPr>
-              <a:t>"name"</a:t>
-            </a:r>
-            <a:r>
-              <a:rPr lang="en-US" sz="1200" dirty="0">
-                <a:solidFill>
-                  <a:srgbClr val="E8E8E8"/>
-                </a:solidFill>
-                <a:latin typeface="Consolas"/>
-              </a:rPr>
-              <a:t>: </a:t>
-            </a:r>
-            <a:r>
-              <a:rPr lang="en-US" sz="1200" dirty="0">
-                <a:solidFill>
-                  <a:srgbClr val="F5D77A"/>
-                </a:solidFill>
-                <a:latin typeface="Consolas"/>
-              </a:rPr>
-              <a:t>"get_forecast"</a:t>
-            </a:r>
-            <a:r>
-              <a:rPr lang="en-US" sz="1200" dirty="0">
-                <a:solidFill>
-                  <a:srgbClr val="E8E8E8"/>
-                </a:solidFill>
-                <a:latin typeface="Consolas"/>
-              </a:rPr>
-              <a:t>,</a:t>
-            </a:r>
-          </a:p>
-          <a:p>
-            <a:pPr>
-              <a:buNone/>
-            </a:pPr>
-            <a:r>
-              <a:rPr lang="en-US" sz="1200" dirty="0">
-                <a:solidFill>
-                  <a:srgbClr val="E8E8E8"/>
-                </a:solidFill>
-                <a:latin typeface="Consolas"/>
-              </a:rPr>
-              <a:t>    </a:t>
-            </a:r>
-            <a:r>
-              <a:rPr lang="en-US" sz="1200" dirty="0">
-                <a:solidFill>
-                  <a:srgbClr val="8FB4E8"/>
-                </a:solidFill>
-                <a:latin typeface="Consolas"/>
-              </a:rPr>
-              <a:t>"description"</a:t>
-            </a:r>
-            <a:r>
-              <a:rPr lang="en-US" sz="1200" dirty="0">
-                <a:solidFill>
-                  <a:srgbClr val="E8E8E8"/>
-                </a:solidFill>
-                <a:latin typeface="Consolas"/>
-              </a:rPr>
-              <a:t>: </a:t>
-            </a:r>
-            <a:r>
-              <a:rPr lang="en-US" sz="1200" dirty="0">
-                <a:solidFill>
-                  <a:srgbClr val="F5D77A"/>
-                </a:solidFill>
-                <a:latin typeface="Consolas"/>
-              </a:rPr>
-              <a:t>"Daily weather forecast</a:t>
-            </a:r>
-          </a:p>
-          <a:p>
-            <a:pPr>
-              <a:buNone/>
-            </a:pPr>
-            <a:r>
-              <a:rPr lang="en-US" sz="1200" dirty="0">
-                <a:solidFill>
-                  <a:srgbClr val="F5D77A"/>
-                </a:solidFill>
-                <a:latin typeface="Consolas"/>
-              </a:rPr>
-              <a:t>        for a city. Use for …"</a:t>
-            </a:r>
-            <a:r>
-              <a:rPr lang="en-US" sz="1200" dirty="0">
-                <a:solidFill>
-                  <a:srgbClr val="E8E8E8"/>
-                </a:solidFill>
-                <a:latin typeface="Consolas"/>
-              </a:rPr>
-              <a:t>,</a:t>
-            </a:r>
-          </a:p>
-          <a:p>
-            <a:pPr>
-              <a:buNone/>
-            </a:pPr>
-            <a:r>
-              <a:rPr lang="en-US" sz="1200" dirty="0">
-                <a:solidFill>
-                  <a:srgbClr val="E8E8E8"/>
-                </a:solidFill>
-                <a:latin typeface="Consolas"/>
-              </a:rPr>
-              <a:t>    </a:t>
-            </a:r>
-            <a:r>
-              <a:rPr lang="en-US" sz="1200" dirty="0">
-                <a:solidFill>
-                  <a:srgbClr val="8FB4E8"/>
-                </a:solidFill>
-                <a:latin typeface="Consolas"/>
-              </a:rPr>
-              <a:t>"inputSchema"</a:t>
-            </a:r>
-            <a:r>
-              <a:rPr lang="en-US" sz="1200" dirty="0">
-                <a:solidFill>
-                  <a:srgbClr val="E8E8E8"/>
-                </a:solidFill>
-                <a:latin typeface="Consolas"/>
-              </a:rPr>
-              <a:t>: { </a:t>
-            </a:r>
-            <a:r>
-              <a:rPr lang="en-US" sz="1200" dirty="0">
-                <a:solidFill>
-                  <a:srgbClr val="8FB4E8"/>
-                </a:solidFill>
-                <a:latin typeface="Consolas"/>
-              </a:rPr>
-              <a:t>"city"</a:t>
-            </a:r>
-            <a:r>
-              <a:rPr lang="en-US" sz="1200" dirty="0">
-                <a:solidFill>
-                  <a:srgbClr val="E8E8E8"/>
-                </a:solidFill>
-                <a:latin typeface="Consolas"/>
-              </a:rPr>
-              <a:t>: </a:t>
-            </a:r>
-            <a:r>
-              <a:rPr lang="en-US" sz="1200" dirty="0">
-                <a:solidFill>
-                  <a:srgbClr val="F5D77A"/>
-                </a:solidFill>
-                <a:latin typeface="Consolas"/>
-              </a:rPr>
-              <a:t>"string"</a:t>
-            </a:r>
-            <a:r>
-              <a:rPr lang="en-US" sz="1200" dirty="0">
-                <a:solidFill>
-                  <a:srgbClr val="E8E8E8"/>
-                </a:solidFill>
-                <a:latin typeface="Consolas"/>
-              </a:rPr>
-              <a:t>,</a:t>
-            </a:r>
-          </a:p>
-          <a:p>
-            <a:pPr>
-              <a:buNone/>
-            </a:pPr>
-            <a:r>
-              <a:rPr lang="en-US" sz="1200" dirty="0">
-                <a:solidFill>
-                  <a:srgbClr val="E8E8E8"/>
-                </a:solidFill>
-                <a:latin typeface="Consolas"/>
-              </a:rPr>
-              <a:t>                     </a:t>
-            </a:r>
-            <a:r>
-              <a:rPr lang="en-US" sz="1200" dirty="0">
-                <a:solidFill>
-                  <a:srgbClr val="8FB4E8"/>
-                </a:solidFill>
-                <a:latin typeface="Consolas"/>
-              </a:rPr>
-              <a:t>"date"</a:t>
-            </a:r>
-            <a:r>
-              <a:rPr lang="en-US" sz="1200" dirty="0">
-                <a:solidFill>
-                  <a:srgbClr val="E8E8E8"/>
-                </a:solidFill>
-                <a:latin typeface="Consolas"/>
-              </a:rPr>
-              <a:t>: </a:t>
-            </a:r>
-            <a:r>
-              <a:rPr lang="en-US" sz="1200" dirty="0">
-                <a:solidFill>
-                  <a:srgbClr val="F5D77A"/>
-                </a:solidFill>
-                <a:latin typeface="Consolas"/>
-              </a:rPr>
-              <a:t>"string"</a:t>
-            </a:r>
-            <a:r>
-              <a:rPr lang="en-US" sz="1200" dirty="0">
-                <a:solidFill>
-                  <a:srgbClr val="E8E8E8"/>
-                </a:solidFill>
-                <a:latin typeface="Consolas"/>
-              </a:rPr>
-              <a:t> }</a:t>
-            </a:r>
-          </a:p>
-          <a:p>
-            <a:pPr>
-              <a:buNone/>
-            </a:pPr>
-            <a:r>
-              <a:rPr lang="en-US" sz="1200" dirty="0">
-                <a:solidFill>
-                  <a:srgbClr val="E8E8E8"/>
-                </a:solidFill>
-                <a:latin typeface="Consolas"/>
-              </a:rPr>
-              <a:t>} ] }</a:t>
-            </a:r>
-          </a:p>
-        </p:txBody>
-      </p:sp>
-      <p:sp>
-        <p:nvSpPr>
-          <p:cNvPr id="104" name="Lbl2"/>
-          <p:cNvSpPr txBox="1"/>
-          <p:nvPr/>
-        </p:nvSpPr>
-        <p:spPr>
-          <a:xfrm>
-            <a:off x="6223000" y="1574800"/>
-            <a:ext cx="5207000" cy="304800"/>
-          </a:xfrm>
-          <a:prstGeom prst="rect">
-            <a:avLst/>
-          </a:prstGeom>
-          <a:noFill/>
-          <a:ln>
-            <a:noFill/>
-          </a:ln>
-        </p:spPr>
-        <p:txBody>
-          <a:bodyPr wrap="square" lIns="91440" tIns="45720" rIns="91440" bIns="45720" anchor="t"/>
-          <a:lstStyle/>
-          <a:p>
-            <a:pPr>
-              <a:buNone/>
-            </a:pPr>
-            <a:r>
-              <a:rPr lang="en-US" sz="1400" b="1" dirty="0">
-                <a:solidFill>
-                  <a:srgbClr val="6E6E6E"/>
-                </a:solidFill>
-              </a:rPr>
-              <a:t>2 · Ausführung: </a:t>
-            </a:r>
-            <a:r>
-              <a:rPr lang="en-US" sz="1400" b="1" dirty="0">
-                <a:solidFill>
-                  <a:srgbClr val="B1063A"/>
-                </a:solidFill>
-                <a:latin typeface="Consolas"/>
-              </a:rPr>
-              <a:t>tools/call</a:t>
-            </a:r>
-          </a:p>
-        </p:txBody>
-      </p:sp>
-      <p:sp>
-        <p:nvSpPr>
-          <p:cNvPr id="105" name="Card2"/>
-          <p:cNvSpPr txBox="1"/>
-          <p:nvPr/>
-        </p:nvSpPr>
-        <p:spPr>
-          <a:xfrm>
-            <a:off x="6223000" y="1905000"/>
-            <a:ext cx="5207000" cy="3175000"/>
-          </a:xfrm>
-          <a:prstGeom prst="roundRect">
-            <a:avLst/>
-          </a:prstGeom>
-          <a:solidFill>
-            <a:srgbClr val="2B2B2B"/>
-          </a:solidFill>
-          <a:ln>
-            <a:noFill/>
-          </a:ln>
-        </p:spPr>
-        <p:txBody>
-          <a:bodyPr wrap="square" lIns="91440" tIns="45720" rIns="91440" bIns="45720" anchor="t"/>
-          <a:lstStyle/>
-          <a:p>
-            <a:endParaRPr/>
-          </a:p>
-        </p:txBody>
-      </p:sp>
-      <p:sp>
-        <p:nvSpPr>
-          <p:cNvPr id="106" name="Code2"/>
-          <p:cNvSpPr txBox="1"/>
-          <p:nvPr/>
-        </p:nvSpPr>
-        <p:spPr>
-          <a:xfrm>
-            <a:off x="6400800" y="2032000"/>
-            <a:ext cx="4902200" cy="2946400"/>
-          </a:xfrm>
-          <a:prstGeom prst="rect">
-            <a:avLst/>
-          </a:prstGeom>
-          <a:noFill/>
-          <a:ln>
-            <a:noFill/>
-          </a:ln>
-        </p:spPr>
-        <p:txBody>
-          <a:bodyPr wrap="square" lIns="0" tIns="45720" rIns="0" bIns="45720" anchor="t"/>
-          <a:lstStyle/>
-          <a:p>
-            <a:pPr>
-              <a:buNone/>
-            </a:pPr>
-            <a:r>
-              <a:rPr lang="en-US" sz="1200" dirty="0">
-                <a:solidFill>
-                  <a:srgbClr val="9A9A9A"/>
-                </a:solidFill>
-                <a:latin typeface="Consolas"/>
-              </a:rPr>
-              <a:t>// request</a:t>
-            </a:r>
-          </a:p>
-          <a:p>
-            <a:pPr>
-              <a:buNone/>
-            </a:pPr>
-            <a:r>
-              <a:rPr lang="en-US" sz="1200" dirty="0">
-                <a:solidFill>
-                  <a:srgbClr val="E8E8E8"/>
-                </a:solidFill>
-                <a:latin typeface="Consolas"/>
-              </a:rPr>
-              <a:t>{ </a:t>
-            </a:r>
-            <a:r>
-              <a:rPr lang="en-US" sz="1200" dirty="0">
-                <a:solidFill>
-                  <a:srgbClr val="8FB4E8"/>
-                </a:solidFill>
-                <a:latin typeface="Consolas"/>
-              </a:rPr>
-              <a:t>"method"</a:t>
-            </a:r>
-            <a:r>
-              <a:rPr lang="en-US" sz="1200" dirty="0">
-                <a:solidFill>
-                  <a:srgbClr val="E8E8E8"/>
-                </a:solidFill>
-                <a:latin typeface="Consolas"/>
-              </a:rPr>
-              <a:t>: </a:t>
-            </a:r>
-            <a:r>
-              <a:rPr lang="en-US" sz="1200" dirty="0">
-                <a:solidFill>
-                  <a:srgbClr val="F5D77A"/>
-                </a:solidFill>
-                <a:latin typeface="Consolas"/>
-              </a:rPr>
-              <a:t>"tools/call"</a:t>
-            </a:r>
-            <a:r>
-              <a:rPr lang="en-US" sz="1200" dirty="0">
-                <a:solidFill>
-                  <a:srgbClr val="E8E8E8"/>
-                </a:solidFill>
-                <a:latin typeface="Consolas"/>
-              </a:rPr>
-              <a:t>,</a:t>
-            </a:r>
-          </a:p>
-          <a:p>
-            <a:pPr>
-              <a:buNone/>
-            </a:pPr>
-            <a:r>
-              <a:rPr lang="en-US" sz="1200" dirty="0">
-                <a:solidFill>
-                  <a:srgbClr val="E8E8E8"/>
-                </a:solidFill>
-                <a:latin typeface="Consolas"/>
-              </a:rPr>
-              <a:t>  </a:t>
-            </a:r>
-            <a:r>
-              <a:rPr lang="en-US" sz="1200" dirty="0">
-                <a:solidFill>
-                  <a:srgbClr val="8FB4E8"/>
-                </a:solidFill>
-                <a:latin typeface="Consolas"/>
-              </a:rPr>
-              <a:t>"params"</a:t>
-            </a:r>
-            <a:r>
-              <a:rPr lang="en-US" sz="1200" dirty="0">
-                <a:solidFill>
-                  <a:srgbClr val="E8E8E8"/>
-                </a:solidFill>
-                <a:latin typeface="Consolas"/>
-              </a:rPr>
-              <a:t>: { </a:t>
-            </a:r>
-            <a:r>
-              <a:rPr lang="en-US" sz="1200" dirty="0">
-                <a:solidFill>
-                  <a:srgbClr val="8FB4E8"/>
-                </a:solidFill>
-                <a:latin typeface="Consolas"/>
-              </a:rPr>
-              <a:t>"name"</a:t>
-            </a:r>
-            <a:r>
-              <a:rPr lang="en-US" sz="1200" dirty="0">
-                <a:solidFill>
-                  <a:srgbClr val="E8E8E8"/>
-                </a:solidFill>
-                <a:latin typeface="Consolas"/>
-              </a:rPr>
-              <a:t>: </a:t>
-            </a:r>
-            <a:r>
-              <a:rPr lang="en-US" sz="1200" dirty="0">
-                <a:solidFill>
-                  <a:srgbClr val="F5D77A"/>
-                </a:solidFill>
-                <a:latin typeface="Consolas"/>
-              </a:rPr>
-              <a:t>"get_forecast"</a:t>
-            </a:r>
-            <a:r>
-              <a:rPr lang="en-US" sz="1200" dirty="0">
-                <a:solidFill>
-                  <a:srgbClr val="E8E8E8"/>
-                </a:solidFill>
-                <a:latin typeface="Consolas"/>
-              </a:rPr>
-              <a:t>,</a:t>
-            </a:r>
-          </a:p>
-          <a:p>
-            <a:pPr>
-              <a:buNone/>
-            </a:pPr>
-            <a:r>
-              <a:rPr lang="en-US" sz="1200" dirty="0">
-                <a:solidFill>
-                  <a:srgbClr val="E8E8E8"/>
-                </a:solidFill>
-                <a:latin typeface="Consolas"/>
-              </a:rPr>
-              <a:t>              </a:t>
-            </a:r>
-            <a:r>
-              <a:rPr lang="en-US" sz="1200" dirty="0">
-                <a:solidFill>
-                  <a:srgbClr val="8FB4E8"/>
-                </a:solidFill>
-                <a:latin typeface="Consolas"/>
-              </a:rPr>
-              <a:t>"arguments"</a:t>
-            </a:r>
-            <a:r>
-              <a:rPr lang="en-US" sz="1200" dirty="0">
-                <a:solidFill>
-                  <a:srgbClr val="E8E8E8"/>
-                </a:solidFill>
-                <a:latin typeface="Consolas"/>
-              </a:rPr>
-              <a:t>: { </a:t>
-            </a:r>
-            <a:r>
-              <a:rPr lang="en-US" sz="1200" dirty="0">
-                <a:solidFill>
-                  <a:srgbClr val="8FB4E8"/>
-                </a:solidFill>
-                <a:latin typeface="Consolas"/>
-              </a:rPr>
-              <a:t>"city"</a:t>
-            </a:r>
-            <a:r>
-              <a:rPr lang="en-US" sz="1200" dirty="0">
-                <a:solidFill>
-                  <a:srgbClr val="E8E8E8"/>
-                </a:solidFill>
-                <a:latin typeface="Consolas"/>
-              </a:rPr>
-              <a:t>: </a:t>
-            </a:r>
-            <a:r>
-              <a:rPr lang="en-US" sz="1200" dirty="0">
-                <a:solidFill>
-                  <a:srgbClr val="F5D77A"/>
-                </a:solidFill>
-                <a:latin typeface="Consolas"/>
-              </a:rPr>
-              <a:t>"Berlin"</a:t>
-            </a:r>
-            <a:r>
-              <a:rPr lang="en-US" sz="1200" dirty="0">
-                <a:solidFill>
-                  <a:srgbClr val="E8E8E8"/>
-                </a:solidFill>
-                <a:latin typeface="Consolas"/>
-              </a:rPr>
-              <a:t>,</a:t>
-            </a:r>
-          </a:p>
-          <a:p>
-            <a:pPr>
-              <a:buNone/>
-            </a:pPr>
-            <a:r>
-              <a:rPr lang="en-US" sz="1200" dirty="0">
-                <a:solidFill>
-                  <a:srgbClr val="E8E8E8"/>
-                </a:solidFill>
-                <a:latin typeface="Consolas"/>
-              </a:rPr>
-              <a:t>                             </a:t>
-            </a:r>
-            <a:r>
-              <a:rPr lang="en-US" sz="1200" dirty="0">
-                <a:solidFill>
-                  <a:srgbClr val="8FB4E8"/>
-                </a:solidFill>
-                <a:latin typeface="Consolas"/>
-              </a:rPr>
-              <a:t>"date"</a:t>
-            </a:r>
-            <a:r>
-              <a:rPr lang="en-US" sz="1200" dirty="0">
-                <a:solidFill>
-                  <a:srgbClr val="E8E8E8"/>
-                </a:solidFill>
-                <a:latin typeface="Consolas"/>
-              </a:rPr>
-              <a:t>: </a:t>
-            </a:r>
-            <a:r>
-              <a:rPr lang="en-US" sz="1200" dirty="0">
-                <a:solidFill>
-                  <a:srgbClr val="F5D77A"/>
-                </a:solidFill>
-                <a:latin typeface="Consolas"/>
-              </a:rPr>
-              <a:t>"2026-09-05"</a:t>
-            </a:r>
-            <a:r>
-              <a:rPr lang="en-US" sz="1200" dirty="0">
-                <a:solidFill>
-                  <a:srgbClr val="E8E8E8"/>
-                </a:solidFill>
-                <a:latin typeface="Consolas"/>
-              </a:rPr>
-              <a:t> } } }</a:t>
-            </a:r>
-          </a:p>
-          <a:p>
-            <a:pPr>
-              <a:buNone/>
-            </a:pPr>
-            <a:r>
-              <a:rPr lang="en-US" sz="1200" dirty="0">
-                <a:solidFill>
-                  <a:srgbClr val="E8E8E8"/>
-                </a:solidFill>
-                <a:latin typeface="Consolas"/>
-              </a:rPr>
-              <a:t> </a:t>
-            </a:r>
-          </a:p>
-          <a:p>
-            <a:pPr>
-              <a:buNone/>
-            </a:pPr>
-            <a:r>
-              <a:rPr lang="en-US" sz="1200" dirty="0">
-                <a:solidFill>
-                  <a:srgbClr val="9A9A9A"/>
-                </a:solidFill>
-                <a:latin typeface="Consolas"/>
-              </a:rPr>
-              <a:t>// response</a:t>
-            </a:r>
-          </a:p>
-          <a:p>
-            <a:pPr>
-              <a:buNone/>
-            </a:pPr>
-            <a:r>
-              <a:rPr lang="en-US" sz="1200" dirty="0">
-                <a:solidFill>
-                  <a:srgbClr val="E8E8E8"/>
-                </a:solidFill>
-                <a:latin typeface="Consolas"/>
-              </a:rPr>
-              <a:t>{ </a:t>
-            </a:r>
-            <a:r>
-              <a:rPr lang="en-US" sz="1200" dirty="0">
-                <a:solidFill>
-                  <a:srgbClr val="8FB4E8"/>
-                </a:solidFill>
-                <a:latin typeface="Consolas"/>
-              </a:rPr>
-              <a:t>"content"</a:t>
-            </a:r>
-            <a:r>
-              <a:rPr lang="en-US" sz="1200" dirty="0">
-                <a:solidFill>
-                  <a:srgbClr val="E8E8E8"/>
-                </a:solidFill>
-                <a:latin typeface="Consolas"/>
-              </a:rPr>
-              <a:t>: [ { </a:t>
-            </a:r>
-            <a:r>
-              <a:rPr lang="en-US" sz="1200" dirty="0">
-                <a:solidFill>
-                  <a:srgbClr val="8FB4E8"/>
-                </a:solidFill>
-                <a:latin typeface="Consolas"/>
-              </a:rPr>
-              <a:t>"type"</a:t>
-            </a:r>
-            <a:r>
-              <a:rPr lang="en-US" sz="1200" dirty="0">
-                <a:solidFill>
-                  <a:srgbClr val="E8E8E8"/>
-                </a:solidFill>
-                <a:latin typeface="Consolas"/>
-              </a:rPr>
-              <a:t>: </a:t>
-            </a:r>
-            <a:r>
-              <a:rPr lang="en-US" sz="1200" dirty="0">
-                <a:solidFill>
-                  <a:srgbClr val="F5D77A"/>
-                </a:solidFill>
-                <a:latin typeface="Consolas"/>
-              </a:rPr>
-              <a:t>"text"</a:t>
-            </a:r>
-            <a:r>
-              <a:rPr lang="en-US" sz="1200" dirty="0">
-                <a:solidFill>
-                  <a:srgbClr val="E8E8E8"/>
-                </a:solidFill>
-                <a:latin typeface="Consolas"/>
-              </a:rPr>
-              <a:t>,</a:t>
-            </a:r>
-          </a:p>
-          <a:p>
-            <a:pPr>
-              <a:buNone/>
-            </a:pPr>
-            <a:r>
-              <a:rPr lang="en-US" sz="1200" dirty="0">
-                <a:solidFill>
-                  <a:srgbClr val="E8E8E8"/>
-                </a:solidFill>
-                <a:latin typeface="Consolas"/>
-              </a:rPr>
-              <a:t>    </a:t>
-            </a:r>
-            <a:r>
-              <a:rPr lang="en-US" sz="1200" dirty="0">
-                <a:solidFill>
-                  <a:srgbClr val="8FB4E8"/>
-                </a:solidFill>
-                <a:latin typeface="Consolas"/>
-              </a:rPr>
-              <a:t>"text"</a:t>
-            </a:r>
-            <a:r>
-              <a:rPr lang="en-US" sz="1200" dirty="0">
-                <a:solidFill>
-                  <a:srgbClr val="E8E8E8"/>
-                </a:solidFill>
-                <a:latin typeface="Consolas"/>
-              </a:rPr>
-              <a:t>: </a:t>
-            </a:r>
-            <a:r>
-              <a:rPr lang="en-US" sz="1200" dirty="0">
-                <a:solidFill>
-                  <a:srgbClr val="F5D77A"/>
-                </a:solidFill>
-                <a:latin typeface="Consolas"/>
-              </a:rPr>
-              <a:t>"Berlin, 5 Sept: 19 °C, light rain"</a:t>
-            </a:r>
-            <a:r>
-              <a:rPr lang="en-US" sz="1200" dirty="0">
-                <a:solidFill>
-                  <a:srgbClr val="E8E8E8"/>
-                </a:solidFill>
-                <a:latin typeface="Consolas"/>
-              </a:rPr>
-              <a:t> } ] }</a:t>
-            </a:r>
-          </a:p>
-        </p:txBody>
-      </p:sp>
-      <p:sp>
-        <p:nvSpPr>
-          <p:cNvPr id="107" name="Footer"/>
-          <p:cNvSpPr txBox="1"/>
-          <p:nvPr/>
-        </p:nvSpPr>
-        <p:spPr>
-          <a:xfrm>
-            <a:off x="762000" y="5308600"/>
-            <a:ext cx="10668000" cy="762000"/>
-          </a:xfrm>
-          <a:prstGeom prst="rect">
-            <a:avLst/>
-          </a:prstGeom>
-          <a:noFill/>
-          <a:ln>
-            <a:noFill/>
-          </a:ln>
-        </p:spPr>
-        <p:txBody>
-          <a:bodyPr wrap="square" lIns="91440" tIns="45720" rIns="91440" bIns="45720" anchor="t"/>
-          <a:lstStyle/>
-          <a:p>
-            <a:pPr>
-              <a:buNone/>
-            </a:pPr>
-            <a:r>
-              <a:rPr lang="en-US" sz="1600" b="1" dirty="0">
-                <a:solidFill>
-                  <a:srgbClr val="1A1A1A"/>
-                </a:solidFill>
-              </a:rPr>
-              <a:t>Reines JSON-RPC · Discovery zur Laufzeit · </a:t>
-            </a:r>
-            <a:r>
-              <a:rPr lang="en-US" sz="1600" b="1" dirty="0">
-                <a:solidFill>
-                  <a:srgbClr val="B1063A"/>
-                </a:solidFill>
-              </a:rPr>
-              <a:t>die Description ist ein Prompt.</a:t>
-            </a:r>
-          </a:p>
-          <a:p>
-            <a:pPr>
-              <a:spcBef>
-                <a:spcPts val="400"/>
-              </a:spcBef>
-              <a:buNone/>
-            </a:pPr>
-            <a:r>
-              <a:rPr lang="en-US" sz="1400" dirty="0">
-                <a:solidFill>
-                  <a:srgbClr val="3C3C3C"/>
-                </a:solidFill>
-              </a:rPr>
-              <a:t>inputSchema ist gewöhnliches JSON Schema. Der Host reicht Name, Description und Schema im nativen Function-Calling-Format an das Model weiter; das Model sieht MCP selbst nie.</a:t>
-            </a:r>
-          </a:p>
-        </p:txBody>
-      </p:sp>
-    </p:spTree>
-    <p:extLst>
-      <p:ext uri="{BB962C8B-B14F-4D97-AF65-F5344CB8AC3E}">
-        <p14:creationId xmlns:p14="http://schemas.microsoft.com/office/powerpoint/2010/main" val="2986761877"/>
-      </p:ext>
-    </p:extLst>
-  </p:cSld>
-  <p:clrMapOvr>
-    <a:masterClrMapping/>
-  </p:clrMapOvr>
-</p:sld>
-</file>
-
-<file path=ppt/slides/slide21.xml><?xml version="1.0" encoding="utf-8"?>
-<p:sld xmlns:a="http://schemas.openxmlformats.org/drawingml/2006/main" xmlns:r="http://schemas.openxmlformats.org/officeDocument/2006/relationships" xmlns:p="http://schemas.openxmlformats.org/presentationml/2006/main">
-  <p:cSld>
-    <p:spTree>
-      <p:nvGrpSpPr>
-        <p:cNvPr id="1" name=""/>
-        <p:cNvGrpSpPr/>
-        <p:nvPr/>
-      </p:nvGrpSpPr>
-      <p:grpSpPr>
-        <a:xfrm>
-          <a:off x="0" y="0"/>
-          <a:ext cx="0" cy="0"/>
-          <a:chOff x="0" y="0"/>
-          <a:chExt cx="0" cy="0"/>
-        </a:xfrm>
-      </p:grpSpPr>
-      <p:sp>
-        <p:nvSpPr>
-          <p:cNvPr id="2" name="Title 1">
-            <a:extLst>
-              <a:ext uri="{FF2B5EF4-FFF2-40B4-BE49-F238E27FC236}">
-                <a16:creationId xmlns:a16="http://schemas.microsoft.com/office/drawing/2014/main" id="{496DDC70-EDD3-97EB-D393-02E5ED3B2593}"/>
-              </a:ext>
-            </a:extLst>
-          </p:cNvPr>
-          <p:cNvSpPr>
-            <a:spLocks noGrp="1"/>
-          </p:cNvSpPr>
-          <p:nvPr>
-            <p:ph type="title"/>
-          </p:nvPr>
-        </p:nvSpPr>
-        <p:spPr>
-          <a:xfrm>
-            <a:off x="762000" y="457200"/>
-            <a:ext cx="10668000" cy="711200"/>
-          </a:xfrm>
-        </p:spPr>
-        <p:txBody>
-          <a:bodyPr anchor="t"/>
-          <a:lstStyle/>
-          <a:p>
-            <a:r>
-              <a:rPr lang="de-DE" sz="3000" b="1" dirty="0">
-                <a:solidFill>
-                  <a:srgbClr val="B1063A"/>
-                </a:solidFill>
-              </a:rPr>
-              <a:t>Backup </a:t>
-            </a:r>
-            <a:r>
-              <a:rPr lang="en-US" sz="3000" dirty="0">
-                <a:solidFill>
-                  <a:srgbClr val="B1063A"/>
-                </a:solidFill>
-              </a:rPr>
-              <a:t>· </a:t>
-            </a:r>
-            <a:r>
-              <a:rPr lang="de-DE" sz="3000" b="1" dirty="0">
-                <a:solidFill>
-                  <a:srgbClr val="B1063A"/>
-                </a:solidFill>
-              </a:rPr>
-              <a:t>Unter der Haube: MCP spricht JSON</a:t>
-            </a:r>
-          </a:p>
-        </p:txBody>
-      </p:sp>
-      <p:sp>
-        <p:nvSpPr>
-          <p:cNvPr id="100" name="Rule"/>
-          <p:cNvSpPr txBox="1"/>
-          <p:nvPr/>
-        </p:nvSpPr>
-        <p:spPr>
-          <a:xfrm>
-            <a:off x="762000" y="1244600"/>
-            <a:ext cx="762000" cy="38100"/>
-          </a:xfrm>
-          <a:prstGeom prst="rect">
-            <a:avLst/>
-          </a:prstGeom>
-          <a:solidFill>
-            <a:srgbClr val="B1063A"/>
-          </a:solidFill>
-          <a:ln>
-            <a:noFill/>
-          </a:ln>
-        </p:spPr>
-        <p:txBody>
-          <a:bodyPr wrap="square" lIns="91440" tIns="91440" rIns="91440" bIns="91440" anchor="t"/>
-          <a:lstStyle/>
-          <a:p>
-            <a:endParaRPr/>
-          </a:p>
-        </p:txBody>
-      </p:sp>
-      <p:sp>
-        <p:nvSpPr>
-          <p:cNvPr id="101" name="Intro"/>
-          <p:cNvSpPr txBox="1"/>
-          <p:nvPr/>
-        </p:nvSpPr>
-        <p:spPr>
-          <a:xfrm>
-            <a:off x="762000" y="1371600"/>
-            <a:ext cx="10668000" cy="381000"/>
-          </a:xfrm>
-          <a:prstGeom prst="rect">
-            <a:avLst/>
-          </a:prstGeom>
-          <a:noFill/>
-          <a:ln>
-            <a:noFill/>
-          </a:ln>
-        </p:spPr>
-        <p:txBody>
-          <a:bodyPr wrap="square" lIns="91440" tIns="91440" rIns="91440" bIns="91440" anchor="t"/>
-          <a:lstStyle/>
-          <a:p>
-            <a:pPr>
-              <a:buNone/>
-            </a:pPr>
-            <a:r>
-              <a:rPr lang="de-DE" sz="1600" dirty="0">
-                <a:solidFill>
-                  <a:srgbClr val="3C3C3C"/>
-                </a:solidFill>
-              </a:rPr>
-              <a:t>Jede Nachricht zwischen Client und Server ist ein </a:t>
-            </a:r>
-            <a:r>
-              <a:rPr lang="de-DE" sz="1600" b="1" dirty="0">
-                <a:solidFill>
-                  <a:srgbClr val="1A1A1A"/>
-                </a:solidFill>
-              </a:rPr>
-              <a:t>JSON-Objekt</a:t>
-            </a:r>
-            <a:r>
-              <a:rPr lang="de-DE" sz="1600" dirty="0">
-                <a:solidFill>
-                  <a:srgbClr val="3C3C3C"/>
-                </a:solidFill>
-              </a:rPr>
-              <a:t> (Standard: </a:t>
-            </a:r>
-            <a:r>
-              <a:rPr lang="de-DE" sz="1600" b="1" dirty="0">
-                <a:solidFill>
-                  <a:srgbClr val="1A1A1A"/>
-                </a:solidFill>
-              </a:rPr>
-              <a:t>JSON-RPC 2.0</a:t>
-            </a:r>
-            <a:r>
-              <a:rPr lang="de-DE" sz="1600" dirty="0">
-                <a:solidFill>
-                  <a:srgbClr val="3C3C3C"/>
-                </a:solidFill>
-              </a:rPr>
-              <a:t>).</a:t>
-            </a:r>
-          </a:p>
-        </p:txBody>
-      </p:sp>
-      <p:sp>
-        <p:nvSpPr>
-          <p:cNvPr id="102" name="Code"/>
-          <p:cNvSpPr txBox="1"/>
-          <p:nvPr/>
-        </p:nvSpPr>
-        <p:spPr>
-          <a:xfrm>
-            <a:off x="762000" y="1828800"/>
-            <a:ext cx="6934200" cy="3352800"/>
-          </a:xfrm>
-          <a:prstGeom prst="roundRect">
-            <a:avLst/>
-          </a:prstGeom>
-          <a:solidFill>
-            <a:srgbClr val="F4F4F4"/>
-          </a:solidFill>
-          <a:ln>
-            <a:noFill/>
-          </a:ln>
-        </p:spPr>
-        <p:txBody>
-          <a:bodyPr wrap="square" lIns="182880" tIns="182880" rIns="182880" bIns="182880" anchor="ctr"/>
-          <a:lstStyle/>
-          <a:p>
-            <a:pPr>
-              <a:lnSpc>
-                <a:spcPct val="100000"/>
-              </a:lnSpc>
-              <a:buNone/>
-            </a:pPr>
-            <a:r>
-              <a:rPr lang="de-DE" sz="1200" dirty="0">
-                <a:solidFill>
-                  <a:srgbClr val="1A1A1A"/>
-                </a:solidFill>
-                <a:latin typeface="Consolas"/>
-                <a:cs typeface="Consolas"/>
-              </a:rPr>
-              <a:t>→ { "method": "tools/list" }</a:t>
-            </a:r>
-            <a:r>
-              <a:rPr lang="de-DE" sz="1200" dirty="0">
-                <a:solidFill>
-                  <a:srgbClr val="6E6E6E"/>
-                </a:solidFill>
-                <a:latin typeface="Consolas"/>
-                <a:cs typeface="Consolas"/>
-              </a:rPr>
-              <a:t>   // Was kannst du?</a:t>
-            </a:r>
-          </a:p>
-          <a:p>
-            <a:pPr>
-              <a:lnSpc>
-                <a:spcPct val="100000"/>
-              </a:lnSpc>
-              <a:buNone/>
-            </a:pPr>
-            <a:r>
-              <a:rPr lang="de-DE" sz="1200" dirty="0">
-                <a:solidFill>
-                  <a:srgbClr val="1A1A1A"/>
-                </a:solidFill>
-                <a:latin typeface="Consolas"/>
-                <a:cs typeface="Consolas"/>
-              </a:rPr>
-              <a:t>← { "tools": [ { "name": "get_local_weather",</a:t>
-            </a:r>
-          </a:p>
-          <a:p>
-            <a:pPr>
-              <a:lnSpc>
-                <a:spcPct val="100000"/>
-              </a:lnSpc>
-              <a:buNone/>
-            </a:pPr>
-            <a:r>
-              <a:rPr lang="de-DE" sz="1200" dirty="0">
-                <a:solidFill>
-                  <a:srgbClr val="1A1A1A"/>
-                </a:solidFill>
-                <a:latin typeface="Consolas"/>
-                <a:cs typeface="Consolas"/>
-              </a:rPr>
-              <a:t>      "description": "Wettervorhersage für eine Stadt …",</a:t>
-            </a:r>
-          </a:p>
-          <a:p>
-            <a:pPr>
-              <a:lnSpc>
-                <a:spcPct val="100000"/>
-              </a:lnSpc>
-              <a:buNone/>
-            </a:pPr>
-            <a:r>
-              <a:rPr lang="de-DE" sz="1200" dirty="0">
-                <a:solidFill>
-                  <a:srgbClr val="1A1A1A"/>
-                </a:solidFill>
-                <a:latin typeface="Consolas"/>
-                <a:cs typeface="Consolas"/>
-              </a:rPr>
-              <a:t>      "inputSchema": { "city": "string", "date": "string" } } ] }</a:t>
-            </a:r>
-          </a:p>
-          <a:p>
-            <a:pPr>
-              <a:lnSpc>
-                <a:spcPct val="100000"/>
-              </a:lnSpc>
-              <a:buNone/>
-            </a:pPr>
-            <a:endParaRPr lang="de-DE" sz="1200"/>
-          </a:p>
-          <a:p>
-            <a:pPr>
-              <a:lnSpc>
-                <a:spcPct val="100000"/>
-              </a:lnSpc>
-              <a:buNone/>
-            </a:pPr>
-            <a:r>
-              <a:rPr lang="de-DE" sz="1200" dirty="0">
-                <a:solidFill>
-                  <a:srgbClr val="1A1A1A"/>
-                </a:solidFill>
-                <a:latin typeface="Consolas"/>
-                <a:cs typeface="Consolas"/>
-              </a:rPr>
-              <a:t>→ { "method": "tools/call",</a:t>
-            </a:r>
-            <a:r>
-              <a:rPr lang="de-DE" sz="1200" dirty="0">
-                <a:solidFill>
-                  <a:srgbClr val="6E6E6E"/>
-                </a:solidFill>
-                <a:latin typeface="Consolas"/>
-                <a:cs typeface="Consolas"/>
-              </a:rPr>
-              <a:t>   // Bitte ausführen</a:t>
-            </a:r>
-          </a:p>
-          <a:p>
-            <a:pPr>
-              <a:lnSpc>
-                <a:spcPct val="100000"/>
-              </a:lnSpc>
-              <a:buNone/>
-            </a:pPr>
-            <a:r>
-              <a:rPr lang="de-DE" sz="1200" dirty="0">
-                <a:solidFill>
-                  <a:srgbClr val="1A1A1A"/>
-                </a:solidFill>
-                <a:latin typeface="Consolas"/>
-                <a:cs typeface="Consolas"/>
-              </a:rPr>
-              <a:t>    "params": { "name": "get_local_weather",</a:t>
-            </a:r>
-          </a:p>
-          <a:p>
-            <a:pPr>
-              <a:lnSpc>
-                <a:spcPct val="100000"/>
-              </a:lnSpc>
-              <a:buNone/>
-            </a:pPr>
-            <a:r>
-              <a:rPr lang="de-DE" sz="1200" dirty="0">
-                <a:solidFill>
-                  <a:srgbClr val="1A1A1A"/>
-                </a:solidFill>
-                <a:latin typeface="Consolas"/>
-                <a:cs typeface="Consolas"/>
-              </a:rPr>
-              <a:t>      "arguments": { "city": "Berlin", "date": "2026-09-09" } } }</a:t>
-            </a:r>
-          </a:p>
-          <a:p>
-            <a:pPr>
-              <a:lnSpc>
-                <a:spcPct val="100000"/>
-              </a:lnSpc>
-              <a:buNone/>
-            </a:pPr>
-            <a:r>
-              <a:rPr lang="de-DE" sz="1200" dirty="0">
-                <a:solidFill>
-                  <a:srgbClr val="1A1A1A"/>
-                </a:solidFill>
-                <a:latin typeface="Consolas"/>
-                <a:cs typeface="Consolas"/>
-              </a:rPr>
-              <a:t>← { "content": [ { "type": "text",</a:t>
-            </a:r>
-          </a:p>
-          <a:p>
-            <a:pPr>
-              <a:lnSpc>
-                <a:spcPct val="100000"/>
-              </a:lnSpc>
-              <a:buNone/>
-            </a:pPr>
-            <a:r>
-              <a:rPr lang="de-DE" sz="1200" dirty="0">
-                <a:solidFill>
-                  <a:srgbClr val="1A1A1A"/>
-                </a:solidFill>
-                <a:latin typeface="Consolas"/>
-                <a:cs typeface="Consolas"/>
-              </a:rPr>
-              <a:t>      "text": "Berlin, 9. Sept: 19 °C, leichter Regen" } ] }</a:t>
-            </a:r>
-          </a:p>
-        </p:txBody>
-      </p:sp>
-      <p:sp>
-        <p:nvSpPr>
-          <p:cNvPr id="103" name="Bullets"/>
-          <p:cNvSpPr txBox="1"/>
-          <p:nvPr/>
-        </p:nvSpPr>
-        <p:spPr>
-          <a:xfrm>
-            <a:off x="7924800" y="1828800"/>
-            <a:ext cx="3505200" cy="3352800"/>
-          </a:xfrm>
-          <a:prstGeom prst="rect">
-            <a:avLst/>
-          </a:prstGeom>
-          <a:noFill/>
-          <a:ln>
-            <a:noFill/>
-          </a:ln>
-        </p:spPr>
-        <p:txBody>
-          <a:bodyPr wrap="square" lIns="0" tIns="0" rIns="0" bIns="0" anchor="ctr"/>
-          <a:lstStyle/>
-          <a:p>
-            <a:pPr marL="228600" indent="-228600">
-              <a:buClr>
-                <a:srgbClr val="B1063A"/>
-              </a:buClr>
-              <a:buFont typeface="Arial"/>
-              <a:buChar char="•"/>
-            </a:pPr>
-            <a:r>
-              <a:rPr lang="de-DE" sz="1500" b="1" dirty="0">
-                <a:solidFill>
-                  <a:srgbClr val="1A1A1A"/>
-                </a:solidFill>
-              </a:rPr>
-              <a:t>Sprachunabhängig</a:t>
-            </a:r>
-            <a:r>
-              <a:rPr lang="de-DE" sz="1500" dirty="0">
-                <a:solidFill>
-                  <a:srgbClr val="3C3C3C"/>
-                </a:solidFill>
-              </a:rPr>
-              <a:t> – jeder Client spricht mit jedem Server (Python, TypeScript, Go …)</a:t>
-            </a:r>
-          </a:p>
-          <a:p>
-            <a:pPr marL="228600" indent="-228600">
-              <a:spcBef>
-                <a:spcPts val="900"/>
-              </a:spcBef>
-              <a:buClr>
-                <a:srgbClr val="B1063A"/>
-              </a:buClr>
-              <a:buFont typeface="Arial"/>
-              <a:buChar char="•"/>
-            </a:pPr>
-            <a:r>
-              <a:rPr lang="de-DE" sz="1500" b="1" dirty="0">
-                <a:solidFill>
-                  <a:srgbClr val="1A1A1A"/>
-                </a:solidFill>
-              </a:rPr>
-              <a:t>Strukturiert &amp; prüfbar</a:t>
-            </a:r>
-            <a:r>
-              <a:rPr lang="de-DE" sz="1500" dirty="0">
-                <a:solidFill>
-                  <a:srgbClr val="3C3C3C"/>
-                </a:solidFill>
-              </a:rPr>
-              <a:t> – Parameter sind per JSON Schema typisiert, das Model erzeugt gültige Aufrufe</a:t>
-            </a:r>
-          </a:p>
-          <a:p>
-            <a:pPr marL="228600" indent="-228600">
-              <a:spcBef>
-                <a:spcPts val="900"/>
-              </a:spcBef>
-              <a:buClr>
-                <a:srgbClr val="B1063A"/>
-              </a:buClr>
-              <a:buFont typeface="Arial"/>
-              <a:buChar char="•"/>
-            </a:pPr>
-            <a:r>
-              <a:rPr lang="de-DE" sz="1500" b="1" dirty="0">
-                <a:solidFill>
-                  <a:srgbClr val="1A1A1A"/>
-                </a:solidFill>
-              </a:rPr>
-              <a:t>Passt zum Function Calling</a:t>
-            </a:r>
-            <a:r>
-              <a:rPr lang="de-DE" sz="1500" dirty="0">
-                <a:solidFill>
-                  <a:srgbClr val="3C3C3C"/>
-                </a:solidFill>
-              </a:rPr>
-              <a:t> – LLMs sprechen ohnehin JSON Schema, also 1:1-Abbildung</a:t>
-            </a:r>
-          </a:p>
-          <a:p>
-            <a:pPr marL="228600" indent="-228600">
-              <a:spcBef>
-                <a:spcPts val="900"/>
-              </a:spcBef>
-              <a:buClr>
-                <a:srgbClr val="B1063A"/>
-              </a:buClr>
-              <a:buFont typeface="Arial"/>
-              <a:buChar char="•"/>
-            </a:pPr>
-            <a:r>
-              <a:rPr lang="de-DE" sz="1500" b="1" dirty="0">
-                <a:solidFill>
-                  <a:srgbClr val="1A1A1A"/>
-                </a:solidFill>
-              </a:rPr>
-              <a:t>Menschenlesbar</a:t>
-            </a:r>
-            <a:r>
-              <a:rPr lang="de-DE" sz="1500" dirty="0">
-                <a:solidFill>
-                  <a:srgbClr val="3C3C3C"/>
-                </a:solidFill>
-              </a:rPr>
-              <a:t> – im MCP Inspector direkt nachvollziehbar</a:t>
-            </a:r>
-          </a:p>
-        </p:txBody>
-      </p:sp>
-      <p:sp>
-        <p:nvSpPr>
-          <p:cNvPr id="104" name="Takeaway"/>
-          <p:cNvSpPr txBox="1"/>
-          <p:nvPr/>
-        </p:nvSpPr>
-        <p:spPr>
-          <a:xfrm>
-            <a:off x="762000" y="5410200"/>
-            <a:ext cx="10668000" cy="762000"/>
-          </a:xfrm>
-          <a:prstGeom prst="roundRect">
-            <a:avLst/>
-          </a:prstGeom>
-          <a:solidFill>
-            <a:srgbClr val="B1063A"/>
-          </a:solidFill>
-          <a:ln>
-            <a:noFill/>
-          </a:ln>
-        </p:spPr>
-        <p:txBody>
-          <a:bodyPr wrap="square" lIns="320040" tIns="320040" rIns="320040" bIns="320040" anchor="ctr"/>
-          <a:lstStyle/>
-          <a:p>
-            <a:pPr>
-              <a:buNone/>
-            </a:pPr>
-            <a:r>
-              <a:rPr lang="de-DE" sz="1600" b="1" dirty="0">
-                <a:solidFill>
-                  <a:srgbClr val="FFFFFF"/>
-                </a:solidFill>
-              </a:rPr>
-              <a:t>Das Model schreibt kein JSON-RPC – der Host übersetzt zwischen Model-Aufruf und Protokoll.</a:t>
-            </a:r>
-          </a:p>
-        </p:txBody>
-      </p:sp>
-    </p:spTree>
-    <p:extLst>
-      <p:ext uri="{BB962C8B-B14F-4D97-AF65-F5344CB8AC3E}">
-        <p14:creationId xmlns:p14="http://schemas.microsoft.com/office/powerpoint/2010/main" val="4091958246"/>
-      </p:ext>
-    </p:extLst>
-  </p:cSld>
-  <p:clrMapOvr>
-    <a:masterClrMapping/>
-  </p:clrMapOvr>
-</p:sld>
-</file>
-
-<file path=ppt/slides/slide3.xml><?xml version="1.0" encoding="utf-8"?>
+<file path=ppt/slides/slide4.xml><?xml version="1.0" encoding="utf-8"?>
 <p:sld xmlns:a="http://schemas.openxmlformats.org/drawingml/2006/main" xmlns:r="http://schemas.openxmlformats.org/officeDocument/2006/relationships" xmlns:p="http://schemas.openxmlformats.org/presentationml/2006/main">
   <p:cSld>
     <p:spTree>
@@ -13477,6 +16741,36 @@
           </a:prstGeom>
         </p:spPr>
       </p:pic>
+      <p:pic>
+        <p:nvPicPr>
+          <p:cNvPr id="3" name="Picture 2">
+            <a:extLst>
+              <a:ext uri="{FF2B5EF4-FFF2-40B4-BE49-F238E27FC236}">
+                <a16:creationId xmlns:a16="http://schemas.microsoft.com/office/drawing/2014/main" id="{40B43A6E-87F2-143C-A157-FC784C670483}"/>
+              </a:ext>
+            </a:extLst>
+          </p:cNvPr>
+          <p:cNvPicPr>
+            <a:picLocks noChangeAspect="1"/>
+          </p:cNvPicPr>
+          <p:nvPr/>
+        </p:nvPicPr>
+        <p:blipFill>
+          <a:blip r:embed="rId4"/>
+          <a:stretch>
+            <a:fillRect/>
+          </a:stretch>
+        </p:blipFill>
+        <p:spPr>
+          <a:xfrm>
+            <a:off x="9489298" y="183584"/>
+            <a:ext cx="2592088" cy="776265"/>
+          </a:xfrm>
+          <a:prstGeom prst="rect">
+            <a:avLst/>
+          </a:prstGeom>
+        </p:spPr>
+      </p:pic>
     </p:spTree>
     <p:extLst>
       <p:ext uri="{BB962C8B-B14F-4D97-AF65-F5344CB8AC3E}">
@@ -13490,7 +16784,7 @@
 </p:sld>
 </file>
 
-<file path=ppt/slides/slide4.xml><?xml version="1.0" encoding="utf-8"?>
+<file path=ppt/slides/slide5.xml><?xml version="1.0" encoding="utf-8"?>
 <p:sld xmlns:a="http://schemas.openxmlformats.org/drawingml/2006/main" xmlns:r="http://schemas.openxmlformats.org/officeDocument/2006/relationships" xmlns:p="http://schemas.openxmlformats.org/presentationml/2006/main">
   <p:cSld>
     <p:spTree>
@@ -14396,6 +17690,36 @@
           </a:p>
         </p:txBody>
       </p:sp>
+      <p:pic>
+        <p:nvPicPr>
+          <p:cNvPr id="5" name="Picture 4">
+            <a:extLst>
+              <a:ext uri="{FF2B5EF4-FFF2-40B4-BE49-F238E27FC236}">
+                <a16:creationId xmlns:a16="http://schemas.microsoft.com/office/drawing/2014/main" id="{DA893C19-0ACC-262C-86E6-0E807D411AC2}"/>
+              </a:ext>
+            </a:extLst>
+          </p:cNvPr>
+          <p:cNvPicPr>
+            <a:picLocks noChangeAspect="1"/>
+          </p:cNvPicPr>
+          <p:nvPr/>
+        </p:nvPicPr>
+        <p:blipFill>
+          <a:blip r:embed="rId3"/>
+          <a:stretch>
+            <a:fillRect/>
+          </a:stretch>
+        </p:blipFill>
+        <p:spPr>
+          <a:xfrm>
+            <a:off x="9489298" y="183584"/>
+            <a:ext cx="2592088" cy="776265"/>
+          </a:xfrm>
+          <a:prstGeom prst="rect">
+            <a:avLst/>
+          </a:prstGeom>
+        </p:spPr>
+      </p:pic>
     </p:spTree>
     <p:extLst>
       <p:ext uri="{BB962C8B-B14F-4D97-AF65-F5344CB8AC3E}">
@@ -14409,7 +17733,7 @@
 </p:sld>
 </file>
 
-<file path=ppt/slides/slide5.xml><?xml version="1.0" encoding="utf-8"?>
+<file path=ppt/slides/slide6.xml><?xml version="1.0" encoding="utf-8"?>
 <p:sld xmlns:a="http://schemas.openxmlformats.org/drawingml/2006/main" xmlns:r="http://schemas.openxmlformats.org/officeDocument/2006/relationships" xmlns:p="http://schemas.openxmlformats.org/presentationml/2006/main">
   <p:cSld>
     <p:spTree>
@@ -14631,6 +17955,36 @@
           </a:p>
         </p:txBody>
       </p:sp>
+      <p:pic>
+        <p:nvPicPr>
+          <p:cNvPr id="6" name="Picture 5">
+            <a:extLst>
+              <a:ext uri="{FF2B5EF4-FFF2-40B4-BE49-F238E27FC236}">
+                <a16:creationId xmlns:a16="http://schemas.microsoft.com/office/drawing/2014/main" id="{C47C22D0-F242-50DB-C1CE-F78297EF0F3C}"/>
+              </a:ext>
+            </a:extLst>
+          </p:cNvPr>
+          <p:cNvPicPr>
+            <a:picLocks noChangeAspect="1"/>
+          </p:cNvPicPr>
+          <p:nvPr/>
+        </p:nvPicPr>
+        <p:blipFill>
+          <a:blip r:embed="rId4"/>
+          <a:stretch>
+            <a:fillRect/>
+          </a:stretch>
+        </p:blipFill>
+        <p:spPr>
+          <a:xfrm>
+            <a:off x="9489298" y="183584"/>
+            <a:ext cx="2592088" cy="776265"/>
+          </a:xfrm>
+          <a:prstGeom prst="rect">
+            <a:avLst/>
+          </a:prstGeom>
+        </p:spPr>
+      </p:pic>
     </p:spTree>
     <p:extLst>
       <p:ext uri="{BB962C8B-B14F-4D97-AF65-F5344CB8AC3E}">
@@ -14644,7 +17998,7 @@
 </p:sld>
 </file>
 
-<file path=ppt/slides/slide6.xml><?xml version="1.0" encoding="utf-8"?>
+<file path=ppt/slides/slide7.xml><?xml version="1.0" encoding="utf-8"?>
 <p:sld xmlns:a="http://schemas.openxmlformats.org/drawingml/2006/main" xmlns:r="http://schemas.openxmlformats.org/officeDocument/2006/relationships" xmlns:p="http://schemas.openxmlformats.org/presentationml/2006/main">
   <p:cSld>
     <p:spTree>
@@ -15347,6 +18701,36 @@
           </a:graphicData>
         </a:graphic>
       </p:graphicFrame>
+      <p:pic>
+        <p:nvPicPr>
+          <p:cNvPr id="3" name="Picture 2">
+            <a:extLst>
+              <a:ext uri="{FF2B5EF4-FFF2-40B4-BE49-F238E27FC236}">
+                <a16:creationId xmlns:a16="http://schemas.microsoft.com/office/drawing/2014/main" id="{40D64AA6-8F5B-24B9-E6DF-3D235A93BB27}"/>
+              </a:ext>
+            </a:extLst>
+          </p:cNvPr>
+          <p:cNvPicPr>
+            <a:picLocks noChangeAspect="1"/>
+          </p:cNvPicPr>
+          <p:nvPr/>
+        </p:nvPicPr>
+        <p:blipFill>
+          <a:blip r:embed="rId4"/>
+          <a:stretch>
+            <a:fillRect/>
+          </a:stretch>
+        </p:blipFill>
+        <p:spPr>
+          <a:xfrm>
+            <a:off x="9489298" y="183584"/>
+            <a:ext cx="2592088" cy="776265"/>
+          </a:xfrm>
+          <a:prstGeom prst="rect">
+            <a:avLst/>
+          </a:prstGeom>
+        </p:spPr>
+      </p:pic>
     </p:spTree>
     <p:extLst>
       <p:ext uri="{BB962C8B-B14F-4D97-AF65-F5344CB8AC3E}">
@@ -15360,7 +18744,7 @@
 </p:sld>
 </file>
 
-<file path=ppt/slides/slide7.xml><?xml version="1.0" encoding="utf-8"?>
+<file path=ppt/slides/slide8.xml><?xml version="1.0" encoding="utf-8"?>
 <p:sld xmlns:a="http://schemas.openxmlformats.org/drawingml/2006/main" xmlns:r="http://schemas.openxmlformats.org/officeDocument/2006/relationships" xmlns:p="http://schemas.openxmlformats.org/presentationml/2006/main">
   <p:cSld>
     <p:spTree>
@@ -15726,6 +19110,36 @@
           </a:p>
         </p:txBody>
       </p:sp>
+      <p:pic>
+        <p:nvPicPr>
+          <p:cNvPr id="3" name="Picture 2">
+            <a:extLst>
+              <a:ext uri="{FF2B5EF4-FFF2-40B4-BE49-F238E27FC236}">
+                <a16:creationId xmlns:a16="http://schemas.microsoft.com/office/drawing/2014/main" id="{5AE76008-0630-1450-3C9B-119B1F08667A}"/>
+              </a:ext>
+            </a:extLst>
+          </p:cNvPr>
+          <p:cNvPicPr>
+            <a:picLocks noChangeAspect="1"/>
+          </p:cNvPicPr>
+          <p:nvPr/>
+        </p:nvPicPr>
+        <p:blipFill>
+          <a:blip r:embed="rId3"/>
+          <a:stretch>
+            <a:fillRect/>
+          </a:stretch>
+        </p:blipFill>
+        <p:spPr>
+          <a:xfrm>
+            <a:off x="9489298" y="183584"/>
+            <a:ext cx="2592088" cy="776265"/>
+          </a:xfrm>
+          <a:prstGeom prst="rect">
+            <a:avLst/>
+          </a:prstGeom>
+        </p:spPr>
+      </p:pic>
     </p:spTree>
     <p:extLst>
       <p:ext uri="{BB962C8B-B14F-4D97-AF65-F5344CB8AC3E}">
@@ -15739,7 +19153,7 @@
 </p:sld>
 </file>
 
-<file path=ppt/slides/slide8.xml><?xml version="1.0" encoding="utf-8"?>
+<file path=ppt/slides/slide9.xml><?xml version="1.0" encoding="utf-8"?>
 <p:sld xmlns:a="http://schemas.openxmlformats.org/drawingml/2006/main" xmlns:r="http://schemas.openxmlformats.org/officeDocument/2006/relationships" xmlns:p="http://schemas.openxmlformats.org/presentationml/2006/main">
   <p:cSld>
     <p:spTree>
@@ -16888,959 +20302,40 @@
           </a:p>
         </p:txBody>
       </p:sp>
+      <p:pic>
+        <p:nvPicPr>
+          <p:cNvPr id="3" name="Picture 2">
+            <a:extLst>
+              <a:ext uri="{FF2B5EF4-FFF2-40B4-BE49-F238E27FC236}">
+                <a16:creationId xmlns:a16="http://schemas.microsoft.com/office/drawing/2014/main" id="{4C165D4A-6066-C1E7-07C7-A5E21E7CF87C}"/>
+              </a:ext>
+            </a:extLst>
+          </p:cNvPr>
+          <p:cNvPicPr>
+            <a:picLocks noChangeAspect="1"/>
+          </p:cNvPicPr>
+          <p:nvPr/>
+        </p:nvPicPr>
+        <p:blipFill>
+          <a:blip r:embed="rId3"/>
+          <a:stretch>
+            <a:fillRect/>
+          </a:stretch>
+        </p:blipFill>
+        <p:spPr>
+          <a:xfrm>
+            <a:off x="9489298" y="183584"/>
+            <a:ext cx="2592088" cy="776265"/>
+          </a:xfrm>
+          <a:prstGeom prst="rect">
+            <a:avLst/>
+          </a:prstGeom>
+        </p:spPr>
+      </p:pic>
     </p:spTree>
     <p:extLst>
       <p:ext uri="{BB962C8B-B14F-4D97-AF65-F5344CB8AC3E}">
         <p14:creationId xmlns:p14="http://schemas.microsoft.com/office/powerpoint/2010/main" val="2197017914"/>
-      </p:ext>
-    </p:extLst>
-  </p:cSld>
-  <p:clrMapOvr>
-    <a:masterClrMapping/>
-  </p:clrMapOvr>
-</p:sld>
-</file>
-
-<file path=ppt/slides/slide9.xml><?xml version="1.0" encoding="utf-8"?>
-<p:sld xmlns:a="http://schemas.openxmlformats.org/drawingml/2006/main" xmlns:r="http://schemas.openxmlformats.org/officeDocument/2006/relationships" xmlns:p="http://schemas.openxmlformats.org/presentationml/2006/main">
-  <p:cSld>
-    <p:spTree>
-      <p:nvGrpSpPr>
-        <p:cNvPr id="1" name=""/>
-        <p:cNvGrpSpPr/>
-        <p:nvPr/>
-      </p:nvGrpSpPr>
-      <p:grpSpPr>
-        <a:xfrm>
-          <a:off x="0" y="0"/>
-          <a:ext cx="0" cy="0"/>
-          <a:chOff x="0" y="0"/>
-          <a:chExt cx="0" cy="0"/>
-        </a:xfrm>
-      </p:grpSpPr>
-      <p:sp>
-        <p:nvSpPr>
-          <p:cNvPr id="2" name="Title 1">
-            <a:extLst>
-              <a:ext uri="{FF2B5EF4-FFF2-40B4-BE49-F238E27FC236}">
-                <a16:creationId xmlns:a16="http://schemas.microsoft.com/office/drawing/2014/main" id="{66EA4D95-D639-3157-E210-0CFF28D16A73}"/>
-              </a:ext>
-            </a:extLst>
-          </p:cNvPr>
-          <p:cNvSpPr>
-            <a:spLocks noGrp="1"/>
-          </p:cNvSpPr>
-          <p:nvPr>
-            <p:ph type="title"/>
-          </p:nvPr>
-        </p:nvSpPr>
-        <p:spPr>
-          <a:xfrm>
-            <a:off x="762000" y="457200"/>
-            <a:ext cx="10668000" cy="711200"/>
-          </a:xfrm>
-        </p:spPr>
-        <p:txBody>
-          <a:bodyPr anchor="t" anchorCtr="0"/>
-          <a:lstStyle/>
-          <a:p>
-            <a:pPr algn="l">
-              <a:buNone/>
-            </a:pPr>
-            <a:r>
-              <a:rPr lang="en-US" sz="3000" b="1" dirty="0">
-                <a:solidFill>
-                  <a:srgbClr val="B1063A"/>
-                </a:solidFill>
-              </a:rPr>
-              <a:t>Was </a:t>
-            </a:r>
-            <a:r>
-              <a:rPr lang="en-US" sz="3000" b="1" dirty="0" err="1">
-                <a:solidFill>
-                  <a:srgbClr val="B1063A"/>
-                </a:solidFill>
-              </a:rPr>
-              <a:t>kann</a:t>
-            </a:r>
-            <a:r>
-              <a:rPr lang="en-US" sz="3000" b="1" dirty="0">
-                <a:solidFill>
-                  <a:srgbClr val="B1063A"/>
-                </a:solidFill>
-              </a:rPr>
-              <a:t> </a:t>
-            </a:r>
-            <a:r>
-              <a:rPr lang="en-US" sz="3000" b="1" dirty="0" err="1">
-                <a:solidFill>
-                  <a:srgbClr val="B1063A"/>
-                </a:solidFill>
-              </a:rPr>
-              <a:t>passieren</a:t>
-            </a:r>
-            <a:r>
-              <a:rPr lang="en-US" sz="3000" b="1" dirty="0">
-                <a:solidFill>
-                  <a:srgbClr val="B1063A"/>
-                </a:solidFill>
-              </a:rPr>
-              <a:t>?</a:t>
-            </a:r>
-          </a:p>
-        </p:txBody>
-      </p:sp>
-      <p:sp>
-        <p:nvSpPr>
-          <p:cNvPr id="100" name="Rule"/>
-          <p:cNvSpPr txBox="1"/>
-          <p:nvPr/>
-        </p:nvSpPr>
-        <p:spPr>
-          <a:xfrm>
-            <a:off x="762000" y="1244600"/>
-            <a:ext cx="762000" cy="38100"/>
-          </a:xfrm>
-          <a:prstGeom prst="rect">
-            <a:avLst/>
-          </a:prstGeom>
-          <a:solidFill>
-            <a:srgbClr val="B1063A"/>
-          </a:solidFill>
-          <a:ln>
-            <a:noFill/>
-          </a:ln>
-        </p:spPr>
-        <p:txBody>
-          <a:bodyPr wrap="square" lIns="91440" tIns="45720" rIns="91440" bIns="45720" anchor="t"/>
-          <a:lstStyle/>
-          <a:p>
-            <a:endParaRPr/>
-          </a:p>
-        </p:txBody>
-      </p:sp>
-      <p:sp>
-        <p:nvSpPr>
-          <p:cNvPr id="101" name="Card0"/>
-          <p:cNvSpPr txBox="1"/>
-          <p:nvPr/>
-        </p:nvSpPr>
-        <p:spPr>
-          <a:xfrm>
-            <a:off x="762000" y="1651000"/>
-            <a:ext cx="10668000" cy="1041400"/>
-          </a:xfrm>
-          <a:prstGeom prst="roundRect">
-            <a:avLst/>
-          </a:prstGeom>
-          <a:solidFill>
-            <a:srgbClr val="F4F4F4"/>
-          </a:solidFill>
-          <a:ln>
-            <a:noFill/>
-          </a:ln>
-        </p:spPr>
-        <p:txBody>
-          <a:bodyPr wrap="square" lIns="91440" tIns="45720" rIns="91440" bIns="45720" anchor="t"/>
-          <a:lstStyle/>
-          <a:p>
-            <a:endParaRPr/>
-          </a:p>
-        </p:txBody>
-      </p:sp>
-      <p:sp>
-        <p:nvSpPr>
-          <p:cNvPr id="102" name="Bar0"/>
-          <p:cNvSpPr txBox="1"/>
-          <p:nvPr/>
-        </p:nvSpPr>
-        <p:spPr>
-          <a:xfrm>
-            <a:off x="762000" y="1651000"/>
-            <a:ext cx="101600" cy="1041400"/>
-          </a:xfrm>
-          <a:prstGeom prst="rect">
-            <a:avLst/>
-          </a:prstGeom>
-          <a:solidFill>
-            <a:srgbClr val="BFBFBF"/>
-          </a:solidFill>
-          <a:ln>
-            <a:noFill/>
-          </a:ln>
-        </p:spPr>
-        <p:txBody>
-          <a:bodyPr wrap="square" lIns="91440" tIns="45720" rIns="91440" bIns="45720" anchor="t"/>
-          <a:lstStyle/>
-          <a:p>
-            <a:endParaRPr/>
-          </a:p>
-        </p:txBody>
-      </p:sp>
-      <p:sp>
-        <p:nvSpPr>
-          <p:cNvPr id="103" name="Head0"/>
-          <p:cNvSpPr txBox="1"/>
-          <p:nvPr/>
-        </p:nvSpPr>
-        <p:spPr>
-          <a:xfrm>
-            <a:off x="1066800" y="1752600"/>
-            <a:ext cx="6604000" cy="304800"/>
-          </a:xfrm>
-          <a:prstGeom prst="rect">
-            <a:avLst/>
-          </a:prstGeom>
-          <a:noFill/>
-          <a:ln>
-            <a:noFill/>
-          </a:ln>
-        </p:spPr>
-        <p:txBody>
-          <a:bodyPr wrap="square" lIns="0" tIns="45720" rIns="0" bIns="45720" anchor="t"/>
-          <a:lstStyle/>
-          <a:p>
-            <a:pPr>
-              <a:buNone/>
-            </a:pPr>
-            <a:r>
-              <a:rPr lang="en-US" sz="1500" b="1" dirty="0">
-                <a:solidFill>
-                  <a:srgbClr val="1A1A1A"/>
-                </a:solidFill>
-              </a:rPr>
-              <a:t>Mai 2025 · GitHub MCP</a:t>
-            </a:r>
-            <a:r>
-              <a:rPr lang="en-US" sz="1300" i="1" dirty="0">
-                <a:solidFill>
-                  <a:srgbClr val="6E6E6E"/>
-                </a:solidFill>
-              </a:rPr>
-              <a:t>   demonstriert</a:t>
-            </a:r>
-          </a:p>
-        </p:txBody>
-      </p:sp>
-      <p:sp>
-        <p:nvSpPr>
-          <p:cNvPr id="104" name="Body0"/>
-          <p:cNvSpPr txBox="1"/>
-          <p:nvPr/>
-        </p:nvSpPr>
-        <p:spPr>
-          <a:xfrm>
-            <a:off x="1066800" y="2082800"/>
-            <a:ext cx="6604000" cy="558800"/>
-          </a:xfrm>
-          <a:prstGeom prst="rect">
-            <a:avLst/>
-          </a:prstGeom>
-          <a:noFill/>
-          <a:ln>
-            <a:noFill/>
-          </a:ln>
-        </p:spPr>
-        <p:txBody>
-          <a:bodyPr wrap="square" lIns="0" tIns="45720" rIns="0" bIns="45720" anchor="t"/>
-          <a:lstStyle/>
-          <a:p>
-            <a:pPr>
-              <a:buNone/>
-            </a:pPr>
-            <a:r>
-              <a:rPr lang="en-US" sz="1400" dirty="0">
-                <a:solidFill>
-                  <a:srgbClr val="3C3C3C"/>
-                </a:solidFill>
-              </a:rPr>
-              <a:t>Ein bösartiges öffentliches Issue bringt einen Agent dazu, Daten aus einem privaten Repo in einen öffentlichen Pull Request zu kopieren.</a:t>
-            </a:r>
-          </a:p>
-        </p:txBody>
-      </p:sp>
-      <p:sp>
-        <p:nvSpPr>
-          <p:cNvPr id="105" name="Tag0"/>
-          <p:cNvSpPr txBox="1"/>
-          <p:nvPr/>
-        </p:nvSpPr>
-        <p:spPr>
-          <a:xfrm>
-            <a:off x="8001000" y="1803400"/>
-            <a:ext cx="3251200" cy="736600"/>
-          </a:xfrm>
-          <a:prstGeom prst="rect">
-            <a:avLst/>
-          </a:prstGeom>
-          <a:noFill/>
-          <a:ln>
-            <a:noFill/>
-          </a:ln>
-        </p:spPr>
-        <p:txBody>
-          <a:bodyPr wrap="square" lIns="0" tIns="45720" rIns="0" bIns="45720" anchor="ctr"/>
-          <a:lstStyle/>
-          <a:p>
-            <a:pPr>
-              <a:buNone/>
-            </a:pPr>
-            <a:r>
-              <a:rPr lang="en-US" sz="1400" b="1" dirty="0">
-                <a:solidFill>
-                  <a:srgbClr val="B1063A"/>
-                </a:solidFill>
-              </a:rPr>
-              <a:t>Prompt Injection + zu weit gefasstes Token</a:t>
-            </a:r>
-          </a:p>
-          <a:p>
-            <a:pPr>
-              <a:buNone/>
-            </a:pPr>
-            <a:r>
-              <a:rPr lang="en-US" sz="1200" dirty="0">
-                <a:solidFill>
-                  <a:srgbClr val="6E6E6E"/>
-                </a:solidFill>
-              </a:rPr>
-              <a:t>Quelle: Invariant Labs</a:t>
-            </a:r>
-          </a:p>
-          <a:p>
-            <a:pPr>
-              <a:buNone/>
-            </a:pPr>
-            <a:r>
-              <a:rPr lang="en-US" sz="1000" dirty="0">
-                <a:solidFill>
-                  <a:srgbClr val="6E6E6E"/>
-                </a:solidFill>
-              </a:rPr>
-              <a:t>https://</a:t>
-            </a:r>
-            <a:r>
-              <a:rPr lang="en-US" sz="1000" dirty="0" err="1">
-                <a:solidFill>
-                  <a:srgbClr val="6E6E6E"/>
-                </a:solidFill>
-              </a:rPr>
-              <a:t>invariantlabs.ai</a:t>
-            </a:r>
-            <a:r>
-              <a:rPr lang="en-US" sz="1000" dirty="0">
-                <a:solidFill>
-                  <a:srgbClr val="6E6E6E"/>
-                </a:solidFill>
-              </a:rPr>
-              <a:t>/blog/</a:t>
-            </a:r>
-            <a:r>
-              <a:rPr lang="en-US" sz="1000" dirty="0" err="1">
-                <a:solidFill>
-                  <a:srgbClr val="6E6E6E"/>
-                </a:solidFill>
-              </a:rPr>
-              <a:t>mcp</a:t>
-            </a:r>
-            <a:r>
-              <a:rPr lang="en-US" sz="1000" dirty="0">
-                <a:solidFill>
-                  <a:srgbClr val="6E6E6E"/>
-                </a:solidFill>
-              </a:rPr>
-              <a:t>-</a:t>
-            </a:r>
-            <a:r>
-              <a:rPr lang="en-US" sz="1000" dirty="0" err="1">
-                <a:solidFill>
-                  <a:srgbClr val="6E6E6E"/>
-                </a:solidFill>
-              </a:rPr>
-              <a:t>github</a:t>
-            </a:r>
-            <a:r>
-              <a:rPr lang="en-US" sz="1000" dirty="0">
-                <a:solidFill>
-                  <a:srgbClr val="6E6E6E"/>
-                </a:solidFill>
-              </a:rPr>
-              <a:t>-vulnerability</a:t>
-            </a:r>
-          </a:p>
-        </p:txBody>
-      </p:sp>
-      <p:sp>
-        <p:nvSpPr>
-          <p:cNvPr id="106" name="Card1"/>
-          <p:cNvSpPr txBox="1"/>
-          <p:nvPr/>
-        </p:nvSpPr>
-        <p:spPr>
-          <a:xfrm>
-            <a:off x="762000" y="2819400"/>
-            <a:ext cx="10668000" cy="1041400"/>
-          </a:xfrm>
-          <a:prstGeom prst="roundRect">
-            <a:avLst/>
-          </a:prstGeom>
-          <a:solidFill>
-            <a:srgbClr val="F4F4F4"/>
-          </a:solidFill>
-          <a:ln>
-            <a:noFill/>
-          </a:ln>
-        </p:spPr>
-        <p:txBody>
-          <a:bodyPr wrap="square" lIns="91440" tIns="45720" rIns="91440" bIns="45720" anchor="t"/>
-          <a:lstStyle/>
-          <a:p>
-            <a:endParaRPr/>
-          </a:p>
-        </p:txBody>
-      </p:sp>
-      <p:sp>
-        <p:nvSpPr>
-          <p:cNvPr id="107" name="Bar1"/>
-          <p:cNvSpPr txBox="1"/>
-          <p:nvPr/>
-        </p:nvSpPr>
-        <p:spPr>
-          <a:xfrm>
-            <a:off x="762000" y="2819400"/>
-            <a:ext cx="101600" cy="1041400"/>
-          </a:xfrm>
-          <a:prstGeom prst="rect">
-            <a:avLst/>
-          </a:prstGeom>
-          <a:solidFill>
-            <a:srgbClr val="B1063A"/>
-          </a:solidFill>
-          <a:ln>
-            <a:noFill/>
-          </a:ln>
-        </p:spPr>
-        <p:txBody>
-          <a:bodyPr wrap="square" lIns="91440" tIns="45720" rIns="91440" bIns="45720" anchor="t"/>
-          <a:lstStyle/>
-          <a:p>
-            <a:endParaRPr/>
-          </a:p>
-        </p:txBody>
-      </p:sp>
-      <p:sp>
-        <p:nvSpPr>
-          <p:cNvPr id="108" name="Head1"/>
-          <p:cNvSpPr txBox="1"/>
-          <p:nvPr/>
-        </p:nvSpPr>
-        <p:spPr>
-          <a:xfrm>
-            <a:off x="1066800" y="2921000"/>
-            <a:ext cx="6604000" cy="304800"/>
-          </a:xfrm>
-          <a:prstGeom prst="rect">
-            <a:avLst/>
-          </a:prstGeom>
-          <a:noFill/>
-          <a:ln>
-            <a:noFill/>
-          </a:ln>
-        </p:spPr>
-        <p:txBody>
-          <a:bodyPr wrap="square" lIns="0" tIns="45720" rIns="0" bIns="45720" anchor="t"/>
-          <a:lstStyle/>
-          <a:p>
-            <a:pPr>
-              <a:buNone/>
-            </a:pPr>
-            <a:r>
-              <a:rPr lang="en-US" sz="1500" b="1" dirty="0">
-                <a:solidFill>
-                  <a:srgbClr val="1A1A1A"/>
-                </a:solidFill>
-              </a:rPr>
-              <a:t>Sep. 2025 · postmark-mcp</a:t>
-            </a:r>
-            <a:r>
-              <a:rPr lang="en-US" sz="1300" i="1" dirty="0">
-                <a:solidFill>
-                  <a:srgbClr val="B1063A"/>
-                </a:solidFill>
-              </a:rPr>
-              <a:t>   in der Praxis</a:t>
-            </a:r>
-          </a:p>
-        </p:txBody>
-      </p:sp>
-      <p:sp>
-        <p:nvSpPr>
-          <p:cNvPr id="109" name="Body1"/>
-          <p:cNvSpPr txBox="1"/>
-          <p:nvPr/>
-        </p:nvSpPr>
-        <p:spPr>
-          <a:xfrm>
-            <a:off x="1066800" y="3251200"/>
-            <a:ext cx="6604000" cy="558800"/>
-          </a:xfrm>
-          <a:prstGeom prst="rect">
-            <a:avLst/>
-          </a:prstGeom>
-          <a:noFill/>
-          <a:ln>
-            <a:noFill/>
-          </a:ln>
-        </p:spPr>
-        <p:txBody>
-          <a:bodyPr wrap="square" lIns="0" tIns="45720" rIns="0" bIns="45720" anchor="t"/>
-          <a:lstStyle/>
-          <a:p>
-            <a:pPr>
-              <a:buNone/>
-            </a:pPr>
-            <a:r>
-              <a:rPr lang="en-US" sz="1400" dirty="0">
-                <a:solidFill>
-                  <a:srgbClr val="3C3C3C"/>
-                </a:solidFill>
-              </a:rPr>
-              <a:t>Ein gefälschter E-Mail-Server verhält sich monatelang unauffällig, dann schickt er still jede E-Mail per BCC an </a:t>
-            </a:r>
-            <a:r>
-              <a:rPr lang="en-US" sz="1400" dirty="0" err="1">
-                <a:solidFill>
-                  <a:srgbClr val="3C3C3C"/>
-                </a:solidFill>
-              </a:rPr>
-              <a:t>eine</a:t>
-            </a:r>
-            <a:r>
-              <a:rPr lang="en-US" sz="1400" dirty="0">
-                <a:solidFill>
-                  <a:srgbClr val="3C3C3C"/>
-                </a:solidFill>
-              </a:rPr>
-              <a:t> externe </a:t>
-            </a:r>
-            <a:r>
-              <a:rPr lang="en-US" sz="1400" dirty="0" err="1">
-                <a:solidFill>
-                  <a:srgbClr val="3C3C3C"/>
-                </a:solidFill>
-              </a:rPr>
-              <a:t>Adresse</a:t>
-            </a:r>
-            <a:r>
-              <a:rPr lang="en-US" sz="1400" dirty="0">
-                <a:solidFill>
-                  <a:srgbClr val="3C3C3C"/>
-                </a:solidFill>
-              </a:rPr>
-              <a:t>.</a:t>
-            </a:r>
-          </a:p>
-        </p:txBody>
-      </p:sp>
-      <p:sp>
-        <p:nvSpPr>
-          <p:cNvPr id="110" name="Tag1"/>
-          <p:cNvSpPr txBox="1"/>
-          <p:nvPr/>
-        </p:nvSpPr>
-        <p:spPr>
-          <a:xfrm>
-            <a:off x="8001000" y="2971800"/>
-            <a:ext cx="3251200" cy="736600"/>
-          </a:xfrm>
-          <a:prstGeom prst="rect">
-            <a:avLst/>
-          </a:prstGeom>
-          <a:noFill/>
-          <a:ln>
-            <a:noFill/>
-          </a:ln>
-        </p:spPr>
-        <p:txBody>
-          <a:bodyPr wrap="square" lIns="0" tIns="45720" rIns="0" bIns="45720" anchor="ctr"/>
-          <a:lstStyle/>
-          <a:p>
-            <a:pPr>
-              <a:buNone/>
-            </a:pPr>
-            <a:r>
-              <a:rPr lang="en-US" sz="1400" b="1" dirty="0">
-                <a:solidFill>
-                  <a:srgbClr val="B1063A"/>
-                </a:solidFill>
-              </a:rPr>
-              <a:t>Supply Chain</a:t>
-            </a:r>
-          </a:p>
-          <a:p>
-            <a:pPr>
-              <a:buNone/>
-            </a:pPr>
-            <a:r>
-              <a:rPr lang="en-US" sz="1200" dirty="0">
-                <a:solidFill>
-                  <a:srgbClr val="6E6E6E"/>
-                </a:solidFill>
-              </a:rPr>
-              <a:t>Quelle: Koi Security</a:t>
-            </a:r>
-          </a:p>
-          <a:p>
-            <a:r>
-              <a:rPr lang="en-US" sz="1000" dirty="0">
-                <a:solidFill>
-                  <a:schemeClr val="accent6"/>
-                </a:solidFill>
-              </a:rPr>
-              <a:t>https://</a:t>
-            </a:r>
-            <a:r>
-              <a:rPr lang="en-US" sz="1000" dirty="0" err="1">
-                <a:solidFill>
-                  <a:schemeClr val="accent6"/>
-                </a:solidFill>
-              </a:rPr>
-              <a:t>thehackernews.com</a:t>
-            </a:r>
-            <a:r>
-              <a:rPr lang="en-US" sz="1000" dirty="0">
-                <a:solidFill>
-                  <a:schemeClr val="accent6"/>
-                </a:solidFill>
-              </a:rPr>
-              <a:t>/2025/09/first-malicious-</a:t>
-            </a:r>
-            <a:r>
-              <a:rPr lang="en-US" sz="1000" dirty="0" err="1">
-                <a:solidFill>
-                  <a:schemeClr val="accent6"/>
-                </a:solidFill>
-              </a:rPr>
-              <a:t>mcp</a:t>
-            </a:r>
-            <a:r>
-              <a:rPr lang="en-US" sz="1000" dirty="0">
-                <a:solidFill>
-                  <a:schemeClr val="accent6"/>
-                </a:solidFill>
-              </a:rPr>
-              <a:t>-server-</a:t>
-            </a:r>
-            <a:r>
-              <a:rPr lang="en-US" sz="1000" dirty="0" err="1">
-                <a:solidFill>
-                  <a:schemeClr val="accent6"/>
-                </a:solidFill>
-              </a:rPr>
-              <a:t>found.html</a:t>
-            </a:r>
-            <a:endParaRPr lang="en-US" sz="1000" dirty="0">
-              <a:solidFill>
-                <a:schemeClr val="accent6"/>
-              </a:solidFill>
-            </a:endParaRPr>
-          </a:p>
-          <a:p>
-            <a:pPr>
-              <a:buNone/>
-            </a:pPr>
-            <a:endParaRPr lang="en-US" sz="1200" dirty="0">
-              <a:solidFill>
-                <a:srgbClr val="6E6E6E"/>
-              </a:solidFill>
-            </a:endParaRPr>
-          </a:p>
-        </p:txBody>
-      </p:sp>
-      <p:sp>
-        <p:nvSpPr>
-          <p:cNvPr id="111" name="Card2"/>
-          <p:cNvSpPr txBox="1"/>
-          <p:nvPr/>
-        </p:nvSpPr>
-        <p:spPr>
-          <a:xfrm>
-            <a:off x="762000" y="3987800"/>
-            <a:ext cx="10668000" cy="1041400"/>
-          </a:xfrm>
-          <a:prstGeom prst="roundRect">
-            <a:avLst/>
-          </a:prstGeom>
-          <a:solidFill>
-            <a:srgbClr val="F4F4F4"/>
-          </a:solidFill>
-          <a:ln>
-            <a:noFill/>
-          </a:ln>
-        </p:spPr>
-        <p:txBody>
-          <a:bodyPr wrap="square" lIns="91440" tIns="45720" rIns="91440" bIns="45720" anchor="t"/>
-          <a:lstStyle/>
-          <a:p>
-            <a:endParaRPr/>
-          </a:p>
-        </p:txBody>
-      </p:sp>
-      <p:sp>
-        <p:nvSpPr>
-          <p:cNvPr id="112" name="Bar2"/>
-          <p:cNvSpPr txBox="1"/>
-          <p:nvPr/>
-        </p:nvSpPr>
-        <p:spPr>
-          <a:xfrm>
-            <a:off x="762000" y="3987800"/>
-            <a:ext cx="101600" cy="1041400"/>
-          </a:xfrm>
-          <a:prstGeom prst="rect">
-            <a:avLst/>
-          </a:prstGeom>
-          <a:solidFill>
-            <a:srgbClr val="B1063A"/>
-          </a:solidFill>
-          <a:ln>
-            <a:noFill/>
-          </a:ln>
-        </p:spPr>
-        <p:txBody>
-          <a:bodyPr wrap="square" lIns="91440" tIns="45720" rIns="91440" bIns="45720" anchor="t"/>
-          <a:lstStyle/>
-          <a:p>
-            <a:endParaRPr/>
-          </a:p>
-        </p:txBody>
-      </p:sp>
-      <p:sp>
-        <p:nvSpPr>
-          <p:cNvPr id="113" name="Head2"/>
-          <p:cNvSpPr txBox="1"/>
-          <p:nvPr/>
-        </p:nvSpPr>
-        <p:spPr>
-          <a:xfrm>
-            <a:off x="1066800" y="4089400"/>
-            <a:ext cx="6604000" cy="304800"/>
-          </a:xfrm>
-          <a:prstGeom prst="rect">
-            <a:avLst/>
-          </a:prstGeom>
-          <a:noFill/>
-          <a:ln>
-            <a:noFill/>
-          </a:ln>
-        </p:spPr>
-        <p:txBody>
-          <a:bodyPr wrap="square" lIns="0" tIns="45720" rIns="0" bIns="45720" anchor="t"/>
-          <a:lstStyle/>
-          <a:p>
-            <a:pPr>
-              <a:buNone/>
-            </a:pPr>
-            <a:r>
-              <a:rPr lang="en-US" sz="1500" b="1" dirty="0">
-                <a:solidFill>
-                  <a:srgbClr val="1A1A1A"/>
-                </a:solidFill>
-              </a:rPr>
-              <a:t>2025 · MCPoison · CVE-2025-54136</a:t>
-            </a:r>
-            <a:r>
-              <a:rPr lang="en-US" sz="1300" i="1" dirty="0">
-                <a:solidFill>
-                  <a:srgbClr val="B1063A"/>
-                </a:solidFill>
-              </a:rPr>
-              <a:t>   in der Praxis</a:t>
-            </a:r>
-          </a:p>
-        </p:txBody>
-      </p:sp>
-      <p:sp>
-        <p:nvSpPr>
-          <p:cNvPr id="114" name="Body2"/>
-          <p:cNvSpPr txBox="1"/>
-          <p:nvPr/>
-        </p:nvSpPr>
-        <p:spPr>
-          <a:xfrm>
-            <a:off x="1066800" y="4419600"/>
-            <a:ext cx="6604000" cy="558800"/>
-          </a:xfrm>
-          <a:prstGeom prst="rect">
-            <a:avLst/>
-          </a:prstGeom>
-          <a:noFill/>
-          <a:ln>
-            <a:noFill/>
-          </a:ln>
-        </p:spPr>
-        <p:txBody>
-          <a:bodyPr wrap="square" lIns="0" tIns="45720" rIns="0" bIns="45720" anchor="t"/>
-          <a:lstStyle/>
-          <a:p>
-            <a:pPr>
-              <a:buNone/>
-            </a:pPr>
-            <a:r>
-              <a:rPr lang="en-US" sz="1400" dirty="0">
-                <a:solidFill>
-                  <a:srgbClr val="3C3C3C"/>
-                </a:solidFill>
-              </a:rPr>
-              <a:t>Eine bereits genehmigte MCP-Config wird nachträglich verändert; Code läuft ohne erneute Freigabe.</a:t>
-            </a:r>
-          </a:p>
-        </p:txBody>
-      </p:sp>
-      <p:sp>
-        <p:nvSpPr>
-          <p:cNvPr id="115" name="Tag2"/>
-          <p:cNvSpPr txBox="1"/>
-          <p:nvPr/>
-        </p:nvSpPr>
-        <p:spPr>
-          <a:xfrm>
-            <a:off x="8001000" y="4140200"/>
-            <a:ext cx="3251200" cy="736600"/>
-          </a:xfrm>
-          <a:prstGeom prst="rect">
-            <a:avLst/>
-          </a:prstGeom>
-          <a:noFill/>
-          <a:ln>
-            <a:noFill/>
-          </a:ln>
-        </p:spPr>
-        <p:txBody>
-          <a:bodyPr wrap="square" lIns="0" tIns="45720" rIns="0" bIns="45720" anchor="ctr"/>
-          <a:lstStyle/>
-          <a:p>
-            <a:pPr>
-              <a:buNone/>
-            </a:pPr>
-            <a:r>
-              <a:rPr lang="en-US" sz="1400" b="1" dirty="0">
-                <a:solidFill>
-                  <a:srgbClr val="B1063A"/>
-                </a:solidFill>
-              </a:rPr>
-              <a:t>Rug Pull bei vertrauter Config</a:t>
-            </a:r>
-          </a:p>
-          <a:p>
-            <a:pPr>
-              <a:buNone/>
-            </a:pPr>
-            <a:r>
-              <a:rPr lang="en-US" sz="1200" dirty="0">
-                <a:solidFill>
-                  <a:srgbClr val="6E6E6E"/>
-                </a:solidFill>
-              </a:rPr>
-              <a:t>Quelle: Check Point Research</a:t>
-            </a:r>
-          </a:p>
-          <a:p>
-            <a:pPr>
-              <a:buNone/>
-            </a:pPr>
-            <a:r>
-              <a:rPr lang="en-US" sz="1000" dirty="0">
-                <a:solidFill>
-                  <a:srgbClr val="6E6E6E"/>
-                </a:solidFill>
-              </a:rPr>
-              <a:t>https://</a:t>
-            </a:r>
-            <a:r>
-              <a:rPr lang="en-US" sz="1000" dirty="0" err="1">
-                <a:solidFill>
-                  <a:srgbClr val="6E6E6E"/>
-                </a:solidFill>
-              </a:rPr>
-              <a:t>research.checkpoint.com</a:t>
-            </a:r>
-            <a:r>
-              <a:rPr lang="en-US" sz="1000" dirty="0">
-                <a:solidFill>
-                  <a:srgbClr val="6E6E6E"/>
-                </a:solidFill>
-              </a:rPr>
-              <a:t>/2025/cursor-vulnerability-</a:t>
-            </a:r>
-            <a:r>
-              <a:rPr lang="en-US" sz="1000" dirty="0" err="1">
-                <a:solidFill>
-                  <a:srgbClr val="6E6E6E"/>
-                </a:solidFill>
-              </a:rPr>
-              <a:t>mcpoison</a:t>
-            </a:r>
-            <a:r>
-              <a:rPr lang="en-US" sz="1000" dirty="0">
-                <a:solidFill>
-                  <a:srgbClr val="6E6E6E"/>
-                </a:solidFill>
-              </a:rPr>
-              <a:t>/</a:t>
-            </a:r>
-          </a:p>
-        </p:txBody>
-      </p:sp>
-      <p:sp>
-        <p:nvSpPr>
-          <p:cNvPr id="116" name="Close"/>
-          <p:cNvSpPr txBox="1"/>
-          <p:nvPr/>
-        </p:nvSpPr>
-        <p:spPr>
-          <a:xfrm>
-            <a:off x="762000" y="5334000"/>
-            <a:ext cx="10668000" cy="762000"/>
-          </a:xfrm>
-          <a:prstGeom prst="rect">
-            <a:avLst/>
-          </a:prstGeom>
-          <a:noFill/>
-          <a:ln>
-            <a:noFill/>
-          </a:ln>
-        </p:spPr>
-        <p:txBody>
-          <a:bodyPr wrap="square" lIns="91440" tIns="45720" rIns="91440" bIns="45720" anchor="t"/>
-          <a:lstStyle/>
-          <a:p>
-            <a:pPr>
-              <a:buNone/>
-            </a:pPr>
-            <a:r>
-              <a:rPr lang="en-US" sz="1800" b="1" dirty="0">
-                <a:solidFill>
-                  <a:srgbClr val="1A1A1A"/>
-                </a:solidFill>
-              </a:rPr>
-              <a:t>Drei verschiedene Fehlerarten: </a:t>
-            </a:r>
-            <a:r>
-              <a:rPr lang="en-US" sz="1800" b="1" dirty="0">
-                <a:solidFill>
-                  <a:srgbClr val="B1063A"/>
-                </a:solidFill>
-              </a:rPr>
-              <a:t>ein gekaperter Agent · ein bösartiger Server · eine vertraute Config, die unbemerkt geändert wurde.</a:t>
-            </a:r>
-          </a:p>
-        </p:txBody>
-      </p:sp>
-    </p:spTree>
-    <p:extLst>
-      <p:ext uri="{BB962C8B-B14F-4D97-AF65-F5344CB8AC3E}">
-        <p14:creationId xmlns:p14="http://schemas.microsoft.com/office/powerpoint/2010/main" val="3233517575"/>
       </p:ext>
     </p:extLst>
   </p:cSld>
